--- a/marketing-genius.pptx
+++ b/marketing-genius.pptx
@@ -15,6 +15,9 @@
     <p:sldId id="263" r:id="rId14"/>
     <p:sldId id="264" r:id="rId15"/>
     <p:sldId id="265" r:id="rId16"/>
+    <p:sldId id="266" r:id="rId17"/>
+    <p:sldId id="267" r:id="rId18"/>
+    <p:sldId id="268" r:id="rId19"/>
   </p:sldIdLst>
   <p:sldSz cx="12191695" cy="6858000" type="screen4x3"/>
   <p:notesSz cx="6858000" cy="9144000"/>
@@ -3234,7 +3237,7 @@
         </p:nvSpPr>
         <p:spPr>
           <a:xfrm>
-            <a:off x="548640" y="1645920"/>
+            <a:off x="548640" y="1554480"/>
             <a:ext cx="5181904" cy="320040"/>
           </a:xfrm>
           <a:prstGeom prst="rect">
@@ -3269,7 +3272,7 @@
         </p:nvSpPr>
         <p:spPr>
           <a:xfrm>
-            <a:off x="548640" y="2057400"/>
+            <a:off x="548640" y="1938528"/>
             <a:ext cx="5181904" cy="1280160"/>
           </a:xfrm>
           <a:prstGeom prst="rect">
@@ -3316,7 +3319,7 @@
         </p:nvSpPr>
         <p:spPr>
           <a:xfrm>
-            <a:off x="548640" y="3429000"/>
+            <a:off x="548640" y="3310128"/>
             <a:ext cx="914400" cy="45720"/>
           </a:xfrm>
           <a:prstGeom prst="rect">
@@ -3359,8 +3362,8 @@
         </p:nvSpPr>
         <p:spPr>
           <a:xfrm>
-            <a:off x="548640" y="3566160"/>
-            <a:ext cx="5181904" cy="640080"/>
+            <a:off x="548640" y="3456432"/>
+            <a:ext cx="5181904" cy="594360"/>
           </a:xfrm>
           <a:prstGeom prst="rect">
             <a:avLst/>
@@ -3394,7 +3397,7 @@
         </p:nvSpPr>
         <p:spPr>
           <a:xfrm>
-            <a:off x="548640" y="4389120"/>
+            <a:off x="548640" y="4206240"/>
             <a:ext cx="45720" cy="685800"/>
           </a:xfrm>
           <a:prstGeom prst="rect">
@@ -3437,7 +3440,7 @@
         </p:nvSpPr>
         <p:spPr>
           <a:xfrm>
-            <a:off x="594360" y="4389120"/>
+            <a:off x="594360" y="4206240"/>
             <a:ext cx="5136184" cy="685800"/>
           </a:xfrm>
           <a:prstGeom prst="rect">
@@ -3480,7 +3483,7 @@
         </p:nvSpPr>
         <p:spPr>
           <a:xfrm>
-            <a:off x="731520" y="4462272"/>
+            <a:off x="731520" y="4279392"/>
             <a:ext cx="4907584" cy="292608"/>
           </a:xfrm>
           <a:prstGeom prst="rect">
@@ -3515,7 +3518,7 @@
         </p:nvSpPr>
         <p:spPr>
           <a:xfrm>
-            <a:off x="731520" y="4736592"/>
+            <a:off x="731520" y="4553712"/>
             <a:ext cx="4907584" cy="274320"/>
           </a:xfrm>
           <a:prstGeom prst="rect">
@@ -3854,8 +3857,8 @@
         </p:nvSpPr>
         <p:spPr>
           <a:xfrm>
-            <a:off x="10728655" y="6400800"/>
-            <a:ext cx="1371600" cy="365760"/>
+            <a:off x="10545775" y="6400800"/>
+            <a:ext cx="1554480" cy="365760"/>
           </a:xfrm>
           <a:prstGeom prst="rect">
             <a:avLst/>
@@ -3876,7 +3879,7 @@
                 </a:solidFill>
                 <a:latin typeface="Noto Sans KR"/>
               </a:rPr>
-              <a:t>01 / 10</a:t>
+              <a:t>01 / 13</a:t>
             </a:r>
           </a:p>
         </p:txBody>
@@ -3908,7 +3911,93 @@
         <p:spPr>
           <a:xfrm>
             <a:off x="0" y="0"/>
-            <a:ext cx="6096304" cy="6858000"/>
+            <a:ext cx="12191695" cy="6858000"/>
+          </a:xfrm>
+          <a:prstGeom prst="rect">
+            <a:avLst/>
+          </a:prstGeom>
+          <a:solidFill>
+            <a:srgbClr val="FFFFFF"/>
+          </a:solidFill>
+          <a:ln>
+            <a:noFill/>
+          </a:ln>
+        </p:spPr>
+        <p:style>
+          <a:lnRef idx="1">
+            <a:schemeClr val="accent1"/>
+          </a:lnRef>
+          <a:fillRef idx="3">
+            <a:schemeClr val="accent1"/>
+          </a:fillRef>
+          <a:effectRef idx="2">
+            <a:schemeClr val="accent1"/>
+          </a:effectRef>
+          <a:fontRef idx="minor">
+            <a:schemeClr val="lt1"/>
+          </a:fontRef>
+        </p:style>
+        <p:txBody>
+          <a:bodyPr rtlCol="0" anchor="ctr"/>
+          <a:lstStyle/>
+          <a:p>
+            <a:pPr algn="ctr"/>
+          </a:p>
+        </p:txBody>
+      </p:sp>
+      <p:sp>
+        <p:nvSpPr>
+          <p:cNvPr id="3" name="Rectangle 2"/>
+          <p:cNvSpPr/>
+          <p:nvPr/>
+        </p:nvSpPr>
+        <p:spPr>
+          <a:xfrm>
+            <a:off x="0" y="0"/>
+            <a:ext cx="12191695" cy="502920"/>
+          </a:xfrm>
+          <a:prstGeom prst="rect">
+            <a:avLst/>
+          </a:prstGeom>
+          <a:solidFill>
+            <a:srgbClr val="0F1923"/>
+          </a:solidFill>
+          <a:ln>
+            <a:noFill/>
+          </a:ln>
+        </p:spPr>
+        <p:style>
+          <a:lnRef idx="1">
+            <a:schemeClr val="accent1"/>
+          </a:lnRef>
+          <a:fillRef idx="3">
+            <a:schemeClr val="accent1"/>
+          </a:fillRef>
+          <a:effectRef idx="2">
+            <a:schemeClr val="accent1"/>
+          </a:effectRef>
+          <a:fontRef idx="minor">
+            <a:schemeClr val="lt1"/>
+          </a:fontRef>
+        </p:style>
+        <p:txBody>
+          <a:bodyPr rtlCol="0" anchor="ctr"/>
+          <a:lstStyle/>
+          <a:p>
+            <a:pPr algn="ctr"/>
+          </a:p>
+        </p:txBody>
+      </p:sp>
+      <p:sp>
+        <p:nvSpPr>
+          <p:cNvPr id="4" name="Rectangle 3"/>
+          <p:cNvSpPr/>
+          <p:nvPr/>
+        </p:nvSpPr>
+        <p:spPr>
+          <a:xfrm>
+            <a:off x="0" y="0"/>
+            <a:ext cx="45720" cy="502920"/>
           </a:xfrm>
           <a:prstGeom prst="rect">
             <a:avLst/>
@@ -3944,14 +4033,197 @@
       </p:sp>
       <p:sp>
         <p:nvSpPr>
-          <p:cNvPr id="3" name="Rectangle 2"/>
+          <p:cNvPr id="5" name="TextBox 4"/>
+          <p:cNvSpPr txBox="1"/>
+          <p:nvPr/>
+        </p:nvSpPr>
+        <p:spPr>
+          <a:xfrm>
+            <a:off x="548640" y="0"/>
+            <a:ext cx="2743200" cy="502920"/>
+          </a:xfrm>
+          <a:prstGeom prst="rect">
+            <a:avLst/>
+          </a:prstGeom>
+          <a:noFill/>
+        </p:spPr>
+        <p:txBody>
+          <a:bodyPr wrap="square">
+            <a:spAutoFit/>
+          </a:bodyPr>
+          <a:lstStyle/>
+          <a:p>
+            <a:pPr algn="l"/>
+            <a:r>
+              <a:rPr sz="1000" b="1">
+                <a:solidFill>
+                  <a:srgbClr val="FFFFFF"/>
+                </a:solidFill>
+                <a:latin typeface="Noto Sans KR"/>
+              </a:rPr>
+              <a:t>마케팅천재</a:t>
+            </a:r>
+          </a:p>
+        </p:txBody>
+      </p:sp>
+      <p:sp>
+        <p:nvSpPr>
+          <p:cNvPr id="6" name="TextBox 5"/>
+          <p:cNvSpPr txBox="1"/>
+          <p:nvPr/>
+        </p:nvSpPr>
+        <p:spPr>
+          <a:xfrm>
+            <a:off x="8534095" y="0"/>
+            <a:ext cx="3108960" cy="502920"/>
+          </a:xfrm>
+          <a:prstGeom prst="rect">
+            <a:avLst/>
+          </a:prstGeom>
+          <a:noFill/>
+        </p:spPr>
+        <p:txBody>
+          <a:bodyPr wrap="square">
+            <a:spAutoFit/>
+          </a:bodyPr>
+          <a:lstStyle/>
+          <a:p>
+            <a:pPr algn="r"/>
+            <a:r>
+              <a:rPr sz="900" b="0">
+                <a:solidFill>
+                  <a:srgbClr val="FFFFFF"/>
+                </a:solidFill>
+                <a:latin typeface="Noto Sans KR"/>
+              </a:rPr>
+              <a:t>FAQ 06 + 07</a:t>
+            </a:r>
+          </a:p>
+        </p:txBody>
+      </p:sp>
+      <p:sp>
+        <p:nvSpPr>
+          <p:cNvPr id="7" name="Rectangle 6"/>
           <p:cNvSpPr/>
           <p:nvPr/>
         </p:nvSpPr>
         <p:spPr>
           <a:xfrm>
-            <a:off x="6096304" y="0"/>
-            <a:ext cx="6096304" cy="6858000"/>
+            <a:off x="0" y="6510528"/>
+            <a:ext cx="12191695" cy="347472"/>
+          </a:xfrm>
+          <a:prstGeom prst="rect">
+            <a:avLst/>
+          </a:prstGeom>
+          <a:solidFill>
+            <a:srgbClr val="1A6FD8"/>
+          </a:solidFill>
+          <a:ln>
+            <a:noFill/>
+          </a:ln>
+        </p:spPr>
+        <p:style>
+          <a:lnRef idx="1">
+            <a:schemeClr val="accent1"/>
+          </a:lnRef>
+          <a:fillRef idx="3">
+            <a:schemeClr val="accent1"/>
+          </a:fillRef>
+          <a:effectRef idx="2">
+            <a:schemeClr val="accent1"/>
+          </a:effectRef>
+          <a:fontRef idx="minor">
+            <a:schemeClr val="lt1"/>
+          </a:fontRef>
+        </p:style>
+        <p:txBody>
+          <a:bodyPr rtlCol="0" anchor="ctr"/>
+          <a:lstStyle/>
+          <a:p>
+            <a:pPr algn="ctr"/>
+          </a:p>
+        </p:txBody>
+      </p:sp>
+      <p:sp>
+        <p:nvSpPr>
+          <p:cNvPr id="8" name="TextBox 7"/>
+          <p:cNvSpPr txBox="1"/>
+          <p:nvPr/>
+        </p:nvSpPr>
+        <p:spPr>
+          <a:xfrm>
+            <a:off x="548640" y="6510528"/>
+            <a:ext cx="4572000" cy="347472"/>
+          </a:xfrm>
+          <a:prstGeom prst="rect">
+            <a:avLst/>
+          </a:prstGeom>
+          <a:noFill/>
+        </p:spPr>
+        <p:txBody>
+          <a:bodyPr wrap="square">
+            <a:spAutoFit/>
+          </a:bodyPr>
+          <a:lstStyle/>
+          <a:p>
+            <a:pPr algn="l"/>
+            <a:r>
+              <a:rPr sz="800" b="0">
+                <a:solidFill>
+                  <a:srgbClr val="FFFFFF"/>
+                </a:solidFill>
+                <a:latin typeface="Noto Sans KR"/>
+              </a:rPr>
+              <a:t>마케팅천재 · 대표 정귀명</a:t>
+            </a:r>
+          </a:p>
+        </p:txBody>
+      </p:sp>
+      <p:sp>
+        <p:nvSpPr>
+          <p:cNvPr id="9" name="TextBox 8"/>
+          <p:cNvSpPr txBox="1"/>
+          <p:nvPr/>
+        </p:nvSpPr>
+        <p:spPr>
+          <a:xfrm>
+            <a:off x="10362895" y="6510528"/>
+            <a:ext cx="1554480" cy="347472"/>
+          </a:xfrm>
+          <a:prstGeom prst="rect">
+            <a:avLst/>
+          </a:prstGeom>
+          <a:noFill/>
+        </p:spPr>
+        <p:txBody>
+          <a:bodyPr wrap="square">
+            <a:spAutoFit/>
+          </a:bodyPr>
+          <a:lstStyle/>
+          <a:p>
+            <a:pPr algn="r"/>
+            <a:r>
+              <a:rPr sz="800" b="0">
+                <a:solidFill>
+                  <a:srgbClr val="FFFFFF"/>
+                </a:solidFill>
+                <a:latin typeface="Noto Sans KR"/>
+              </a:rPr>
+              <a:t>10 / 13</a:t>
+            </a:r>
+          </a:p>
+        </p:txBody>
+      </p:sp>
+      <p:sp>
+        <p:nvSpPr>
+          <p:cNvPr id="10" name="Rectangle 9"/>
+          <p:cNvSpPr/>
+          <p:nvPr/>
+        </p:nvSpPr>
+        <p:spPr>
+          <a:xfrm>
+            <a:off x="0" y="502920"/>
+            <a:ext cx="6096304" cy="6007608"/>
           </a:xfrm>
           <a:prstGeom prst="rect">
             <a:avLst/>
@@ -3987,36 +4259,1463 @@
       </p:sp>
       <p:sp>
         <p:nvSpPr>
-          <p:cNvPr id="4" name="TextBox 3"/>
-          <p:cNvSpPr txBox="1"/>
-          <p:nvPr/>
-        </p:nvSpPr>
-        <p:spPr>
-          <a:xfrm>
-            <a:off x="640080" y="1280160"/>
-            <a:ext cx="5090464" cy="347472"/>
-          </a:xfrm>
-          <a:prstGeom prst="rect">
-            <a:avLst/>
-          </a:prstGeom>
-          <a:noFill/>
-        </p:spPr>
-        <p:txBody>
-          <a:bodyPr wrap="square">
-            <a:spAutoFit/>
-          </a:bodyPr>
-          <a:lstStyle/>
-          <a:p>
-            <a:pPr algn="l"/>
-            <a:r>
-              <a:rPr sz="900" b="1">
-                <a:solidFill>
-                  <a:srgbClr val="CCDDFF"/>
-                </a:solidFill>
-                <a:latin typeface="Noto Sans KR"/>
-              </a:rPr>
-              <a:t>마케팅 투자 대비 수익률</a:t>
-            </a:r>
+          <p:cNvPr id="11" name="Rectangle 10"/>
+          <p:cNvSpPr/>
+          <p:nvPr/>
+        </p:nvSpPr>
+        <p:spPr>
+          <a:xfrm>
+            <a:off x="548640" y="685800"/>
+            <a:ext cx="1097280" cy="292608"/>
+          </a:xfrm>
+          <a:prstGeom prst="rect">
+            <a:avLst/>
+          </a:prstGeom>
+          <a:solidFill>
+            <a:srgbClr val="E8F0FB"/>
+          </a:solidFill>
+          <a:ln w="12700">
+            <a:solidFill>
+              <a:srgbClr val="1A6FD8"/>
+            </a:solidFill>
+          </a:ln>
+        </p:spPr>
+        <p:style>
+          <a:lnRef idx="1">
+            <a:schemeClr val="accent1"/>
+          </a:lnRef>
+          <a:fillRef idx="3">
+            <a:schemeClr val="accent1"/>
+          </a:fillRef>
+          <a:effectRef idx="2">
+            <a:schemeClr val="accent1"/>
+          </a:effectRef>
+          <a:fontRef idx="minor">
+            <a:schemeClr val="lt1"/>
+          </a:fontRef>
+        </p:style>
+        <p:txBody>
+          <a:bodyPr rtlCol="0" anchor="ctr"/>
+          <a:lstStyle/>
+          <a:p>
+            <a:pPr algn="ctr"/>
+          </a:p>
+        </p:txBody>
+      </p:sp>
+      <p:sp>
+        <p:nvSpPr>
+          <p:cNvPr id="12" name="TextBox 11"/>
+          <p:cNvSpPr txBox="1"/>
+          <p:nvPr/>
+        </p:nvSpPr>
+        <p:spPr>
+          <a:xfrm>
+            <a:off x="621792" y="685800"/>
+            <a:ext cx="1005840" cy="292608"/>
+          </a:xfrm>
+          <a:prstGeom prst="rect">
+            <a:avLst/>
+          </a:prstGeom>
+          <a:noFill/>
+        </p:spPr>
+        <p:txBody>
+          <a:bodyPr wrap="square">
+            <a:spAutoFit/>
+          </a:bodyPr>
+          <a:lstStyle/>
+          <a:p>
+            <a:pPr algn="l"/>
+            <a:r>
+              <a:rPr sz="800" b="1">
+                <a:solidFill>
+                  <a:srgbClr val="1A6FD8"/>
+                </a:solidFill>
+                <a:latin typeface="Noto Sans KR"/>
+              </a:rPr>
+              <a:t>FAQ 06</a:t>
+            </a:r>
+          </a:p>
+        </p:txBody>
+      </p:sp>
+      <p:sp>
+        <p:nvSpPr>
+          <p:cNvPr id="13" name="TextBox 12"/>
+          <p:cNvSpPr txBox="1"/>
+          <p:nvPr/>
+        </p:nvSpPr>
+        <p:spPr>
+          <a:xfrm>
+            <a:off x="548640" y="1033272"/>
+            <a:ext cx="5456224" cy="914400"/>
+          </a:xfrm>
+          <a:prstGeom prst="rect">
+            <a:avLst/>
+          </a:prstGeom>
+          <a:noFill/>
+        </p:spPr>
+        <p:txBody>
+          <a:bodyPr wrap="square">
+            <a:spAutoFit/>
+          </a:bodyPr>
+          <a:lstStyle/>
+          <a:p>
+            <a:pPr algn="l"/>
+            <a:r>
+              <a:rPr sz="1800" b="1">
+                <a:solidFill>
+                  <a:srgbClr val="0F1923"/>
+                </a:solidFill>
+                <a:latin typeface="Noto Serif KR"/>
+              </a:rPr>
+              <a:t>노출은 되는데</a:t>
+            </a:r>
+          </a:p>
+          <a:p>
+            <a:pPr algn="l"/>
+            <a:r>
+              <a:rPr sz="1800" b="1">
+                <a:solidFill>
+                  <a:srgbClr val="1A6FD8"/>
+                </a:solidFill>
+                <a:latin typeface="Noto Serif KR"/>
+              </a:rPr>
+              <a:t>왜 환자가 안 올까요?</a:t>
+            </a:r>
+          </a:p>
+        </p:txBody>
+      </p:sp>
+      <p:sp>
+        <p:nvSpPr>
+          <p:cNvPr id="14" name="Rectangle 13"/>
+          <p:cNvSpPr/>
+          <p:nvPr/>
+        </p:nvSpPr>
+        <p:spPr>
+          <a:xfrm>
+            <a:off x="548640" y="2075688"/>
+            <a:ext cx="54864" cy="594360"/>
+          </a:xfrm>
+          <a:prstGeom prst="rect">
+            <a:avLst/>
+          </a:prstGeom>
+          <a:solidFill>
+            <a:srgbClr val="1A6FD8"/>
+          </a:solidFill>
+          <a:ln>
+            <a:noFill/>
+          </a:ln>
+        </p:spPr>
+        <p:style>
+          <a:lnRef idx="1">
+            <a:schemeClr val="accent1"/>
+          </a:lnRef>
+          <a:fillRef idx="3">
+            <a:schemeClr val="accent1"/>
+          </a:fillRef>
+          <a:effectRef idx="2">
+            <a:schemeClr val="accent1"/>
+          </a:effectRef>
+          <a:fontRef idx="minor">
+            <a:schemeClr val="lt1"/>
+          </a:fontRef>
+        </p:style>
+        <p:txBody>
+          <a:bodyPr rtlCol="0" anchor="ctr"/>
+          <a:lstStyle/>
+          <a:p>
+            <a:pPr algn="ctr"/>
+          </a:p>
+        </p:txBody>
+      </p:sp>
+      <p:sp>
+        <p:nvSpPr>
+          <p:cNvPr id="15" name="Rectangle 14"/>
+          <p:cNvSpPr/>
+          <p:nvPr/>
+        </p:nvSpPr>
+        <p:spPr>
+          <a:xfrm>
+            <a:off x="603504" y="2075688"/>
+            <a:ext cx="5401360" cy="594360"/>
+          </a:xfrm>
+          <a:prstGeom prst="rect">
+            <a:avLst/>
+          </a:prstGeom>
+          <a:solidFill>
+            <a:srgbClr val="EBF2FC"/>
+          </a:solidFill>
+          <a:ln>
+            <a:noFill/>
+          </a:ln>
+        </p:spPr>
+        <p:style>
+          <a:lnRef idx="1">
+            <a:schemeClr val="accent1"/>
+          </a:lnRef>
+          <a:fillRef idx="3">
+            <a:schemeClr val="accent1"/>
+          </a:fillRef>
+          <a:effectRef idx="2">
+            <a:schemeClr val="accent1"/>
+          </a:effectRef>
+          <a:fontRef idx="minor">
+            <a:schemeClr val="lt1"/>
+          </a:fontRef>
+        </p:style>
+        <p:txBody>
+          <a:bodyPr rtlCol="0" anchor="ctr"/>
+          <a:lstStyle/>
+          <a:p>
+            <a:pPr algn="ctr"/>
+          </a:p>
+        </p:txBody>
+      </p:sp>
+      <p:sp>
+        <p:nvSpPr>
+          <p:cNvPr id="16" name="TextBox 15"/>
+          <p:cNvSpPr txBox="1"/>
+          <p:nvPr/>
+        </p:nvSpPr>
+        <p:spPr>
+          <a:xfrm>
+            <a:off x="685800" y="2112264"/>
+            <a:ext cx="548640" cy="256032"/>
+          </a:xfrm>
+          <a:prstGeom prst="rect">
+            <a:avLst/>
+          </a:prstGeom>
+          <a:noFill/>
+        </p:spPr>
+        <p:txBody>
+          <a:bodyPr wrap="square">
+            <a:spAutoFit/>
+          </a:bodyPr>
+          <a:lstStyle/>
+          <a:p>
+            <a:pPr algn="l"/>
+            <a:r>
+              <a:rPr sz="800" b="1">
+                <a:solidFill>
+                  <a:srgbClr val="1A6FD8"/>
+                </a:solidFill>
+                <a:latin typeface="Noto Sans KR"/>
+              </a:rPr>
+              <a:t>✅ A.</a:t>
+            </a:r>
+          </a:p>
+        </p:txBody>
+      </p:sp>
+      <p:sp>
+        <p:nvSpPr>
+          <p:cNvPr id="17" name="TextBox 16"/>
+          <p:cNvSpPr txBox="1"/>
+          <p:nvPr/>
+        </p:nvSpPr>
+        <p:spPr>
+          <a:xfrm>
+            <a:off x="685800" y="2331720"/>
+            <a:ext cx="5181904" cy="338328"/>
+          </a:xfrm>
+          <a:prstGeom prst="rect">
+            <a:avLst/>
+          </a:prstGeom>
+          <a:noFill/>
+        </p:spPr>
+        <p:txBody>
+          <a:bodyPr wrap="square">
+            <a:spAutoFit/>
+          </a:bodyPr>
+          <a:lstStyle/>
+          <a:p>
+            <a:pPr algn="l"/>
+            <a:r>
+              <a:rPr sz="1000" b="0">
+                <a:solidFill>
+                  <a:srgbClr val="0F1923"/>
+                </a:solidFill>
+                <a:latin typeface="Noto Sans KR"/>
+              </a:rPr>
+              <a:t>상위노출은 '입장권'일 뿐. 환자가 내원을 결정하는 건 결국 '설득력'입니다.</a:t>
+            </a:r>
+          </a:p>
+        </p:txBody>
+      </p:sp>
+      <p:sp>
+        <p:nvSpPr>
+          <p:cNvPr id="18" name="TextBox 17"/>
+          <p:cNvSpPr txBox="1"/>
+          <p:nvPr/>
+        </p:nvSpPr>
+        <p:spPr>
+          <a:xfrm>
+            <a:off x="548640" y="2807208"/>
+            <a:ext cx="5456224" cy="292608"/>
+          </a:xfrm>
+          <a:prstGeom prst="rect">
+            <a:avLst/>
+          </a:prstGeom>
+          <a:noFill/>
+        </p:spPr>
+        <p:txBody>
+          <a:bodyPr wrap="square">
+            <a:spAutoFit/>
+          </a:bodyPr>
+          <a:lstStyle/>
+          <a:p>
+            <a:pPr algn="l"/>
+            <a:r>
+              <a:rPr sz="1000" b="1">
+                <a:solidFill>
+                  <a:srgbClr val="0F1923"/>
+                </a:solidFill>
+                <a:latin typeface="Noto Sans KR"/>
+              </a:rPr>
+              <a:t>노출을 '내원'으로 바꾸는 전환 공식</a:t>
+            </a:r>
+          </a:p>
+        </p:txBody>
+      </p:sp>
+      <p:sp>
+        <p:nvSpPr>
+          <p:cNvPr id="19" name="Rectangle 18"/>
+          <p:cNvSpPr/>
+          <p:nvPr/>
+        </p:nvSpPr>
+        <p:spPr>
+          <a:xfrm>
+            <a:off x="548640" y="3246120"/>
+            <a:ext cx="45720" cy="502920"/>
+          </a:xfrm>
+          <a:prstGeom prst="rect">
+            <a:avLst/>
+          </a:prstGeom>
+          <a:solidFill>
+            <a:srgbClr val="1A6FD8"/>
+          </a:solidFill>
+          <a:ln>
+            <a:noFill/>
+          </a:ln>
+        </p:spPr>
+        <p:style>
+          <a:lnRef idx="1">
+            <a:schemeClr val="accent1"/>
+          </a:lnRef>
+          <a:fillRef idx="3">
+            <a:schemeClr val="accent1"/>
+          </a:fillRef>
+          <a:effectRef idx="2">
+            <a:schemeClr val="accent1"/>
+          </a:effectRef>
+          <a:fontRef idx="minor">
+            <a:schemeClr val="lt1"/>
+          </a:fontRef>
+        </p:style>
+        <p:txBody>
+          <a:bodyPr rtlCol="0" anchor="ctr"/>
+          <a:lstStyle/>
+          <a:p>
+            <a:pPr algn="ctr"/>
+          </a:p>
+        </p:txBody>
+      </p:sp>
+      <p:sp>
+        <p:nvSpPr>
+          <p:cNvPr id="20" name="TextBox 19"/>
+          <p:cNvSpPr txBox="1"/>
+          <p:nvPr/>
+        </p:nvSpPr>
+        <p:spPr>
+          <a:xfrm>
+            <a:off x="685800" y="3200400"/>
+            <a:ext cx="5273344" cy="256032"/>
+          </a:xfrm>
+          <a:prstGeom prst="rect">
+            <a:avLst/>
+          </a:prstGeom>
+          <a:noFill/>
+        </p:spPr>
+        <p:txBody>
+          <a:bodyPr wrap="square">
+            <a:spAutoFit/>
+          </a:bodyPr>
+          <a:lstStyle/>
+          <a:p>
+            <a:pPr algn="l"/>
+            <a:r>
+              <a:rPr sz="1000" b="1">
+                <a:solidFill>
+                  <a:srgbClr val="0F1923"/>
+                </a:solidFill>
+                <a:latin typeface="Noto Sans KR"/>
+              </a:rPr>
+              <a:t>클릭은 기술, 내원은 심리</a:t>
+            </a:r>
+          </a:p>
+        </p:txBody>
+      </p:sp>
+      <p:sp>
+        <p:nvSpPr>
+          <p:cNvPr id="21" name="TextBox 20"/>
+          <p:cNvSpPr txBox="1"/>
+          <p:nvPr/>
+        </p:nvSpPr>
+        <p:spPr>
+          <a:xfrm>
+            <a:off x="685800" y="3456432"/>
+            <a:ext cx="5273344" cy="320040"/>
+          </a:xfrm>
+          <a:prstGeom prst="rect">
+            <a:avLst/>
+          </a:prstGeom>
+          <a:noFill/>
+        </p:spPr>
+        <p:txBody>
+          <a:bodyPr wrap="square">
+            <a:spAutoFit/>
+          </a:bodyPr>
+          <a:lstStyle/>
+          <a:p>
+            <a:pPr algn="l"/>
+            <a:r>
+              <a:rPr sz="900" b="0">
+                <a:solidFill>
+                  <a:srgbClr val="4A5568"/>
+                </a:solidFill>
+                <a:latin typeface="Noto Sans KR"/>
+              </a:rPr>
+              <a:t>결핍을 분석해 그 결핍을 채우는 [심리 기획 원고] 작성</a:t>
+            </a:r>
+          </a:p>
+        </p:txBody>
+      </p:sp>
+      <p:sp>
+        <p:nvSpPr>
+          <p:cNvPr id="22" name="Rectangle 21"/>
+          <p:cNvSpPr/>
+          <p:nvPr/>
+        </p:nvSpPr>
+        <p:spPr>
+          <a:xfrm>
+            <a:off x="548640" y="3886200"/>
+            <a:ext cx="45720" cy="502920"/>
+          </a:xfrm>
+          <a:prstGeom prst="rect">
+            <a:avLst/>
+          </a:prstGeom>
+          <a:solidFill>
+            <a:srgbClr val="1A6FD8"/>
+          </a:solidFill>
+          <a:ln>
+            <a:noFill/>
+          </a:ln>
+        </p:spPr>
+        <p:style>
+          <a:lnRef idx="1">
+            <a:schemeClr val="accent1"/>
+          </a:lnRef>
+          <a:fillRef idx="3">
+            <a:schemeClr val="accent1"/>
+          </a:fillRef>
+          <a:effectRef idx="2">
+            <a:schemeClr val="accent1"/>
+          </a:effectRef>
+          <a:fontRef idx="minor">
+            <a:schemeClr val="lt1"/>
+          </a:fontRef>
+        </p:style>
+        <p:txBody>
+          <a:bodyPr rtlCol="0" anchor="ctr"/>
+          <a:lstStyle/>
+          <a:p>
+            <a:pPr algn="ctr"/>
+          </a:p>
+        </p:txBody>
+      </p:sp>
+      <p:sp>
+        <p:nvSpPr>
+          <p:cNvPr id="23" name="TextBox 22"/>
+          <p:cNvSpPr txBox="1"/>
+          <p:nvPr/>
+        </p:nvSpPr>
+        <p:spPr>
+          <a:xfrm>
+            <a:off x="685800" y="3840480"/>
+            <a:ext cx="5273344" cy="256032"/>
+          </a:xfrm>
+          <a:prstGeom prst="rect">
+            <a:avLst/>
+          </a:prstGeom>
+          <a:noFill/>
+        </p:spPr>
+        <p:txBody>
+          <a:bodyPr wrap="square">
+            <a:spAutoFit/>
+          </a:bodyPr>
+          <a:lstStyle/>
+          <a:p>
+            <a:pPr algn="l"/>
+            <a:r>
+              <a:rPr sz="1000" b="1">
+                <a:solidFill>
+                  <a:srgbClr val="0F1923"/>
+                </a:solidFill>
+                <a:latin typeface="Noto Sans KR"/>
+              </a:rPr>
+              <a:t>첫인상에서 신뢰 확보</a:t>
+            </a:r>
+          </a:p>
+        </p:txBody>
+      </p:sp>
+      <p:sp>
+        <p:nvSpPr>
+          <p:cNvPr id="24" name="TextBox 23"/>
+          <p:cNvSpPr txBox="1"/>
+          <p:nvPr/>
+        </p:nvSpPr>
+        <p:spPr>
+          <a:xfrm>
+            <a:off x="685800" y="4096512"/>
+            <a:ext cx="5273344" cy="320040"/>
+          </a:xfrm>
+          <a:prstGeom prst="rect">
+            <a:avLst/>
+          </a:prstGeom>
+          <a:noFill/>
+        </p:spPr>
+        <p:txBody>
+          <a:bodyPr wrap="square">
+            <a:spAutoFit/>
+          </a:bodyPr>
+          <a:lstStyle/>
+          <a:p>
+            <a:pPr algn="l"/>
+            <a:r>
+              <a:rPr sz="900" b="0">
+                <a:solidFill>
+                  <a:srgbClr val="4A5568"/>
+                </a:solidFill>
+                <a:latin typeface="Noto Sans KR"/>
+              </a:rPr>
+              <a:t>병원의 격에 맞는 프리미엄 디자인 결합</a:t>
+            </a:r>
+          </a:p>
+        </p:txBody>
+      </p:sp>
+      <p:sp>
+        <p:nvSpPr>
+          <p:cNvPr id="25" name="Rectangle 24"/>
+          <p:cNvSpPr/>
+          <p:nvPr/>
+        </p:nvSpPr>
+        <p:spPr>
+          <a:xfrm>
+            <a:off x="548640" y="4526280"/>
+            <a:ext cx="45720" cy="502920"/>
+          </a:xfrm>
+          <a:prstGeom prst="rect">
+            <a:avLst/>
+          </a:prstGeom>
+          <a:solidFill>
+            <a:srgbClr val="1A6FD8"/>
+          </a:solidFill>
+          <a:ln>
+            <a:noFill/>
+          </a:ln>
+        </p:spPr>
+        <p:style>
+          <a:lnRef idx="1">
+            <a:schemeClr val="accent1"/>
+          </a:lnRef>
+          <a:fillRef idx="3">
+            <a:schemeClr val="accent1"/>
+          </a:fillRef>
+          <a:effectRef idx="2">
+            <a:schemeClr val="accent1"/>
+          </a:effectRef>
+          <a:fontRef idx="minor">
+            <a:schemeClr val="lt1"/>
+          </a:fontRef>
+        </p:style>
+        <p:txBody>
+          <a:bodyPr rtlCol="0" anchor="ctr"/>
+          <a:lstStyle/>
+          <a:p>
+            <a:pPr algn="ctr"/>
+          </a:p>
+        </p:txBody>
+      </p:sp>
+      <p:sp>
+        <p:nvSpPr>
+          <p:cNvPr id="26" name="TextBox 25"/>
+          <p:cNvSpPr txBox="1"/>
+          <p:nvPr/>
+        </p:nvSpPr>
+        <p:spPr>
+          <a:xfrm>
+            <a:off x="685800" y="4480560"/>
+            <a:ext cx="5273344" cy="256032"/>
+          </a:xfrm>
+          <a:prstGeom prst="rect">
+            <a:avLst/>
+          </a:prstGeom>
+          <a:noFill/>
+        </p:spPr>
+        <p:txBody>
+          <a:bodyPr wrap="square">
+            <a:spAutoFit/>
+          </a:bodyPr>
+          <a:lstStyle/>
+          <a:p>
+            <a:pPr algn="l"/>
+            <a:r>
+              <a:rPr sz="1000" b="1">
+                <a:solidFill>
+                  <a:srgbClr val="0F1923"/>
+                </a:solidFill>
+                <a:latin typeface="Noto Sans KR"/>
+              </a:rPr>
+              <a:t>전문성 있는 컨텐츠 제공</a:t>
+            </a:r>
+          </a:p>
+        </p:txBody>
+      </p:sp>
+      <p:sp>
+        <p:nvSpPr>
+          <p:cNvPr id="27" name="TextBox 26"/>
+          <p:cNvSpPr txBox="1"/>
+          <p:nvPr/>
+        </p:nvSpPr>
+        <p:spPr>
+          <a:xfrm>
+            <a:off x="685800" y="4736592"/>
+            <a:ext cx="5273344" cy="320040"/>
+          </a:xfrm>
+          <a:prstGeom prst="rect">
+            <a:avLst/>
+          </a:prstGeom>
+          <a:noFill/>
+        </p:spPr>
+        <p:txBody>
+          <a:bodyPr wrap="square">
+            <a:spAutoFit/>
+          </a:bodyPr>
+          <a:lstStyle/>
+          <a:p>
+            <a:pPr algn="l"/>
+            <a:r>
+              <a:rPr sz="900" b="0">
+                <a:solidFill>
+                  <a:srgbClr val="4A5568"/>
+                </a:solidFill>
+                <a:latin typeface="Noto Sans KR"/>
+              </a:rPr>
+              <a:t>AI 검색 로직에 맞춘 깊이 있는 정보로 신뢰 형성</a:t>
+            </a:r>
+          </a:p>
+        </p:txBody>
+      </p:sp>
+      <p:sp>
+        <p:nvSpPr>
+          <p:cNvPr id="28" name="Rectangle 27"/>
+          <p:cNvSpPr/>
+          <p:nvPr/>
+        </p:nvSpPr>
+        <p:spPr>
+          <a:xfrm>
+            <a:off x="6187744" y="685800"/>
+            <a:ext cx="1097280" cy="292608"/>
+          </a:xfrm>
+          <a:prstGeom prst="rect">
+            <a:avLst/>
+          </a:prstGeom>
+          <a:solidFill>
+            <a:srgbClr val="E8F0FB"/>
+          </a:solidFill>
+          <a:ln w="12700">
+            <a:solidFill>
+              <a:srgbClr val="1A6FD8"/>
+            </a:solidFill>
+          </a:ln>
+        </p:spPr>
+        <p:style>
+          <a:lnRef idx="1">
+            <a:schemeClr val="accent1"/>
+          </a:lnRef>
+          <a:fillRef idx="3">
+            <a:schemeClr val="accent1"/>
+          </a:fillRef>
+          <a:effectRef idx="2">
+            <a:schemeClr val="accent1"/>
+          </a:effectRef>
+          <a:fontRef idx="minor">
+            <a:schemeClr val="lt1"/>
+          </a:fontRef>
+        </p:style>
+        <p:txBody>
+          <a:bodyPr rtlCol="0" anchor="ctr"/>
+          <a:lstStyle/>
+          <a:p>
+            <a:pPr algn="ctr"/>
+          </a:p>
+        </p:txBody>
+      </p:sp>
+      <p:sp>
+        <p:nvSpPr>
+          <p:cNvPr id="29" name="TextBox 28"/>
+          <p:cNvSpPr txBox="1"/>
+          <p:nvPr/>
+        </p:nvSpPr>
+        <p:spPr>
+          <a:xfrm>
+            <a:off x="6260896" y="685800"/>
+            <a:ext cx="1005840" cy="292608"/>
+          </a:xfrm>
+          <a:prstGeom prst="rect">
+            <a:avLst/>
+          </a:prstGeom>
+          <a:noFill/>
+        </p:spPr>
+        <p:txBody>
+          <a:bodyPr wrap="square">
+            <a:spAutoFit/>
+          </a:bodyPr>
+          <a:lstStyle/>
+          <a:p>
+            <a:pPr algn="l"/>
+            <a:r>
+              <a:rPr sz="800" b="1">
+                <a:solidFill>
+                  <a:srgbClr val="1A6FD8"/>
+                </a:solidFill>
+                <a:latin typeface="Noto Sans KR"/>
+              </a:rPr>
+              <a:t>FAQ 07</a:t>
+            </a:r>
+          </a:p>
+        </p:txBody>
+      </p:sp>
+      <p:sp>
+        <p:nvSpPr>
+          <p:cNvPr id="30" name="TextBox 29"/>
+          <p:cNvSpPr txBox="1"/>
+          <p:nvPr/>
+        </p:nvSpPr>
+        <p:spPr>
+          <a:xfrm>
+            <a:off x="6187744" y="1033272"/>
+            <a:ext cx="5455311" cy="914400"/>
+          </a:xfrm>
+          <a:prstGeom prst="rect">
+            <a:avLst/>
+          </a:prstGeom>
+          <a:noFill/>
+        </p:spPr>
+        <p:txBody>
+          <a:bodyPr wrap="square">
+            <a:spAutoFit/>
+          </a:bodyPr>
+          <a:lstStyle/>
+          <a:p>
+            <a:pPr algn="l"/>
+            <a:r>
+              <a:rPr sz="1800" b="1">
+                <a:solidFill>
+                  <a:srgbClr val="0F1923"/>
+                </a:solidFill>
+                <a:latin typeface="Noto Serif KR"/>
+              </a:rPr>
+              <a:t>저품질/노출 이슈가</a:t>
+            </a:r>
+          </a:p>
+          <a:p>
+            <a:pPr algn="l"/>
+            <a:r>
+              <a:rPr sz="1800" b="1">
+                <a:solidFill>
+                  <a:srgbClr val="1A6FD8"/>
+                </a:solidFill>
+                <a:latin typeface="Noto Serif KR"/>
+              </a:rPr>
+              <a:t>생기면 어떡하죠?</a:t>
+            </a:r>
+          </a:p>
+        </p:txBody>
+      </p:sp>
+      <p:sp>
+        <p:nvSpPr>
+          <p:cNvPr id="31" name="Rectangle 30"/>
+          <p:cNvSpPr/>
+          <p:nvPr/>
+        </p:nvSpPr>
+        <p:spPr>
+          <a:xfrm>
+            <a:off x="6187744" y="2057400"/>
+            <a:ext cx="54864" cy="658368"/>
+          </a:xfrm>
+          <a:prstGeom prst="rect">
+            <a:avLst/>
+          </a:prstGeom>
+          <a:solidFill>
+            <a:srgbClr val="1A6FD8"/>
+          </a:solidFill>
+          <a:ln>
+            <a:noFill/>
+          </a:ln>
+        </p:spPr>
+        <p:style>
+          <a:lnRef idx="1">
+            <a:schemeClr val="accent1"/>
+          </a:lnRef>
+          <a:fillRef idx="3">
+            <a:schemeClr val="accent1"/>
+          </a:fillRef>
+          <a:effectRef idx="2">
+            <a:schemeClr val="accent1"/>
+          </a:effectRef>
+          <a:fontRef idx="minor">
+            <a:schemeClr val="lt1"/>
+          </a:fontRef>
+        </p:style>
+        <p:txBody>
+          <a:bodyPr rtlCol="0" anchor="ctr"/>
+          <a:lstStyle/>
+          <a:p>
+            <a:pPr algn="ctr"/>
+          </a:p>
+        </p:txBody>
+      </p:sp>
+      <p:sp>
+        <p:nvSpPr>
+          <p:cNvPr id="32" name="Rectangle 31"/>
+          <p:cNvSpPr/>
+          <p:nvPr/>
+        </p:nvSpPr>
+        <p:spPr>
+          <a:xfrm>
+            <a:off x="6242608" y="2057400"/>
+            <a:ext cx="5400447" cy="658368"/>
+          </a:xfrm>
+          <a:prstGeom prst="rect">
+            <a:avLst/>
+          </a:prstGeom>
+          <a:solidFill>
+            <a:srgbClr val="EBF2FC"/>
+          </a:solidFill>
+          <a:ln>
+            <a:noFill/>
+          </a:ln>
+        </p:spPr>
+        <p:style>
+          <a:lnRef idx="1">
+            <a:schemeClr val="accent1"/>
+          </a:lnRef>
+          <a:fillRef idx="3">
+            <a:schemeClr val="accent1"/>
+          </a:fillRef>
+          <a:effectRef idx="2">
+            <a:schemeClr val="accent1"/>
+          </a:effectRef>
+          <a:fontRef idx="minor">
+            <a:schemeClr val="lt1"/>
+          </a:fontRef>
+        </p:style>
+        <p:txBody>
+          <a:bodyPr rtlCol="0" anchor="ctr"/>
+          <a:lstStyle/>
+          <a:p>
+            <a:pPr algn="ctr"/>
+          </a:p>
+        </p:txBody>
+      </p:sp>
+      <p:sp>
+        <p:nvSpPr>
+          <p:cNvPr id="33" name="TextBox 32"/>
+          <p:cNvSpPr txBox="1"/>
+          <p:nvPr/>
+        </p:nvSpPr>
+        <p:spPr>
+          <a:xfrm>
+            <a:off x="6324904" y="2093976"/>
+            <a:ext cx="548640" cy="256032"/>
+          </a:xfrm>
+          <a:prstGeom prst="rect">
+            <a:avLst/>
+          </a:prstGeom>
+          <a:noFill/>
+        </p:spPr>
+        <p:txBody>
+          <a:bodyPr wrap="square">
+            <a:spAutoFit/>
+          </a:bodyPr>
+          <a:lstStyle/>
+          <a:p>
+            <a:pPr algn="l"/>
+            <a:r>
+              <a:rPr sz="800" b="1">
+                <a:solidFill>
+                  <a:srgbClr val="1A6FD8"/>
+                </a:solidFill>
+                <a:latin typeface="Noto Sans KR"/>
+              </a:rPr>
+              <a:t>✅ A.</a:t>
+            </a:r>
+          </a:p>
+        </p:txBody>
+      </p:sp>
+      <p:sp>
+        <p:nvSpPr>
+          <p:cNvPr id="34" name="TextBox 33"/>
+          <p:cNvSpPr txBox="1"/>
+          <p:nvPr/>
+        </p:nvSpPr>
+        <p:spPr>
+          <a:xfrm>
+            <a:off x="6324904" y="2313432"/>
+            <a:ext cx="5180991" cy="402336"/>
+          </a:xfrm>
+          <a:prstGeom prst="rect">
+            <a:avLst/>
+          </a:prstGeom>
+          <a:noFill/>
+        </p:spPr>
+        <p:txBody>
+          <a:bodyPr wrap="square">
+            <a:spAutoFit/>
+          </a:bodyPr>
+          <a:lstStyle/>
+          <a:p>
+            <a:pPr algn="l"/>
+            <a:r>
+              <a:rPr sz="1000" b="0">
+                <a:solidFill>
+                  <a:srgbClr val="0F1923"/>
+                </a:solidFill>
+                <a:latin typeface="Noto Sans KR"/>
+              </a:rPr>
+              <a:t>정석을 지키면 저품질은 오지 않습니다.
+만약의 사태에도 마케팅 리스크는 '0'입니다.</a:t>
+            </a:r>
+          </a:p>
+        </p:txBody>
+      </p:sp>
+      <p:sp>
+        <p:nvSpPr>
+          <p:cNvPr id="35" name="TextBox 34"/>
+          <p:cNvSpPr txBox="1"/>
+          <p:nvPr/>
+        </p:nvSpPr>
+        <p:spPr>
+          <a:xfrm>
+            <a:off x="6187744" y="2852928"/>
+            <a:ext cx="5455311" cy="292608"/>
+          </a:xfrm>
+          <a:prstGeom prst="rect">
+            <a:avLst/>
+          </a:prstGeom>
+          <a:noFill/>
+        </p:spPr>
+        <p:txBody>
+          <a:bodyPr wrap="square">
+            <a:spAutoFit/>
+          </a:bodyPr>
+          <a:lstStyle/>
+          <a:p>
+            <a:pPr algn="l"/>
+            <a:r>
+              <a:rPr sz="1000" b="1">
+                <a:solidFill>
+                  <a:srgbClr val="0F1923"/>
+                </a:solidFill>
+                <a:latin typeface="Noto Sans KR"/>
+              </a:rPr>
+              <a:t>'안심 케어' 리스크 관리 정책</a:t>
+            </a:r>
+          </a:p>
+        </p:txBody>
+      </p:sp>
+      <p:sp>
+        <p:nvSpPr>
+          <p:cNvPr id="36" name="Rectangle 35"/>
+          <p:cNvSpPr/>
+          <p:nvPr/>
+        </p:nvSpPr>
+        <p:spPr>
+          <a:xfrm>
+            <a:off x="6187744" y="3291840"/>
+            <a:ext cx="45720" cy="594360"/>
+          </a:xfrm>
+          <a:prstGeom prst="rect">
+            <a:avLst/>
+          </a:prstGeom>
+          <a:solidFill>
+            <a:srgbClr val="1A6FD8"/>
+          </a:solidFill>
+          <a:ln>
+            <a:noFill/>
+          </a:ln>
+        </p:spPr>
+        <p:style>
+          <a:lnRef idx="1">
+            <a:schemeClr val="accent1"/>
+          </a:lnRef>
+          <a:fillRef idx="3">
+            <a:schemeClr val="accent1"/>
+          </a:fillRef>
+          <a:effectRef idx="2">
+            <a:schemeClr val="accent1"/>
+          </a:effectRef>
+          <a:fontRef idx="minor">
+            <a:schemeClr val="lt1"/>
+          </a:fontRef>
+        </p:style>
+        <p:txBody>
+          <a:bodyPr rtlCol="0" anchor="ctr"/>
+          <a:lstStyle/>
+          <a:p>
+            <a:pPr algn="ctr"/>
+          </a:p>
+        </p:txBody>
+      </p:sp>
+      <p:sp>
+        <p:nvSpPr>
+          <p:cNvPr id="37" name="TextBox 36"/>
+          <p:cNvSpPr txBox="1"/>
+          <p:nvPr/>
+        </p:nvSpPr>
+        <p:spPr>
+          <a:xfrm>
+            <a:off x="6324904" y="3246120"/>
+            <a:ext cx="5272431" cy="256032"/>
+          </a:xfrm>
+          <a:prstGeom prst="rect">
+            <a:avLst/>
+          </a:prstGeom>
+          <a:noFill/>
+        </p:spPr>
+        <p:txBody>
+          <a:bodyPr wrap="square">
+            <a:spAutoFit/>
+          </a:bodyPr>
+          <a:lstStyle/>
+          <a:p>
+            <a:pPr algn="l"/>
+            <a:r>
+              <a:rPr sz="1000" b="1">
+                <a:solidFill>
+                  <a:srgbClr val="0F1923"/>
+                </a:solidFill>
+                <a:latin typeface="Noto Sans KR"/>
+              </a:rPr>
+              <a:t>의료광고 대응 노하우</a:t>
+            </a:r>
+          </a:p>
+        </p:txBody>
+      </p:sp>
+      <p:sp>
+        <p:nvSpPr>
+          <p:cNvPr id="38" name="TextBox 37"/>
+          <p:cNvSpPr txBox="1"/>
+          <p:nvPr/>
+        </p:nvSpPr>
+        <p:spPr>
+          <a:xfrm>
+            <a:off x="6324904" y="3502152"/>
+            <a:ext cx="5272431" cy="384048"/>
+          </a:xfrm>
+          <a:prstGeom prst="rect">
+            <a:avLst/>
+          </a:prstGeom>
+          <a:noFill/>
+        </p:spPr>
+        <p:txBody>
+          <a:bodyPr wrap="square">
+            <a:spAutoFit/>
+          </a:bodyPr>
+          <a:lstStyle/>
+          <a:p>
+            <a:pPr algn="l"/>
+            <a:r>
+              <a:rPr sz="900" b="0">
+                <a:solidFill>
+                  <a:srgbClr val="4A5568"/>
+                </a:solidFill>
+                <a:latin typeface="Noto Sans KR"/>
+              </a:rPr>
+              <a:t>보건소 민원 대응까지 실전 경험 기반으로 관리</a:t>
+            </a:r>
+          </a:p>
+        </p:txBody>
+      </p:sp>
+      <p:sp>
+        <p:nvSpPr>
+          <p:cNvPr id="39" name="Rectangle 38"/>
+          <p:cNvSpPr/>
+          <p:nvPr/>
+        </p:nvSpPr>
+        <p:spPr>
+          <a:xfrm>
+            <a:off x="6187744" y="4005072"/>
+            <a:ext cx="45720" cy="594360"/>
+          </a:xfrm>
+          <a:prstGeom prst="rect">
+            <a:avLst/>
+          </a:prstGeom>
+          <a:solidFill>
+            <a:srgbClr val="1A6FD8"/>
+          </a:solidFill>
+          <a:ln>
+            <a:noFill/>
+          </a:ln>
+        </p:spPr>
+        <p:style>
+          <a:lnRef idx="1">
+            <a:schemeClr val="accent1"/>
+          </a:lnRef>
+          <a:fillRef idx="3">
+            <a:schemeClr val="accent1"/>
+          </a:fillRef>
+          <a:effectRef idx="2">
+            <a:schemeClr val="accent1"/>
+          </a:effectRef>
+          <a:fontRef idx="minor">
+            <a:schemeClr val="lt1"/>
+          </a:fontRef>
+        </p:style>
+        <p:txBody>
+          <a:bodyPr rtlCol="0" anchor="ctr"/>
+          <a:lstStyle/>
+          <a:p>
+            <a:pPr algn="ctr"/>
+          </a:p>
+        </p:txBody>
+      </p:sp>
+      <p:sp>
+        <p:nvSpPr>
+          <p:cNvPr id="40" name="TextBox 39"/>
+          <p:cNvSpPr txBox="1"/>
+          <p:nvPr/>
+        </p:nvSpPr>
+        <p:spPr>
+          <a:xfrm>
+            <a:off x="6324904" y="3959352"/>
+            <a:ext cx="5272431" cy="256032"/>
+          </a:xfrm>
+          <a:prstGeom prst="rect">
+            <a:avLst/>
+          </a:prstGeom>
+          <a:noFill/>
+        </p:spPr>
+        <p:txBody>
+          <a:bodyPr wrap="square">
+            <a:spAutoFit/>
+          </a:bodyPr>
+          <a:lstStyle/>
+          <a:p>
+            <a:pPr algn="l"/>
+            <a:r>
+              <a:rPr sz="1000" b="1">
+                <a:solidFill>
+                  <a:srgbClr val="0F1923"/>
+                </a:solidFill>
+                <a:latin typeface="Noto Sans KR"/>
+              </a:rPr>
+              <a:t>실시간 모니터링 &amp; 즉각 대응</a:t>
+            </a:r>
+          </a:p>
+        </p:txBody>
+      </p:sp>
+      <p:sp>
+        <p:nvSpPr>
+          <p:cNvPr id="41" name="TextBox 40"/>
+          <p:cNvSpPr txBox="1"/>
+          <p:nvPr/>
+        </p:nvSpPr>
+        <p:spPr>
+          <a:xfrm>
+            <a:off x="6324904" y="4215384"/>
+            <a:ext cx="5272431" cy="384048"/>
+          </a:xfrm>
+          <a:prstGeom prst="rect">
+            <a:avLst/>
+          </a:prstGeom>
+          <a:noFill/>
+        </p:spPr>
+        <p:txBody>
+          <a:bodyPr wrap="square">
+            <a:spAutoFit/>
+          </a:bodyPr>
+          <a:lstStyle/>
+          <a:p>
+            <a:pPr algn="l"/>
+            <a:r>
+              <a:rPr sz="900" b="0">
+                <a:solidFill>
+                  <a:srgbClr val="4A5568"/>
+                </a:solidFill>
+                <a:latin typeface="Noto Sans KR"/>
+              </a:rPr>
+              <a:t>노출 상태 점검과 방향 수정으로 리스크 최소화</a:t>
+            </a:r>
+          </a:p>
+        </p:txBody>
+      </p:sp>
+      <p:sp>
+        <p:nvSpPr>
+          <p:cNvPr id="42" name="Rectangle 41"/>
+          <p:cNvSpPr/>
+          <p:nvPr/>
+        </p:nvSpPr>
+        <p:spPr>
+          <a:xfrm>
+            <a:off x="6187744" y="4718304"/>
+            <a:ext cx="45720" cy="594360"/>
+          </a:xfrm>
+          <a:prstGeom prst="rect">
+            <a:avLst/>
+          </a:prstGeom>
+          <a:solidFill>
+            <a:srgbClr val="1A6FD8"/>
+          </a:solidFill>
+          <a:ln>
+            <a:noFill/>
+          </a:ln>
+        </p:spPr>
+        <p:style>
+          <a:lnRef idx="1">
+            <a:schemeClr val="accent1"/>
+          </a:lnRef>
+          <a:fillRef idx="3">
+            <a:schemeClr val="accent1"/>
+          </a:fillRef>
+          <a:effectRef idx="2">
+            <a:schemeClr val="accent1"/>
+          </a:effectRef>
+          <a:fontRef idx="minor">
+            <a:schemeClr val="lt1"/>
+          </a:fontRef>
+        </p:style>
+        <p:txBody>
+          <a:bodyPr rtlCol="0" anchor="ctr"/>
+          <a:lstStyle/>
+          <a:p>
+            <a:pPr algn="ctr"/>
+          </a:p>
+        </p:txBody>
+      </p:sp>
+      <p:sp>
+        <p:nvSpPr>
+          <p:cNvPr id="43" name="TextBox 42"/>
+          <p:cNvSpPr txBox="1"/>
+          <p:nvPr/>
+        </p:nvSpPr>
+        <p:spPr>
+          <a:xfrm>
+            <a:off x="6324904" y="4672584"/>
+            <a:ext cx="5272431" cy="256032"/>
+          </a:xfrm>
+          <a:prstGeom prst="rect">
+            <a:avLst/>
+          </a:prstGeom>
+          <a:noFill/>
+        </p:spPr>
+        <p:txBody>
+          <a:bodyPr wrap="square">
+            <a:spAutoFit/>
+          </a:bodyPr>
+          <a:lstStyle/>
+          <a:p>
+            <a:pPr algn="l"/>
+            <a:r>
+              <a:rPr sz="1000" b="1">
+                <a:solidFill>
+                  <a:srgbClr val="0F1923"/>
+                </a:solidFill>
+                <a:latin typeface="Noto Sans KR"/>
+              </a:rPr>
+              <a:t>무상 복구 시스템</a:t>
+            </a:r>
+          </a:p>
+        </p:txBody>
+      </p:sp>
+      <p:sp>
+        <p:nvSpPr>
+          <p:cNvPr id="44" name="TextBox 43"/>
+          <p:cNvSpPr txBox="1"/>
+          <p:nvPr/>
+        </p:nvSpPr>
+        <p:spPr>
+          <a:xfrm>
+            <a:off x="6324904" y="4928616"/>
+            <a:ext cx="5272431" cy="384048"/>
+          </a:xfrm>
+          <a:prstGeom prst="rect">
+            <a:avLst/>
+          </a:prstGeom>
+          <a:noFill/>
+        </p:spPr>
+        <p:txBody>
+          <a:bodyPr wrap="square">
+            <a:spAutoFit/>
+          </a:bodyPr>
+          <a:lstStyle/>
+          <a:p>
+            <a:pPr algn="l"/>
+            <a:r>
+              <a:rPr sz="900" b="0">
+                <a:solidFill>
+                  <a:srgbClr val="4A5568"/>
+                </a:solidFill>
+                <a:latin typeface="Noto Sans KR"/>
+              </a:rPr>
+              <a:t>정책 변화로 이슈 발생 시 준최적화 블로그를 즉시 무상 제공하여 중단 없이 노출</a:t>
+            </a:r>
+          </a:p>
+        </p:txBody>
+      </p:sp>
+    </p:spTree>
+  </p:cSld>
+  <p:clrMapOvr>
+    <a:masterClrMapping/>
+  </p:clrMapOvr>
+</p:sld>
+</file>
+
+<file path=ppt/slides/slide11.xml><?xml version="1.0" encoding="utf-8"?>
+<p:sld xmlns:a="http://schemas.openxmlformats.org/drawingml/2006/main" xmlns:p="http://schemas.openxmlformats.org/presentationml/2006/main" xmlns:r="http://schemas.openxmlformats.org/officeDocument/2006/relationships">
+  <p:cSld>
+    <p:spTree>
+      <p:nvGrpSpPr>
+        <p:cNvPr id="1" name=""/>
+        <p:cNvGrpSpPr/>
+        <p:nvPr/>
+      </p:nvGrpSpPr>
+      <p:grpSpPr/>
+      <p:sp>
+        <p:nvSpPr>
+          <p:cNvPr id="2" name="Rectangle 1"/>
+          <p:cNvSpPr/>
+          <p:nvPr/>
+        </p:nvSpPr>
+        <p:spPr>
+          <a:xfrm>
+            <a:off x="0" y="0"/>
+            <a:ext cx="12191695" cy="6858000"/>
+          </a:xfrm>
+          <a:prstGeom prst="rect">
+            <a:avLst/>
+          </a:prstGeom>
+          <a:solidFill>
+            <a:srgbClr val="F4F7FA"/>
+          </a:solidFill>
+          <a:ln>
+            <a:noFill/>
+          </a:ln>
+        </p:spPr>
+        <p:style>
+          <a:lnRef idx="1">
+            <a:schemeClr val="accent1"/>
+          </a:lnRef>
+          <a:fillRef idx="3">
+            <a:schemeClr val="accent1"/>
+          </a:fillRef>
+          <a:effectRef idx="2">
+            <a:schemeClr val="accent1"/>
+          </a:effectRef>
+          <a:fontRef idx="minor">
+            <a:schemeClr val="lt1"/>
+          </a:fontRef>
+        </p:style>
+        <p:txBody>
+          <a:bodyPr rtlCol="0" anchor="ctr"/>
+          <a:lstStyle/>
+          <a:p>
+            <a:pPr algn="ctr"/>
+          </a:p>
+        </p:txBody>
+      </p:sp>
+      <p:sp>
+        <p:nvSpPr>
+          <p:cNvPr id="3" name="Rectangle 2"/>
+          <p:cNvSpPr/>
+          <p:nvPr/>
+        </p:nvSpPr>
+        <p:spPr>
+          <a:xfrm>
+            <a:off x="0" y="0"/>
+            <a:ext cx="12191695" cy="502920"/>
+          </a:xfrm>
+          <a:prstGeom prst="rect">
+            <a:avLst/>
+          </a:prstGeom>
+          <a:solidFill>
+            <a:srgbClr val="0F1923"/>
+          </a:solidFill>
+          <a:ln>
+            <a:noFill/>
+          </a:ln>
+        </p:spPr>
+        <p:style>
+          <a:lnRef idx="1">
+            <a:schemeClr val="accent1"/>
+          </a:lnRef>
+          <a:fillRef idx="3">
+            <a:schemeClr val="accent1"/>
+          </a:fillRef>
+          <a:effectRef idx="2">
+            <a:schemeClr val="accent1"/>
+          </a:effectRef>
+          <a:fontRef idx="minor">
+            <a:schemeClr val="lt1"/>
+          </a:fontRef>
+        </p:style>
+        <p:txBody>
+          <a:bodyPr rtlCol="0" anchor="ctr"/>
+          <a:lstStyle/>
+          <a:p>
+            <a:pPr algn="ctr"/>
+          </a:p>
+        </p:txBody>
+      </p:sp>
+      <p:sp>
+        <p:nvSpPr>
+          <p:cNvPr id="4" name="Rectangle 3"/>
+          <p:cNvSpPr/>
+          <p:nvPr/>
+        </p:nvSpPr>
+        <p:spPr>
+          <a:xfrm>
+            <a:off x="0" y="0"/>
+            <a:ext cx="45720" cy="502920"/>
+          </a:xfrm>
+          <a:prstGeom prst="rect">
+            <a:avLst/>
+          </a:prstGeom>
+          <a:solidFill>
+            <a:srgbClr val="1A6FD8"/>
+          </a:solidFill>
+          <a:ln>
+            <a:noFill/>
+          </a:ln>
+        </p:spPr>
+        <p:style>
+          <a:lnRef idx="1">
+            <a:schemeClr val="accent1"/>
+          </a:lnRef>
+          <a:fillRef idx="3">
+            <a:schemeClr val="accent1"/>
+          </a:fillRef>
+          <a:effectRef idx="2">
+            <a:schemeClr val="accent1"/>
+          </a:effectRef>
+          <a:fontRef idx="minor">
+            <a:schemeClr val="lt1"/>
+          </a:fontRef>
+        </p:style>
+        <p:txBody>
+          <a:bodyPr rtlCol="0" anchor="ctr"/>
+          <a:lstStyle/>
+          <a:p>
+            <a:pPr algn="ctr"/>
           </a:p>
         </p:txBody>
       </p:sp>
@@ -4028,29 +5727,29 @@
         </p:nvSpPr>
         <p:spPr>
           <a:xfrm>
-            <a:off x="640080" y="1645920"/>
-            <a:ext cx="5090464" cy="1188720"/>
-          </a:xfrm>
-          <a:prstGeom prst="rect">
-            <a:avLst/>
-          </a:prstGeom>
-          <a:noFill/>
-        </p:spPr>
-        <p:txBody>
-          <a:bodyPr wrap="square">
-            <a:spAutoFit/>
-          </a:bodyPr>
-          <a:lstStyle/>
-          <a:p>
-            <a:pPr algn="l"/>
-            <a:r>
-              <a:rPr sz="6400" b="1">
+            <a:off x="548640" y="0"/>
+            <a:ext cx="2743200" cy="502920"/>
+          </a:xfrm>
+          <a:prstGeom prst="rect">
+            <a:avLst/>
+          </a:prstGeom>
+          <a:noFill/>
+        </p:spPr>
+        <p:txBody>
+          <a:bodyPr wrap="square">
+            <a:spAutoFit/>
+          </a:bodyPr>
+          <a:lstStyle/>
+          <a:p>
+            <a:pPr algn="l"/>
+            <a:r>
+              <a:rPr sz="1000" b="1">
                 <a:solidFill>
                   <a:srgbClr val="FFFFFF"/>
                 </a:solidFill>
-                <a:latin typeface="Noto Serif KR"/>
-              </a:rPr>
-              <a:t>1,000%</a:t>
+                <a:latin typeface="Noto Sans KR"/>
+              </a:rPr>
+              <a:t>마케팅천재</a:t>
             </a:r>
           </a:p>
         </p:txBody>
@@ -4063,30 +5762,29 @@
         </p:nvSpPr>
         <p:spPr>
           <a:xfrm>
-            <a:off x="640080" y="2834640"/>
-            <a:ext cx="5090464" cy="658368"/>
-          </a:xfrm>
-          <a:prstGeom prst="rect">
-            <a:avLst/>
-          </a:prstGeom>
-          <a:noFill/>
-        </p:spPr>
-        <p:txBody>
-          <a:bodyPr wrap="square">
-            <a:spAutoFit/>
-          </a:bodyPr>
-          <a:lstStyle/>
-          <a:p>
-            <a:pPr algn="l"/>
-            <a:r>
-              <a:rPr sz="1000" b="0">
-                <a:solidFill>
-                  <a:srgbClr val="CCDDFF"/>
-                </a:solidFill>
-                <a:latin typeface="Noto Sans KR"/>
-              </a:rPr>
-              <a:t>마케팅천재와 함께하는 원장님들이
-실제로 경험하고 있는 평균 ROAS입니다.</a:t>
+            <a:off x="8534095" y="0"/>
+            <a:ext cx="3108960" cy="502920"/>
+          </a:xfrm>
+          <a:prstGeom prst="rect">
+            <a:avLst/>
+          </a:prstGeom>
+          <a:noFill/>
+        </p:spPr>
+        <p:txBody>
+          <a:bodyPr wrap="square">
+            <a:spAutoFit/>
+          </a:bodyPr>
+          <a:lstStyle/>
+          <a:p>
+            <a:pPr algn="r"/>
+            <a:r>
+              <a:rPr sz="900" b="0">
+                <a:solidFill>
+                  <a:srgbClr val="FFFFFF"/>
+                </a:solidFill>
+                <a:latin typeface="Noto Sans KR"/>
+              </a:rPr>
+              <a:t>FAQ 08 · 비용</a:t>
             </a:r>
           </a:p>
         </p:txBody>
@@ -4099,8 +5797,1696 @@
         </p:nvSpPr>
         <p:spPr>
           <a:xfrm>
-            <a:off x="640080" y="3703320"/>
+            <a:off x="0" y="6510528"/>
+            <a:ext cx="12191695" cy="347472"/>
+          </a:xfrm>
+          <a:prstGeom prst="rect">
+            <a:avLst/>
+          </a:prstGeom>
+          <a:solidFill>
+            <a:srgbClr val="1A6FD8"/>
+          </a:solidFill>
+          <a:ln>
+            <a:noFill/>
+          </a:ln>
+        </p:spPr>
+        <p:style>
+          <a:lnRef idx="1">
+            <a:schemeClr val="accent1"/>
+          </a:lnRef>
+          <a:fillRef idx="3">
+            <a:schemeClr val="accent1"/>
+          </a:fillRef>
+          <a:effectRef idx="2">
+            <a:schemeClr val="accent1"/>
+          </a:effectRef>
+          <a:fontRef idx="minor">
+            <a:schemeClr val="lt1"/>
+          </a:fontRef>
+        </p:style>
+        <p:txBody>
+          <a:bodyPr rtlCol="0" anchor="ctr"/>
+          <a:lstStyle/>
+          <a:p>
+            <a:pPr algn="ctr"/>
+          </a:p>
+        </p:txBody>
+      </p:sp>
+      <p:sp>
+        <p:nvSpPr>
+          <p:cNvPr id="8" name="TextBox 7"/>
+          <p:cNvSpPr txBox="1"/>
+          <p:nvPr/>
+        </p:nvSpPr>
+        <p:spPr>
+          <a:xfrm>
+            <a:off x="548640" y="6510528"/>
+            <a:ext cx="4572000" cy="347472"/>
+          </a:xfrm>
+          <a:prstGeom prst="rect">
+            <a:avLst/>
+          </a:prstGeom>
+          <a:noFill/>
+        </p:spPr>
+        <p:txBody>
+          <a:bodyPr wrap="square">
+            <a:spAutoFit/>
+          </a:bodyPr>
+          <a:lstStyle/>
+          <a:p>
+            <a:pPr algn="l"/>
+            <a:r>
+              <a:rPr sz="800" b="0">
+                <a:solidFill>
+                  <a:srgbClr val="FFFFFF"/>
+                </a:solidFill>
+                <a:latin typeface="Noto Sans KR"/>
+              </a:rPr>
+              <a:t>마케팅천재 · 대표 정귀명</a:t>
+            </a:r>
+          </a:p>
+        </p:txBody>
+      </p:sp>
+      <p:sp>
+        <p:nvSpPr>
+          <p:cNvPr id="9" name="TextBox 8"/>
+          <p:cNvSpPr txBox="1"/>
+          <p:nvPr/>
+        </p:nvSpPr>
+        <p:spPr>
+          <a:xfrm>
+            <a:off x="10362895" y="6510528"/>
+            <a:ext cx="1554480" cy="347472"/>
+          </a:xfrm>
+          <a:prstGeom prst="rect">
+            <a:avLst/>
+          </a:prstGeom>
+          <a:noFill/>
+        </p:spPr>
+        <p:txBody>
+          <a:bodyPr wrap="square">
+            <a:spAutoFit/>
+          </a:bodyPr>
+          <a:lstStyle/>
+          <a:p>
+            <a:pPr algn="r"/>
+            <a:r>
+              <a:rPr sz="800" b="0">
+                <a:solidFill>
+                  <a:srgbClr val="FFFFFF"/>
+                </a:solidFill>
+                <a:latin typeface="Noto Sans KR"/>
+              </a:rPr>
+              <a:t>11 / 13</a:t>
+            </a:r>
+          </a:p>
+        </p:txBody>
+      </p:sp>
+      <p:sp>
+        <p:nvSpPr>
+          <p:cNvPr id="10" name="Rectangle 9"/>
+          <p:cNvSpPr/>
+          <p:nvPr/>
+        </p:nvSpPr>
+        <p:spPr>
+          <a:xfrm>
+            <a:off x="548640" y="685800"/>
+            <a:ext cx="1097280" cy="292608"/>
+          </a:xfrm>
+          <a:prstGeom prst="rect">
+            <a:avLst/>
+          </a:prstGeom>
+          <a:solidFill>
+            <a:srgbClr val="E8F0FB"/>
+          </a:solidFill>
+          <a:ln w="12700">
+            <a:solidFill>
+              <a:srgbClr val="1A6FD8"/>
+            </a:solidFill>
+          </a:ln>
+        </p:spPr>
+        <p:style>
+          <a:lnRef idx="1">
+            <a:schemeClr val="accent1"/>
+          </a:lnRef>
+          <a:fillRef idx="3">
+            <a:schemeClr val="accent1"/>
+          </a:fillRef>
+          <a:effectRef idx="2">
+            <a:schemeClr val="accent1"/>
+          </a:effectRef>
+          <a:fontRef idx="minor">
+            <a:schemeClr val="lt1"/>
+          </a:fontRef>
+        </p:style>
+        <p:txBody>
+          <a:bodyPr rtlCol="0" anchor="ctr"/>
+          <a:lstStyle/>
+          <a:p>
+            <a:pPr algn="ctr"/>
+          </a:p>
+        </p:txBody>
+      </p:sp>
+      <p:sp>
+        <p:nvSpPr>
+          <p:cNvPr id="11" name="TextBox 10"/>
+          <p:cNvSpPr txBox="1"/>
+          <p:nvPr/>
+        </p:nvSpPr>
+        <p:spPr>
+          <a:xfrm>
+            <a:off x="621792" y="685800"/>
+            <a:ext cx="1005840" cy="292608"/>
+          </a:xfrm>
+          <a:prstGeom prst="rect">
+            <a:avLst/>
+          </a:prstGeom>
+          <a:noFill/>
+        </p:spPr>
+        <p:txBody>
+          <a:bodyPr wrap="square">
+            <a:spAutoFit/>
+          </a:bodyPr>
+          <a:lstStyle/>
+          <a:p>
+            <a:pPr algn="l"/>
+            <a:r>
+              <a:rPr sz="800" b="1">
+                <a:solidFill>
+                  <a:srgbClr val="1A6FD8"/>
+                </a:solidFill>
+                <a:latin typeface="Noto Sans KR"/>
+              </a:rPr>
+              <a:t>FAQ 08</a:t>
+            </a:r>
+          </a:p>
+        </p:txBody>
+      </p:sp>
+      <p:sp>
+        <p:nvSpPr>
+          <p:cNvPr id="12" name="TextBox 11"/>
+          <p:cNvSpPr txBox="1"/>
+          <p:nvPr/>
+        </p:nvSpPr>
+        <p:spPr>
+          <a:xfrm>
+            <a:off x="548640" y="1033272"/>
+            <a:ext cx="11094415" cy="502920"/>
+          </a:xfrm>
+          <a:prstGeom prst="rect">
+            <a:avLst/>
+          </a:prstGeom>
+          <a:noFill/>
+        </p:spPr>
+        <p:txBody>
+          <a:bodyPr wrap="square">
+            <a:spAutoFit/>
+          </a:bodyPr>
+          <a:lstStyle/>
+          <a:p>
+            <a:pPr algn="l"/>
+            <a:r>
+              <a:rPr sz="2200" b="1">
+                <a:solidFill>
+                  <a:srgbClr val="0F1923"/>
+                </a:solidFill>
+                <a:latin typeface="Noto Serif KR"/>
+              </a:rPr>
+              <a:t>비용은 얼마나 들까요?</a:t>
+            </a:r>
+          </a:p>
+        </p:txBody>
+      </p:sp>
+      <p:sp>
+        <p:nvSpPr>
+          <p:cNvPr id="13" name="Rectangle 12"/>
+          <p:cNvSpPr/>
+          <p:nvPr/>
+        </p:nvSpPr>
+        <p:spPr>
+          <a:xfrm>
+            <a:off x="548640" y="1645920"/>
+            <a:ext cx="45720" cy="548640"/>
+          </a:xfrm>
+          <a:prstGeom prst="rect">
+            <a:avLst/>
+          </a:prstGeom>
+          <a:solidFill>
+            <a:srgbClr val="1A6FD8"/>
+          </a:solidFill>
+          <a:ln>
+            <a:noFill/>
+          </a:ln>
+        </p:spPr>
+        <p:style>
+          <a:lnRef idx="1">
+            <a:schemeClr val="accent1"/>
+          </a:lnRef>
+          <a:fillRef idx="3">
+            <a:schemeClr val="accent1"/>
+          </a:fillRef>
+          <a:effectRef idx="2">
+            <a:schemeClr val="accent1"/>
+          </a:effectRef>
+          <a:fontRef idx="minor">
+            <a:schemeClr val="lt1"/>
+          </a:fontRef>
+        </p:style>
+        <p:txBody>
+          <a:bodyPr rtlCol="0" anchor="ctr"/>
+          <a:lstStyle/>
+          <a:p>
+            <a:pPr algn="ctr"/>
+          </a:p>
+        </p:txBody>
+      </p:sp>
+      <p:sp>
+        <p:nvSpPr>
+          <p:cNvPr id="14" name="TextBox 13"/>
+          <p:cNvSpPr txBox="1"/>
+          <p:nvPr/>
+        </p:nvSpPr>
+        <p:spPr>
+          <a:xfrm>
+            <a:off x="685800" y="1645920"/>
+            <a:ext cx="10911535" cy="548640"/>
+          </a:xfrm>
+          <a:prstGeom prst="rect">
+            <a:avLst/>
+          </a:prstGeom>
+          <a:noFill/>
+        </p:spPr>
+        <p:txBody>
+          <a:bodyPr wrap="square">
+            <a:spAutoFit/>
+          </a:bodyPr>
+          <a:lstStyle/>
+          <a:p>
+            <a:pPr algn="l"/>
+            <a:r>
+              <a:rPr sz="1000" b="0">
+                <a:solidFill>
+                  <a:srgbClr val="0F1923"/>
+                </a:solidFill>
+                <a:latin typeface="Noto Sans KR"/>
+              </a:rPr>
+              <a:t>AI 공장형 광고(월 30~50만원)로는 광고비 회수조차 어렵습니다. 마케팅은 '지출'이 아니라 '투자'입니다. 회수 가능한 예산을 제안합니다.</a:t>
+            </a:r>
+          </a:p>
+        </p:txBody>
+      </p:sp>
+      <p:sp>
+        <p:nvSpPr>
+          <p:cNvPr id="15" name="TextBox 14"/>
+          <p:cNvSpPr txBox="1"/>
+          <p:nvPr/>
+        </p:nvSpPr>
+        <p:spPr>
+          <a:xfrm>
+            <a:off x="548640" y="2350008"/>
+            <a:ext cx="11094415" cy="365760"/>
+          </a:xfrm>
+          <a:prstGeom prst="rect">
+            <a:avLst/>
+          </a:prstGeom>
+          <a:noFill/>
+        </p:spPr>
+        <p:txBody>
+          <a:bodyPr wrap="square">
+            <a:spAutoFit/>
+          </a:bodyPr>
+          <a:lstStyle/>
+          <a:p>
+            <a:pPr algn="l"/>
+            <a:r>
+              <a:rPr sz="1600" b="1">
+                <a:solidFill>
+                  <a:srgbClr val="1A6FD8"/>
+                </a:solidFill>
+                <a:latin typeface="Noto Serif KR"/>
+              </a:rPr>
+              <a:t>1. 브랜드 블로그</a:t>
+            </a:r>
+          </a:p>
+        </p:txBody>
+      </p:sp>
+      <p:sp>
+        <p:nvSpPr>
+          <p:cNvPr id="16" name="TextBox 15"/>
+          <p:cNvSpPr txBox="1"/>
+          <p:nvPr/>
+        </p:nvSpPr>
+        <p:spPr>
+          <a:xfrm>
+            <a:off x="548640" y="2743200"/>
+            <a:ext cx="11094415" cy="274320"/>
+          </a:xfrm>
+          <a:prstGeom prst="rect">
+            <a:avLst/>
+          </a:prstGeom>
+          <a:noFill/>
+        </p:spPr>
+        <p:txBody>
+          <a:bodyPr wrap="square">
+            <a:spAutoFit/>
+          </a:bodyPr>
+          <a:lstStyle/>
+          <a:p>
+            <a:pPr algn="l"/>
+            <a:r>
+              <a:rPr sz="900" b="0">
+                <a:solidFill>
+                  <a:srgbClr val="4A5568"/>
+                </a:solidFill>
+                <a:latin typeface="Noto Sans KR"/>
+              </a:rPr>
+              <a:t>제공: 전문 기획 + 의료 전문 작가 + 프리미엄 디자인 + 의료법 3단계 검수 + 클린IP</a:t>
+            </a:r>
+          </a:p>
+        </p:txBody>
+      </p:sp>
+      <p:sp>
+        <p:nvSpPr>
+          <p:cNvPr id="17" name="Rectangle 16"/>
+          <p:cNvSpPr/>
+          <p:nvPr/>
+        </p:nvSpPr>
+        <p:spPr>
+          <a:xfrm>
+            <a:off x="548640" y="3108960"/>
+            <a:ext cx="3576218" cy="2286000"/>
+          </a:xfrm>
+          <a:prstGeom prst="rect">
+            <a:avLst/>
+          </a:prstGeom>
+          <a:solidFill>
+            <a:srgbClr val="FFFFFF"/>
+          </a:solidFill>
+          <a:ln w="19050">
+            <a:solidFill>
+              <a:srgbClr val="1A6FD8"/>
+            </a:solidFill>
+          </a:ln>
+        </p:spPr>
+        <p:style>
+          <a:lnRef idx="1">
+            <a:schemeClr val="accent1"/>
+          </a:lnRef>
+          <a:fillRef idx="3">
+            <a:schemeClr val="accent1"/>
+          </a:fillRef>
+          <a:effectRef idx="2">
+            <a:schemeClr val="accent1"/>
+          </a:effectRef>
+          <a:fontRef idx="minor">
+            <a:schemeClr val="lt1"/>
+          </a:fontRef>
+        </p:style>
+        <p:txBody>
+          <a:bodyPr rtlCol="0" anchor="ctr"/>
+          <a:lstStyle/>
+          <a:p>
+            <a:pPr algn="ctr"/>
+          </a:p>
+        </p:txBody>
+      </p:sp>
+      <p:sp>
+        <p:nvSpPr>
+          <p:cNvPr id="18" name="TextBox 17"/>
+          <p:cNvSpPr txBox="1"/>
+          <p:nvPr/>
+        </p:nvSpPr>
+        <p:spPr>
+          <a:xfrm>
+            <a:off x="548640" y="3246120"/>
+            <a:ext cx="3576218" cy="365760"/>
+          </a:xfrm>
+          <a:prstGeom prst="rect">
+            <a:avLst/>
+          </a:prstGeom>
+          <a:noFill/>
+        </p:spPr>
+        <p:txBody>
+          <a:bodyPr wrap="square">
+            <a:spAutoFit/>
+          </a:bodyPr>
+          <a:lstStyle/>
+          <a:p>
+            <a:pPr algn="ctr"/>
+            <a:r>
+              <a:rPr sz="1400" b="1">
+                <a:solidFill>
+                  <a:srgbClr val="0F1923"/>
+                </a:solidFill>
+                <a:latin typeface="Noto Sans KR"/>
+              </a:rPr>
+              <a:t>BASIC</a:t>
+            </a:r>
+          </a:p>
+        </p:txBody>
+      </p:sp>
+      <p:sp>
+        <p:nvSpPr>
+          <p:cNvPr id="19" name="TextBox 18"/>
+          <p:cNvSpPr txBox="1"/>
+          <p:nvPr/>
+        </p:nvSpPr>
+        <p:spPr>
+          <a:xfrm>
+            <a:off x="548640" y="3611880"/>
+            <a:ext cx="3576218" cy="274320"/>
+          </a:xfrm>
+          <a:prstGeom prst="rect">
+            <a:avLst/>
+          </a:prstGeom>
+          <a:noFill/>
+        </p:spPr>
+        <p:txBody>
+          <a:bodyPr wrap="square">
+            <a:spAutoFit/>
+          </a:bodyPr>
+          <a:lstStyle/>
+          <a:p>
+            <a:pPr algn="ctr"/>
+            <a:r>
+              <a:rPr sz="900" b="0">
+                <a:solidFill>
+                  <a:srgbClr val="4A5568"/>
+                </a:solidFill>
+                <a:latin typeface="Noto Sans KR"/>
+              </a:rPr>
+              <a:t>월 16건 (주 4회)</a:t>
+            </a:r>
+          </a:p>
+        </p:txBody>
+      </p:sp>
+      <p:sp>
+        <p:nvSpPr>
+          <p:cNvPr id="20" name="TextBox 19"/>
+          <p:cNvSpPr txBox="1"/>
+          <p:nvPr/>
+        </p:nvSpPr>
+        <p:spPr>
+          <a:xfrm>
+            <a:off x="548640" y="3913632"/>
+            <a:ext cx="3576218" cy="475488"/>
+          </a:xfrm>
+          <a:prstGeom prst="rect">
+            <a:avLst/>
+          </a:prstGeom>
+          <a:noFill/>
+        </p:spPr>
+        <p:txBody>
+          <a:bodyPr wrap="square">
+            <a:spAutoFit/>
+          </a:bodyPr>
+          <a:lstStyle/>
+          <a:p>
+            <a:pPr algn="ctr"/>
+            <a:r>
+              <a:rPr sz="2200" b="1">
+                <a:solidFill>
+                  <a:srgbClr val="1A6FD8"/>
+                </a:solidFill>
+                <a:latin typeface="Noto Serif KR"/>
+              </a:rPr>
+              <a:t>100만 원</a:t>
+            </a:r>
+          </a:p>
+        </p:txBody>
+      </p:sp>
+      <p:sp>
+        <p:nvSpPr>
+          <p:cNvPr id="21" name="TextBox 20"/>
+          <p:cNvSpPr txBox="1"/>
+          <p:nvPr/>
+        </p:nvSpPr>
+        <p:spPr>
+          <a:xfrm>
+            <a:off x="640080" y="4434840"/>
+            <a:ext cx="3393338" cy="868680"/>
+          </a:xfrm>
+          <a:prstGeom prst="rect">
+            <a:avLst/>
+          </a:prstGeom>
+          <a:noFill/>
+        </p:spPr>
+        <p:txBody>
+          <a:bodyPr wrap="square">
+            <a:spAutoFit/>
+          </a:bodyPr>
+          <a:lstStyle/>
+          <a:p>
+            <a:pPr algn="ctr"/>
+            <a:r>
+              <a:rPr sz="900" b="0">
+                <a:solidFill>
+                  <a:srgbClr val="4A5568"/>
+                </a:solidFill>
+                <a:latin typeface="Noto Sans KR"/>
+              </a:rPr>
+              <a:t>브랜드 기초 다지기</a:t>
+            </a:r>
+          </a:p>
+        </p:txBody>
+      </p:sp>
+      <p:sp>
+        <p:nvSpPr>
+          <p:cNvPr id="22" name="Rectangle 21"/>
+          <p:cNvSpPr/>
+          <p:nvPr/>
+        </p:nvSpPr>
+        <p:spPr>
+          <a:xfrm>
+            <a:off x="4307738" y="3108960"/>
+            <a:ext cx="3576218" cy="2286000"/>
+          </a:xfrm>
+          <a:prstGeom prst="rect">
+            <a:avLst/>
+          </a:prstGeom>
+          <a:solidFill>
+            <a:srgbClr val="1A6FD8"/>
+          </a:solidFill>
+          <a:ln w="19050">
+            <a:solidFill>
+              <a:srgbClr val="1A6FD8"/>
+            </a:solidFill>
+          </a:ln>
+        </p:spPr>
+        <p:style>
+          <a:lnRef idx="1">
+            <a:schemeClr val="accent1"/>
+          </a:lnRef>
+          <a:fillRef idx="3">
+            <a:schemeClr val="accent1"/>
+          </a:fillRef>
+          <a:effectRef idx="2">
+            <a:schemeClr val="accent1"/>
+          </a:effectRef>
+          <a:fontRef idx="minor">
+            <a:schemeClr val="lt1"/>
+          </a:fontRef>
+        </p:style>
+        <p:txBody>
+          <a:bodyPr rtlCol="0" anchor="ctr"/>
+          <a:lstStyle/>
+          <a:p>
+            <a:pPr algn="ctr"/>
+          </a:p>
+        </p:txBody>
+      </p:sp>
+      <p:sp>
+        <p:nvSpPr>
+          <p:cNvPr id="23" name="TextBox 22"/>
+          <p:cNvSpPr txBox="1"/>
+          <p:nvPr/>
+        </p:nvSpPr>
+        <p:spPr>
+          <a:xfrm>
+            <a:off x="4307738" y="3246120"/>
+            <a:ext cx="3576218" cy="365760"/>
+          </a:xfrm>
+          <a:prstGeom prst="rect">
+            <a:avLst/>
+          </a:prstGeom>
+          <a:noFill/>
+        </p:spPr>
+        <p:txBody>
+          <a:bodyPr wrap="square">
+            <a:spAutoFit/>
+          </a:bodyPr>
+          <a:lstStyle/>
+          <a:p>
+            <a:pPr algn="ctr"/>
+            <a:r>
+              <a:rPr sz="1400" b="1">
+                <a:solidFill>
+                  <a:srgbClr val="FFFFFF"/>
+                </a:solidFill>
+                <a:latin typeface="Noto Sans KR"/>
+              </a:rPr>
+              <a:t>PREMIUM</a:t>
+            </a:r>
+          </a:p>
+        </p:txBody>
+      </p:sp>
+      <p:sp>
+        <p:nvSpPr>
+          <p:cNvPr id="24" name="TextBox 23"/>
+          <p:cNvSpPr txBox="1"/>
+          <p:nvPr/>
+        </p:nvSpPr>
+        <p:spPr>
+          <a:xfrm>
+            <a:off x="4307738" y="3611880"/>
+            <a:ext cx="3576218" cy="274320"/>
+          </a:xfrm>
+          <a:prstGeom prst="rect">
+            <a:avLst/>
+          </a:prstGeom>
+          <a:noFill/>
+        </p:spPr>
+        <p:txBody>
+          <a:bodyPr wrap="square">
+            <a:spAutoFit/>
+          </a:bodyPr>
+          <a:lstStyle/>
+          <a:p>
+            <a:pPr algn="ctr"/>
+            <a:r>
+              <a:rPr sz="900" b="0">
+                <a:solidFill>
+                  <a:srgbClr val="FFFFFF"/>
+                </a:solidFill>
+                <a:latin typeface="Noto Sans KR"/>
+              </a:rPr>
+              <a:t>월 20건 (주 5회)</a:t>
+            </a:r>
+          </a:p>
+        </p:txBody>
+      </p:sp>
+      <p:sp>
+        <p:nvSpPr>
+          <p:cNvPr id="25" name="TextBox 24"/>
+          <p:cNvSpPr txBox="1"/>
+          <p:nvPr/>
+        </p:nvSpPr>
+        <p:spPr>
+          <a:xfrm>
+            <a:off x="4307738" y="3913632"/>
+            <a:ext cx="3576218" cy="475488"/>
+          </a:xfrm>
+          <a:prstGeom prst="rect">
+            <a:avLst/>
+          </a:prstGeom>
+          <a:noFill/>
+        </p:spPr>
+        <p:txBody>
+          <a:bodyPr wrap="square">
+            <a:spAutoFit/>
+          </a:bodyPr>
+          <a:lstStyle/>
+          <a:p>
+            <a:pPr algn="ctr"/>
+            <a:r>
+              <a:rPr sz="2200" b="1">
+                <a:solidFill>
+                  <a:srgbClr val="F0C040"/>
+                </a:solidFill>
+                <a:latin typeface="Noto Serif KR"/>
+              </a:rPr>
+              <a:t>120만 원</a:t>
+            </a:r>
+          </a:p>
+        </p:txBody>
+      </p:sp>
+      <p:sp>
+        <p:nvSpPr>
+          <p:cNvPr id="26" name="TextBox 25"/>
+          <p:cNvSpPr txBox="1"/>
+          <p:nvPr/>
+        </p:nvSpPr>
+        <p:spPr>
+          <a:xfrm>
+            <a:off x="4399178" y="4434840"/>
+            <a:ext cx="3393338" cy="868680"/>
+          </a:xfrm>
+          <a:prstGeom prst="rect">
+            <a:avLst/>
+          </a:prstGeom>
+          <a:noFill/>
+        </p:spPr>
+        <p:txBody>
+          <a:bodyPr wrap="square">
+            <a:spAutoFit/>
+          </a:bodyPr>
+          <a:lstStyle/>
+          <a:p>
+            <a:pPr algn="ctr"/>
+            <a:r>
+              <a:rPr sz="900" b="0">
+                <a:solidFill>
+                  <a:srgbClr val="FFFFFF"/>
+                </a:solidFill>
+                <a:latin typeface="Noto Sans KR"/>
+              </a:rPr>
+              <a:t>상위노출 &amp; J커브 진입
+월 20건 계정 1~3개 운영이
+효율이 가장 높습니다.</a:t>
+            </a:r>
+          </a:p>
+        </p:txBody>
+      </p:sp>
+      <p:sp>
+        <p:nvSpPr>
+          <p:cNvPr id="27" name="Rectangle 26"/>
+          <p:cNvSpPr/>
+          <p:nvPr/>
+        </p:nvSpPr>
+        <p:spPr>
+          <a:xfrm>
+            <a:off x="8066836" y="3108960"/>
+            <a:ext cx="3576218" cy="2286000"/>
+          </a:xfrm>
+          <a:prstGeom prst="rect">
+            <a:avLst/>
+          </a:prstGeom>
+          <a:solidFill>
+            <a:srgbClr val="FFFFFF"/>
+          </a:solidFill>
+          <a:ln w="19050">
+            <a:solidFill>
+              <a:srgbClr val="1A6FD8"/>
+            </a:solidFill>
+          </a:ln>
+        </p:spPr>
+        <p:style>
+          <a:lnRef idx="1">
+            <a:schemeClr val="accent1"/>
+          </a:lnRef>
+          <a:fillRef idx="3">
+            <a:schemeClr val="accent1"/>
+          </a:fillRef>
+          <a:effectRef idx="2">
+            <a:schemeClr val="accent1"/>
+          </a:effectRef>
+          <a:fontRef idx="minor">
+            <a:schemeClr val="lt1"/>
+          </a:fontRef>
+        </p:style>
+        <p:txBody>
+          <a:bodyPr rtlCol="0" anchor="ctr"/>
+          <a:lstStyle/>
+          <a:p>
+            <a:pPr algn="ctr"/>
+          </a:p>
+        </p:txBody>
+      </p:sp>
+      <p:sp>
+        <p:nvSpPr>
+          <p:cNvPr id="28" name="TextBox 27"/>
+          <p:cNvSpPr txBox="1"/>
+          <p:nvPr/>
+        </p:nvSpPr>
+        <p:spPr>
+          <a:xfrm>
+            <a:off x="8066836" y="3246120"/>
+            <a:ext cx="3576218" cy="365760"/>
+          </a:xfrm>
+          <a:prstGeom prst="rect">
+            <a:avLst/>
+          </a:prstGeom>
+          <a:noFill/>
+        </p:spPr>
+        <p:txBody>
+          <a:bodyPr wrap="square">
+            <a:spAutoFit/>
+          </a:bodyPr>
+          <a:lstStyle/>
+          <a:p>
+            <a:pPr algn="ctr"/>
+            <a:r>
+              <a:rPr sz="1400" b="1">
+                <a:solidFill>
+                  <a:srgbClr val="0F1923"/>
+                </a:solidFill>
+                <a:latin typeface="Noto Sans KR"/>
+              </a:rPr>
+              <a:t>MASTER</a:t>
+            </a:r>
+          </a:p>
+        </p:txBody>
+      </p:sp>
+      <p:sp>
+        <p:nvSpPr>
+          <p:cNvPr id="29" name="TextBox 28"/>
+          <p:cNvSpPr txBox="1"/>
+          <p:nvPr/>
+        </p:nvSpPr>
+        <p:spPr>
+          <a:xfrm>
+            <a:off x="8066836" y="3611880"/>
+            <a:ext cx="3576218" cy="274320"/>
+          </a:xfrm>
+          <a:prstGeom prst="rect">
+            <a:avLst/>
+          </a:prstGeom>
+          <a:noFill/>
+        </p:spPr>
+        <p:txBody>
+          <a:bodyPr wrap="square">
+            <a:spAutoFit/>
+          </a:bodyPr>
+          <a:lstStyle/>
+          <a:p>
+            <a:pPr algn="ctr"/>
+            <a:r>
+              <a:rPr sz="900" b="0">
+                <a:solidFill>
+                  <a:srgbClr val="4A5568"/>
+                </a:solidFill>
+                <a:latin typeface="Noto Sans KR"/>
+              </a:rPr>
+              <a:t>월 30건 (매일)</a:t>
+            </a:r>
+          </a:p>
+        </p:txBody>
+      </p:sp>
+      <p:sp>
+        <p:nvSpPr>
+          <p:cNvPr id="30" name="TextBox 29"/>
+          <p:cNvSpPr txBox="1"/>
+          <p:nvPr/>
+        </p:nvSpPr>
+        <p:spPr>
+          <a:xfrm>
+            <a:off x="8066836" y="3913632"/>
+            <a:ext cx="3576218" cy="475488"/>
+          </a:xfrm>
+          <a:prstGeom prst="rect">
+            <a:avLst/>
+          </a:prstGeom>
+          <a:noFill/>
+        </p:spPr>
+        <p:txBody>
+          <a:bodyPr wrap="square">
+            <a:spAutoFit/>
+          </a:bodyPr>
+          <a:lstStyle/>
+          <a:p>
+            <a:pPr algn="ctr"/>
+            <a:r>
+              <a:rPr sz="2200" b="1">
+                <a:solidFill>
+                  <a:srgbClr val="1A6FD8"/>
+                </a:solidFill>
+                <a:latin typeface="Noto Serif KR"/>
+              </a:rPr>
+              <a:t>165만 원</a:t>
+            </a:r>
+          </a:p>
+        </p:txBody>
+      </p:sp>
+      <p:sp>
+        <p:nvSpPr>
+          <p:cNvPr id="31" name="TextBox 30"/>
+          <p:cNvSpPr txBox="1"/>
+          <p:nvPr/>
+        </p:nvSpPr>
+        <p:spPr>
+          <a:xfrm>
+            <a:off x="8158276" y="4434840"/>
+            <a:ext cx="3393338" cy="868680"/>
+          </a:xfrm>
+          <a:prstGeom prst="rect">
+            <a:avLst/>
+          </a:prstGeom>
+          <a:noFill/>
+        </p:spPr>
+        <p:txBody>
+          <a:bodyPr wrap="square">
+            <a:spAutoFit/>
+          </a:bodyPr>
+          <a:lstStyle/>
+          <a:p>
+            <a:pPr algn="ctr"/>
+            <a:r>
+              <a:rPr sz="900" b="0">
+                <a:solidFill>
+                  <a:srgbClr val="4A5568"/>
+                </a:solidFill>
+                <a:latin typeface="Noto Sans KR"/>
+              </a:rPr>
+              <a:t>지역 점유 &amp; 타지역 노출</a:t>
+            </a:r>
+          </a:p>
+        </p:txBody>
+      </p:sp>
+    </p:spTree>
+  </p:cSld>
+  <p:clrMapOvr>
+    <a:masterClrMapping/>
+  </p:clrMapOvr>
+</p:sld>
+</file>
+
+<file path=ppt/slides/slide12.xml><?xml version="1.0" encoding="utf-8"?>
+<p:sld xmlns:a="http://schemas.openxmlformats.org/drawingml/2006/main" xmlns:p="http://schemas.openxmlformats.org/presentationml/2006/main" xmlns:r="http://schemas.openxmlformats.org/officeDocument/2006/relationships">
+  <p:cSld>
+    <p:spTree>
+      <p:nvGrpSpPr>
+        <p:cNvPr id="1" name=""/>
+        <p:cNvGrpSpPr/>
+        <p:nvPr/>
+      </p:nvGrpSpPr>
+      <p:grpSpPr/>
+      <p:sp>
+        <p:nvSpPr>
+          <p:cNvPr id="2" name="Rectangle 1"/>
+          <p:cNvSpPr/>
+          <p:nvPr/>
+        </p:nvSpPr>
+        <p:spPr>
+          <a:xfrm>
+            <a:off x="0" y="0"/>
+            <a:ext cx="12191695" cy="6858000"/>
+          </a:xfrm>
+          <a:prstGeom prst="rect">
+            <a:avLst/>
+          </a:prstGeom>
+          <a:solidFill>
+            <a:srgbClr val="FFFFFF"/>
+          </a:solidFill>
+          <a:ln>
+            <a:noFill/>
+          </a:ln>
+        </p:spPr>
+        <p:style>
+          <a:lnRef idx="1">
+            <a:schemeClr val="accent1"/>
+          </a:lnRef>
+          <a:fillRef idx="3">
+            <a:schemeClr val="accent1"/>
+          </a:fillRef>
+          <a:effectRef idx="2">
+            <a:schemeClr val="accent1"/>
+          </a:effectRef>
+          <a:fontRef idx="minor">
+            <a:schemeClr val="lt1"/>
+          </a:fontRef>
+        </p:style>
+        <p:txBody>
+          <a:bodyPr rtlCol="0" anchor="ctr"/>
+          <a:lstStyle/>
+          <a:p>
+            <a:pPr algn="ctr"/>
+          </a:p>
+        </p:txBody>
+      </p:sp>
+      <p:sp>
+        <p:nvSpPr>
+          <p:cNvPr id="3" name="Rectangle 2"/>
+          <p:cNvSpPr/>
+          <p:nvPr/>
+        </p:nvSpPr>
+        <p:spPr>
+          <a:xfrm>
+            <a:off x="0" y="0"/>
+            <a:ext cx="12191695" cy="502920"/>
+          </a:xfrm>
+          <a:prstGeom prst="rect">
+            <a:avLst/>
+          </a:prstGeom>
+          <a:solidFill>
+            <a:srgbClr val="0F1923"/>
+          </a:solidFill>
+          <a:ln>
+            <a:noFill/>
+          </a:ln>
+        </p:spPr>
+        <p:style>
+          <a:lnRef idx="1">
+            <a:schemeClr val="accent1"/>
+          </a:lnRef>
+          <a:fillRef idx="3">
+            <a:schemeClr val="accent1"/>
+          </a:fillRef>
+          <a:effectRef idx="2">
+            <a:schemeClr val="accent1"/>
+          </a:effectRef>
+          <a:fontRef idx="minor">
+            <a:schemeClr val="lt1"/>
+          </a:fontRef>
+        </p:style>
+        <p:txBody>
+          <a:bodyPr rtlCol="0" anchor="ctr"/>
+          <a:lstStyle/>
+          <a:p>
+            <a:pPr algn="ctr"/>
+          </a:p>
+        </p:txBody>
+      </p:sp>
+      <p:sp>
+        <p:nvSpPr>
+          <p:cNvPr id="4" name="Rectangle 3"/>
+          <p:cNvSpPr/>
+          <p:nvPr/>
+        </p:nvSpPr>
+        <p:spPr>
+          <a:xfrm>
+            <a:off x="0" y="0"/>
+            <a:ext cx="45720" cy="502920"/>
+          </a:xfrm>
+          <a:prstGeom prst="rect">
+            <a:avLst/>
+          </a:prstGeom>
+          <a:solidFill>
+            <a:srgbClr val="1A6FD8"/>
+          </a:solidFill>
+          <a:ln>
+            <a:noFill/>
+          </a:ln>
+        </p:spPr>
+        <p:style>
+          <a:lnRef idx="1">
+            <a:schemeClr val="accent1"/>
+          </a:lnRef>
+          <a:fillRef idx="3">
+            <a:schemeClr val="accent1"/>
+          </a:fillRef>
+          <a:effectRef idx="2">
+            <a:schemeClr val="accent1"/>
+          </a:effectRef>
+          <a:fontRef idx="minor">
+            <a:schemeClr val="lt1"/>
+          </a:fontRef>
+        </p:style>
+        <p:txBody>
+          <a:bodyPr rtlCol="0" anchor="ctr"/>
+          <a:lstStyle/>
+          <a:p>
+            <a:pPr algn="ctr"/>
+          </a:p>
+        </p:txBody>
+      </p:sp>
+      <p:sp>
+        <p:nvSpPr>
+          <p:cNvPr id="5" name="TextBox 4"/>
+          <p:cNvSpPr txBox="1"/>
+          <p:nvPr/>
+        </p:nvSpPr>
+        <p:spPr>
+          <a:xfrm>
+            <a:off x="548640" y="0"/>
+            <a:ext cx="2743200" cy="502920"/>
+          </a:xfrm>
+          <a:prstGeom prst="rect">
+            <a:avLst/>
+          </a:prstGeom>
+          <a:noFill/>
+        </p:spPr>
+        <p:txBody>
+          <a:bodyPr wrap="square">
+            <a:spAutoFit/>
+          </a:bodyPr>
+          <a:lstStyle/>
+          <a:p>
+            <a:pPr algn="l"/>
+            <a:r>
+              <a:rPr sz="1000" b="1">
+                <a:solidFill>
+                  <a:srgbClr val="FFFFFF"/>
+                </a:solidFill>
+                <a:latin typeface="Noto Sans KR"/>
+              </a:rPr>
+              <a:t>마케팅천재</a:t>
+            </a:r>
+          </a:p>
+        </p:txBody>
+      </p:sp>
+      <p:sp>
+        <p:nvSpPr>
+          <p:cNvPr id="6" name="TextBox 5"/>
+          <p:cNvSpPr txBox="1"/>
+          <p:nvPr/>
+        </p:nvSpPr>
+        <p:spPr>
+          <a:xfrm>
+            <a:off x="8534095" y="0"/>
+            <a:ext cx="3108960" cy="502920"/>
+          </a:xfrm>
+          <a:prstGeom prst="rect">
+            <a:avLst/>
+          </a:prstGeom>
+          <a:noFill/>
+        </p:spPr>
+        <p:txBody>
+          <a:bodyPr wrap="square">
+            <a:spAutoFit/>
+          </a:bodyPr>
+          <a:lstStyle/>
+          <a:p>
+            <a:pPr algn="r"/>
+            <a:r>
+              <a:rPr sz="900" b="0">
+                <a:solidFill>
+                  <a:srgbClr val="FFFFFF"/>
+                </a:solidFill>
+                <a:latin typeface="Noto Sans KR"/>
+              </a:rPr>
+              <a:t>FAQ 08 · 비용</a:t>
+            </a:r>
+          </a:p>
+        </p:txBody>
+      </p:sp>
+      <p:sp>
+        <p:nvSpPr>
+          <p:cNvPr id="7" name="Rectangle 6"/>
+          <p:cNvSpPr/>
+          <p:nvPr/>
+        </p:nvSpPr>
+        <p:spPr>
+          <a:xfrm>
+            <a:off x="0" y="6510528"/>
+            <a:ext cx="12191695" cy="347472"/>
+          </a:xfrm>
+          <a:prstGeom prst="rect">
+            <a:avLst/>
+          </a:prstGeom>
+          <a:solidFill>
+            <a:srgbClr val="1A6FD8"/>
+          </a:solidFill>
+          <a:ln>
+            <a:noFill/>
+          </a:ln>
+        </p:spPr>
+        <p:style>
+          <a:lnRef idx="1">
+            <a:schemeClr val="accent1"/>
+          </a:lnRef>
+          <a:fillRef idx="3">
+            <a:schemeClr val="accent1"/>
+          </a:fillRef>
+          <a:effectRef idx="2">
+            <a:schemeClr val="accent1"/>
+          </a:effectRef>
+          <a:fontRef idx="minor">
+            <a:schemeClr val="lt1"/>
+          </a:fontRef>
+        </p:style>
+        <p:txBody>
+          <a:bodyPr rtlCol="0" anchor="ctr"/>
+          <a:lstStyle/>
+          <a:p>
+            <a:pPr algn="ctr"/>
+          </a:p>
+        </p:txBody>
+      </p:sp>
+      <p:sp>
+        <p:nvSpPr>
+          <p:cNvPr id="8" name="TextBox 7"/>
+          <p:cNvSpPr txBox="1"/>
+          <p:nvPr/>
+        </p:nvSpPr>
+        <p:spPr>
+          <a:xfrm>
+            <a:off x="548640" y="6510528"/>
+            <a:ext cx="4572000" cy="347472"/>
+          </a:xfrm>
+          <a:prstGeom prst="rect">
+            <a:avLst/>
+          </a:prstGeom>
+          <a:noFill/>
+        </p:spPr>
+        <p:txBody>
+          <a:bodyPr wrap="square">
+            <a:spAutoFit/>
+          </a:bodyPr>
+          <a:lstStyle/>
+          <a:p>
+            <a:pPr algn="l"/>
+            <a:r>
+              <a:rPr sz="800" b="0">
+                <a:solidFill>
+                  <a:srgbClr val="FFFFFF"/>
+                </a:solidFill>
+                <a:latin typeface="Noto Sans KR"/>
+              </a:rPr>
+              <a:t>마케팅천재 · 대표 정귀명</a:t>
+            </a:r>
+          </a:p>
+        </p:txBody>
+      </p:sp>
+      <p:sp>
+        <p:nvSpPr>
+          <p:cNvPr id="9" name="TextBox 8"/>
+          <p:cNvSpPr txBox="1"/>
+          <p:nvPr/>
+        </p:nvSpPr>
+        <p:spPr>
+          <a:xfrm>
+            <a:off x="10362895" y="6510528"/>
+            <a:ext cx="1554480" cy="347472"/>
+          </a:xfrm>
+          <a:prstGeom prst="rect">
+            <a:avLst/>
+          </a:prstGeom>
+          <a:noFill/>
+        </p:spPr>
+        <p:txBody>
+          <a:bodyPr wrap="square">
+            <a:spAutoFit/>
+          </a:bodyPr>
+          <a:lstStyle/>
+          <a:p>
+            <a:pPr algn="r"/>
+            <a:r>
+              <a:rPr sz="800" b="0">
+                <a:solidFill>
+                  <a:srgbClr val="FFFFFF"/>
+                </a:solidFill>
+                <a:latin typeface="Noto Sans KR"/>
+              </a:rPr>
+              <a:t>12 / 13</a:t>
+            </a:r>
+          </a:p>
+        </p:txBody>
+      </p:sp>
+      <p:sp>
+        <p:nvSpPr>
+          <p:cNvPr id="10" name="TextBox 9"/>
+          <p:cNvSpPr txBox="1"/>
+          <p:nvPr/>
+        </p:nvSpPr>
+        <p:spPr>
+          <a:xfrm>
+            <a:off x="548640" y="685800"/>
+            <a:ext cx="11094415" cy="411480"/>
+          </a:xfrm>
+          <a:prstGeom prst="rect">
+            <a:avLst/>
+          </a:prstGeom>
+          <a:noFill/>
+        </p:spPr>
+        <p:txBody>
+          <a:bodyPr wrap="square">
+            <a:spAutoFit/>
+          </a:bodyPr>
+          <a:lstStyle/>
+          <a:p>
+            <a:pPr algn="l"/>
+            <a:r>
+              <a:rPr sz="1800" b="1">
+                <a:solidFill>
+                  <a:srgbClr val="1A6FD8"/>
+                </a:solidFill>
+                <a:latin typeface="Noto Serif KR"/>
+              </a:rPr>
+              <a:t>2. 플레이스 상위노출</a:t>
+            </a:r>
+          </a:p>
+        </p:txBody>
+      </p:sp>
+      <p:sp>
+        <p:nvSpPr>
+          <p:cNvPr id="11" name="TextBox 10"/>
+          <p:cNvSpPr txBox="1"/>
+          <p:nvPr/>
+        </p:nvSpPr>
+        <p:spPr>
+          <a:xfrm>
+            <a:off x="548640" y="1143000"/>
+            <a:ext cx="11094415" cy="292608"/>
+          </a:xfrm>
+          <a:prstGeom prst="rect">
+            <a:avLst/>
+          </a:prstGeom>
+          <a:noFill/>
+        </p:spPr>
+        <p:txBody>
+          <a:bodyPr wrap="square">
+            <a:spAutoFit/>
+          </a:bodyPr>
+          <a:lstStyle/>
+          <a:p>
+            <a:pPr algn="l"/>
+            <a:r>
+              <a:rPr sz="1100" b="0">
+                <a:solidFill>
+                  <a:srgbClr val="0F1923"/>
+                </a:solidFill>
+                <a:latin typeface="Noto Sans KR"/>
+              </a:rPr>
+              <a:t>환자가 우리 병원을 발견하는 가장 강력한 통로입니다.</a:t>
+            </a:r>
+          </a:p>
+        </p:txBody>
+      </p:sp>
+      <p:sp>
+        <p:nvSpPr>
+          <p:cNvPr id="12" name="Rectangle 11"/>
+          <p:cNvSpPr/>
+          <p:nvPr/>
+        </p:nvSpPr>
+        <p:spPr>
+          <a:xfrm>
+            <a:off x="548640" y="1554480"/>
+            <a:ext cx="45720" cy="594360"/>
+          </a:xfrm>
+          <a:prstGeom prst="rect">
+            <a:avLst/>
+          </a:prstGeom>
+          <a:solidFill>
+            <a:srgbClr val="1A6FD8"/>
+          </a:solidFill>
+          <a:ln>
+            <a:noFill/>
+          </a:ln>
+        </p:spPr>
+        <p:style>
+          <a:lnRef idx="1">
+            <a:schemeClr val="accent1"/>
+          </a:lnRef>
+          <a:fillRef idx="3">
+            <a:schemeClr val="accent1"/>
+          </a:fillRef>
+          <a:effectRef idx="2">
+            <a:schemeClr val="accent1"/>
+          </a:effectRef>
+          <a:fontRef idx="minor">
+            <a:schemeClr val="lt1"/>
+          </a:fontRef>
+        </p:style>
+        <p:txBody>
+          <a:bodyPr rtlCol="0" anchor="ctr"/>
+          <a:lstStyle/>
+          <a:p>
+            <a:pPr algn="ctr"/>
+          </a:p>
+        </p:txBody>
+      </p:sp>
+      <p:sp>
+        <p:nvSpPr>
+          <p:cNvPr id="13" name="Rectangle 12"/>
+          <p:cNvSpPr/>
+          <p:nvPr/>
+        </p:nvSpPr>
+        <p:spPr>
+          <a:xfrm>
+            <a:off x="594360" y="1554480"/>
+            <a:ext cx="11048695" cy="594360"/>
+          </a:xfrm>
+          <a:prstGeom prst="rect">
+            <a:avLst/>
+          </a:prstGeom>
+          <a:solidFill>
+            <a:srgbClr val="F4F7FA"/>
+          </a:solidFill>
+          <a:ln>
+            <a:noFill/>
+          </a:ln>
+        </p:spPr>
+        <p:style>
+          <a:lnRef idx="1">
+            <a:schemeClr val="accent1"/>
+          </a:lnRef>
+          <a:fillRef idx="3">
+            <a:schemeClr val="accent1"/>
+          </a:fillRef>
+          <a:effectRef idx="2">
+            <a:schemeClr val="accent1"/>
+          </a:effectRef>
+          <a:fontRef idx="minor">
+            <a:schemeClr val="lt1"/>
+          </a:fontRef>
+        </p:style>
+        <p:txBody>
+          <a:bodyPr rtlCol="0" anchor="ctr"/>
+          <a:lstStyle/>
+          <a:p>
+            <a:pPr algn="ctr"/>
+          </a:p>
+        </p:txBody>
+      </p:sp>
+      <p:sp>
+        <p:nvSpPr>
+          <p:cNvPr id="14" name="TextBox 13"/>
+          <p:cNvSpPr txBox="1"/>
+          <p:nvPr/>
+        </p:nvSpPr>
+        <p:spPr>
+          <a:xfrm>
+            <a:off x="731520" y="1664208"/>
+            <a:ext cx="10774375" cy="347472"/>
+          </a:xfrm>
+          <a:prstGeom prst="rect">
+            <a:avLst/>
+          </a:prstGeom>
+          <a:noFill/>
+        </p:spPr>
+        <p:txBody>
+          <a:bodyPr wrap="square">
+            <a:spAutoFit/>
+          </a:bodyPr>
+          <a:lstStyle/>
+          <a:p>
+            <a:pPr algn="l"/>
+            <a:r>
+              <a:rPr sz="1000" b="1">
+                <a:solidFill>
+                  <a:srgbClr val="0F1923"/>
+                </a:solidFill>
+                <a:latin typeface="Noto Sans KR"/>
+              </a:rPr>
+              <a:t>제공: [지역명 + 진료과] 1-5위 · 진료과별 세부 키워드 확장</a:t>
+            </a:r>
+          </a:p>
+        </p:txBody>
+      </p:sp>
+      <p:sp>
+        <p:nvSpPr>
+          <p:cNvPr id="15" name="Rectangle 14"/>
+          <p:cNvSpPr/>
+          <p:nvPr/>
+        </p:nvSpPr>
+        <p:spPr>
+          <a:xfrm>
+            <a:off x="548640" y="2368296"/>
             <a:ext cx="73152" cy="73152"/>
+          </a:xfrm>
+          <a:prstGeom prst="rect">
+            <a:avLst/>
+          </a:prstGeom>
+          <a:solidFill>
+            <a:srgbClr val="1A6FD8"/>
+          </a:solidFill>
+          <a:ln>
+            <a:noFill/>
+          </a:ln>
+        </p:spPr>
+        <p:style>
+          <a:lnRef idx="1">
+            <a:schemeClr val="accent1"/>
+          </a:lnRef>
+          <a:fillRef idx="3">
+            <a:schemeClr val="accent1"/>
+          </a:fillRef>
+          <a:effectRef idx="2">
+            <a:schemeClr val="accent1"/>
+          </a:effectRef>
+          <a:fontRef idx="minor">
+            <a:schemeClr val="lt1"/>
+          </a:fontRef>
+        </p:style>
+        <p:txBody>
+          <a:bodyPr rtlCol="0" anchor="ctr"/>
+          <a:lstStyle/>
+          <a:p>
+            <a:pPr algn="ctr"/>
+          </a:p>
+        </p:txBody>
+      </p:sp>
+      <p:sp>
+        <p:nvSpPr>
+          <p:cNvPr id="16" name="TextBox 15"/>
+          <p:cNvSpPr txBox="1"/>
+          <p:nvPr/>
+        </p:nvSpPr>
+        <p:spPr>
+          <a:xfrm>
+            <a:off x="713232" y="2304288"/>
+            <a:ext cx="10865815" cy="320040"/>
+          </a:xfrm>
+          <a:prstGeom prst="rect">
+            <a:avLst/>
+          </a:prstGeom>
+          <a:noFill/>
+        </p:spPr>
+        <p:txBody>
+          <a:bodyPr wrap="square">
+            <a:spAutoFit/>
+          </a:bodyPr>
+          <a:lstStyle/>
+          <a:p>
+            <a:pPr algn="l"/>
+            <a:r>
+              <a:rPr sz="1000" b="1">
+                <a:solidFill>
+                  <a:srgbClr val="0F1923"/>
+                </a:solidFill>
+                <a:latin typeface="Noto Sans KR"/>
+              </a:rPr>
+              <a:t>월 150만 원~  (키워드 경쟁도 및 난이도에 따라 상이)</a:t>
+            </a:r>
+          </a:p>
+        </p:txBody>
+      </p:sp>
+      <p:sp>
+        <p:nvSpPr>
+          <p:cNvPr id="17" name="Rectangle 16"/>
+          <p:cNvSpPr/>
+          <p:nvPr/>
+        </p:nvSpPr>
+        <p:spPr>
+          <a:xfrm>
+            <a:off x="548640" y="2752344"/>
+            <a:ext cx="73152" cy="73152"/>
+          </a:xfrm>
+          <a:prstGeom prst="rect">
+            <a:avLst/>
+          </a:prstGeom>
+          <a:solidFill>
+            <a:srgbClr val="1A6FD8"/>
+          </a:solidFill>
+          <a:ln>
+            <a:noFill/>
+          </a:ln>
+        </p:spPr>
+        <p:style>
+          <a:lnRef idx="1">
+            <a:schemeClr val="accent1"/>
+          </a:lnRef>
+          <a:fillRef idx="3">
+            <a:schemeClr val="accent1"/>
+          </a:fillRef>
+          <a:effectRef idx="2">
+            <a:schemeClr val="accent1"/>
+          </a:effectRef>
+          <a:fontRef idx="minor">
+            <a:schemeClr val="lt1"/>
+          </a:fontRef>
+        </p:style>
+        <p:txBody>
+          <a:bodyPr rtlCol="0" anchor="ctr"/>
+          <a:lstStyle/>
+          <a:p>
+            <a:pPr algn="ctr"/>
+          </a:p>
+        </p:txBody>
+      </p:sp>
+      <p:sp>
+        <p:nvSpPr>
+          <p:cNvPr id="18" name="TextBox 17"/>
+          <p:cNvSpPr txBox="1"/>
+          <p:nvPr/>
+        </p:nvSpPr>
+        <p:spPr>
+          <a:xfrm>
+            <a:off x="713232" y="2688336"/>
+            <a:ext cx="10865815" cy="320040"/>
+          </a:xfrm>
+          <a:prstGeom prst="rect">
+            <a:avLst/>
+          </a:prstGeom>
+          <a:noFill/>
+        </p:spPr>
+        <p:txBody>
+          <a:bodyPr wrap="square">
+            <a:spAutoFit/>
+          </a:bodyPr>
+          <a:lstStyle/>
+          <a:p>
+            <a:pPr algn="l"/>
+            <a:r>
+              <a:rPr sz="1000" b="0">
+                <a:solidFill>
+                  <a:srgbClr val="0F1923"/>
+                </a:solidFill>
+                <a:latin typeface="Noto Sans KR"/>
+              </a:rPr>
+              <a:t>1-5위, 최소 25일 노출 보장</a:t>
+            </a:r>
+          </a:p>
+        </p:txBody>
+      </p:sp>
+      <p:sp>
+        <p:nvSpPr>
+          <p:cNvPr id="19" name="Rectangle 18"/>
+          <p:cNvSpPr/>
+          <p:nvPr/>
+        </p:nvSpPr>
+        <p:spPr>
+          <a:xfrm>
+            <a:off x="548640" y="3136392"/>
+            <a:ext cx="73152" cy="73152"/>
+          </a:xfrm>
+          <a:prstGeom prst="rect">
+            <a:avLst/>
+          </a:prstGeom>
+          <a:solidFill>
+            <a:srgbClr val="1A6FD8"/>
+          </a:solidFill>
+          <a:ln>
+            <a:noFill/>
+          </a:ln>
+        </p:spPr>
+        <p:style>
+          <a:lnRef idx="1">
+            <a:schemeClr val="accent1"/>
+          </a:lnRef>
+          <a:fillRef idx="3">
+            <a:schemeClr val="accent1"/>
+          </a:fillRef>
+          <a:effectRef idx="2">
+            <a:schemeClr val="accent1"/>
+          </a:effectRef>
+          <a:fontRef idx="minor">
+            <a:schemeClr val="lt1"/>
+          </a:fontRef>
+        </p:style>
+        <p:txBody>
+          <a:bodyPr rtlCol="0" anchor="ctr"/>
+          <a:lstStyle/>
+          <a:p>
+            <a:pPr algn="ctr"/>
+          </a:p>
+        </p:txBody>
+      </p:sp>
+      <p:sp>
+        <p:nvSpPr>
+          <p:cNvPr id="20" name="TextBox 19"/>
+          <p:cNvSpPr txBox="1"/>
+          <p:nvPr/>
+        </p:nvSpPr>
+        <p:spPr>
+          <a:xfrm>
+            <a:off x="713232" y="3072384"/>
+            <a:ext cx="10865815" cy="320040"/>
+          </a:xfrm>
+          <a:prstGeom prst="rect">
+            <a:avLst/>
+          </a:prstGeom>
+          <a:noFill/>
+        </p:spPr>
+        <p:txBody>
+          <a:bodyPr wrap="square">
+            <a:spAutoFit/>
+          </a:bodyPr>
+          <a:lstStyle/>
+          <a:p>
+            <a:pPr algn="l"/>
+            <a:r>
+              <a:rPr sz="1000" b="0">
+                <a:solidFill>
+                  <a:srgbClr val="0F1923"/>
+                </a:solidFill>
+                <a:latin typeface="Noto Sans KR"/>
+              </a:rPr>
+              <a:t>순위 이탈 시, A/S 필수 보장</a:t>
+            </a:r>
+          </a:p>
+        </p:txBody>
+      </p:sp>
+      <p:sp>
+        <p:nvSpPr>
+          <p:cNvPr id="21" name="Rectangle 20"/>
+          <p:cNvSpPr/>
+          <p:nvPr/>
+        </p:nvSpPr>
+        <p:spPr>
+          <a:xfrm>
+            <a:off x="548640" y="3520440"/>
+            <a:ext cx="45720" cy="594360"/>
           </a:xfrm>
           <a:prstGeom prst="rect">
             <a:avLst/>
@@ -4136,14 +7522,57 @@
       </p:sp>
       <p:sp>
         <p:nvSpPr>
-          <p:cNvPr id="8" name="TextBox 7"/>
-          <p:cNvSpPr txBox="1"/>
-          <p:nvPr/>
-        </p:nvSpPr>
-        <p:spPr>
-          <a:xfrm>
-            <a:off x="804672" y="3611880"/>
-            <a:ext cx="4907584" cy="347472"/>
+          <p:cNvPr id="22" name="Rectangle 21"/>
+          <p:cNvSpPr/>
+          <p:nvPr/>
+        </p:nvSpPr>
+        <p:spPr>
+          <a:xfrm>
+            <a:off x="594360" y="3520440"/>
+            <a:ext cx="11048695" cy="594360"/>
+          </a:xfrm>
+          <a:prstGeom prst="rect">
+            <a:avLst/>
+          </a:prstGeom>
+          <a:solidFill>
+            <a:srgbClr val="FFF8E0"/>
+          </a:solidFill>
+          <a:ln>
+            <a:noFill/>
+          </a:ln>
+        </p:spPr>
+        <p:style>
+          <a:lnRef idx="1">
+            <a:schemeClr val="accent1"/>
+          </a:lnRef>
+          <a:fillRef idx="3">
+            <a:schemeClr val="accent1"/>
+          </a:fillRef>
+          <a:effectRef idx="2">
+            <a:schemeClr val="accent1"/>
+          </a:effectRef>
+          <a:fontRef idx="minor">
+            <a:schemeClr val="lt1"/>
+          </a:fontRef>
+        </p:style>
+        <p:txBody>
+          <a:bodyPr rtlCol="0" anchor="ctr"/>
+          <a:lstStyle/>
+          <a:p>
+            <a:pPr algn="ctr"/>
+          </a:p>
+        </p:txBody>
+      </p:sp>
+      <p:sp>
+        <p:nvSpPr>
+          <p:cNvPr id="23" name="TextBox 22"/>
+          <p:cNvSpPr txBox="1"/>
+          <p:nvPr/>
+        </p:nvSpPr>
+        <p:spPr>
+          <a:xfrm>
+            <a:off x="731520" y="3593592"/>
+            <a:ext cx="10774375" cy="457200"/>
           </a:xfrm>
           <a:prstGeom prst="rect">
             <a:avLst/>
@@ -4160,24 +7589,546 @@
             <a:r>
               <a:rPr sz="1000" b="0">
                 <a:solidFill>
+                  <a:srgbClr val="0F1923"/>
+                </a:solidFill>
+                <a:latin typeface="Noto Sans KR"/>
+              </a:rPr>
+              <a:t>💡 시너지 팁: 플레이스 단독 진행보다 [브랜드 블로그]와 결합 시 신환 전환율이 300%+ 이상 급증합니다.</a:t>
+            </a:r>
+          </a:p>
+        </p:txBody>
+      </p:sp>
+      <p:sp>
+        <p:nvSpPr>
+          <p:cNvPr id="24" name="Rectangle 23"/>
+          <p:cNvSpPr/>
+          <p:nvPr/>
+        </p:nvSpPr>
+        <p:spPr>
+          <a:xfrm>
+            <a:off x="548640" y="4270248"/>
+            <a:ext cx="54864" cy="914400"/>
+          </a:xfrm>
+          <a:prstGeom prst="rect">
+            <a:avLst/>
+          </a:prstGeom>
+          <a:solidFill>
+            <a:srgbClr val="1A6FD8"/>
+          </a:solidFill>
+          <a:ln>
+            <a:noFill/>
+          </a:ln>
+        </p:spPr>
+        <p:style>
+          <a:lnRef idx="1">
+            <a:schemeClr val="accent1"/>
+          </a:lnRef>
+          <a:fillRef idx="3">
+            <a:schemeClr val="accent1"/>
+          </a:fillRef>
+          <a:effectRef idx="2">
+            <a:schemeClr val="accent1"/>
+          </a:effectRef>
+          <a:fontRef idx="minor">
+            <a:schemeClr val="lt1"/>
+          </a:fontRef>
+        </p:style>
+        <p:txBody>
+          <a:bodyPr rtlCol="0" anchor="ctr"/>
+          <a:lstStyle/>
+          <a:p>
+            <a:pPr algn="ctr"/>
+          </a:p>
+        </p:txBody>
+      </p:sp>
+      <p:sp>
+        <p:nvSpPr>
+          <p:cNvPr id="25" name="Rectangle 24"/>
+          <p:cNvSpPr/>
+          <p:nvPr/>
+        </p:nvSpPr>
+        <p:spPr>
+          <a:xfrm>
+            <a:off x="603504" y="4270248"/>
+            <a:ext cx="11039551" cy="914400"/>
+          </a:xfrm>
+          <a:prstGeom prst="rect">
+            <a:avLst/>
+          </a:prstGeom>
+          <a:solidFill>
+            <a:srgbClr val="EBF2FC"/>
+          </a:solidFill>
+          <a:ln>
+            <a:noFill/>
+          </a:ln>
+        </p:spPr>
+        <p:style>
+          <a:lnRef idx="1">
+            <a:schemeClr val="accent1"/>
+          </a:lnRef>
+          <a:fillRef idx="3">
+            <a:schemeClr val="accent1"/>
+          </a:fillRef>
+          <a:effectRef idx="2">
+            <a:schemeClr val="accent1"/>
+          </a:effectRef>
+          <a:fontRef idx="minor">
+            <a:schemeClr val="lt1"/>
+          </a:fontRef>
+        </p:style>
+        <p:txBody>
+          <a:bodyPr rtlCol="0" anchor="ctr"/>
+          <a:lstStyle/>
+          <a:p>
+            <a:pPr algn="ctr"/>
+          </a:p>
+        </p:txBody>
+      </p:sp>
+      <p:sp>
+        <p:nvSpPr>
+          <p:cNvPr id="26" name="TextBox 25"/>
+          <p:cNvSpPr txBox="1"/>
+          <p:nvPr/>
+        </p:nvSpPr>
+        <p:spPr>
+          <a:xfrm>
+            <a:off x="731520" y="4343400"/>
+            <a:ext cx="10774375" cy="256032"/>
+          </a:xfrm>
+          <a:prstGeom prst="rect">
+            <a:avLst/>
+          </a:prstGeom>
+          <a:noFill/>
+        </p:spPr>
+        <p:txBody>
+          <a:bodyPr wrap="square">
+            <a:spAutoFit/>
+          </a:bodyPr>
+          <a:lstStyle/>
+          <a:p>
+            <a:pPr algn="l"/>
+            <a:r>
+              <a:rPr sz="1000" b="1">
+                <a:solidFill>
+                  <a:srgbClr val="0F1923"/>
+                </a:solidFill>
+                <a:latin typeface="Noto Sans KR"/>
+              </a:rPr>
+              <a:t>✅ 최소 권장 예산: 월 100 ~ 300만 원</a:t>
+            </a:r>
+          </a:p>
+        </p:txBody>
+      </p:sp>
+      <p:sp>
+        <p:nvSpPr>
+          <p:cNvPr id="27" name="TextBox 26"/>
+          <p:cNvSpPr txBox="1"/>
+          <p:nvPr/>
+        </p:nvSpPr>
+        <p:spPr>
+          <a:xfrm>
+            <a:off x="731520" y="4617720"/>
+            <a:ext cx="10774375" cy="256032"/>
+          </a:xfrm>
+          <a:prstGeom prst="rect">
+            <a:avLst/>
+          </a:prstGeom>
+          <a:noFill/>
+        </p:spPr>
+        <p:txBody>
+          <a:bodyPr wrap="square">
+            <a:spAutoFit/>
+          </a:bodyPr>
+          <a:lstStyle/>
+          <a:p>
+            <a:pPr algn="l"/>
+            <a:r>
+              <a:rPr sz="1000" b="0">
+                <a:solidFill>
+                  <a:srgbClr val="0F1923"/>
+                </a:solidFill>
+                <a:latin typeface="Noto Sans KR"/>
+              </a:rPr>
+              <a:t>ROAS (투자 대비 매출): 파트너 병원 평균 1,000% +   |   필승 조합: [브랜드 블로그] + [플레이스]</a:t>
+            </a:r>
+          </a:p>
+        </p:txBody>
+      </p:sp>
+      <p:sp>
+        <p:nvSpPr>
+          <p:cNvPr id="28" name="TextBox 27"/>
+          <p:cNvSpPr txBox="1"/>
+          <p:nvPr/>
+        </p:nvSpPr>
+        <p:spPr>
+          <a:xfrm>
+            <a:off x="731520" y="4892040"/>
+            <a:ext cx="10774375" cy="256032"/>
+          </a:xfrm>
+          <a:prstGeom prst="rect">
+            <a:avLst/>
+          </a:prstGeom>
+          <a:noFill/>
+        </p:spPr>
+        <p:txBody>
+          <a:bodyPr wrap="square">
+            <a:spAutoFit/>
+          </a:bodyPr>
+          <a:lstStyle/>
+          <a:p>
+            <a:pPr algn="l"/>
+            <a:r>
+              <a:rPr sz="900" b="0">
+                <a:solidFill>
+                  <a:srgbClr val="4A5568"/>
+                </a:solidFill>
+                <a:latin typeface="Noto Sans KR"/>
+              </a:rPr>
+              <a:t>마케팅 확장 (홈페이지·인스타·유튜브·카페·바이럴 등) 은 [브랜드 블로그]+[플레이스] 안착 이후입니다.</a:t>
+            </a:r>
+          </a:p>
+        </p:txBody>
+      </p:sp>
+      <p:sp>
+        <p:nvSpPr>
+          <p:cNvPr id="29" name="Rectangle 28"/>
+          <p:cNvSpPr/>
+          <p:nvPr/>
+        </p:nvSpPr>
+        <p:spPr>
+          <a:xfrm>
+            <a:off x="548640" y="5321808"/>
+            <a:ext cx="54864" cy="685800"/>
+          </a:xfrm>
+          <a:prstGeom prst="rect">
+            <a:avLst/>
+          </a:prstGeom>
+          <a:solidFill>
+            <a:srgbClr val="0F1923"/>
+          </a:solidFill>
+          <a:ln>
+            <a:noFill/>
+          </a:ln>
+        </p:spPr>
+        <p:style>
+          <a:lnRef idx="1">
+            <a:schemeClr val="accent1"/>
+          </a:lnRef>
+          <a:fillRef idx="3">
+            <a:schemeClr val="accent1"/>
+          </a:fillRef>
+          <a:effectRef idx="2">
+            <a:schemeClr val="accent1"/>
+          </a:effectRef>
+          <a:fontRef idx="minor">
+            <a:schemeClr val="lt1"/>
+          </a:fontRef>
+        </p:style>
+        <p:txBody>
+          <a:bodyPr rtlCol="0" anchor="ctr"/>
+          <a:lstStyle/>
+          <a:p>
+            <a:pPr algn="ctr"/>
+          </a:p>
+        </p:txBody>
+      </p:sp>
+      <p:sp>
+        <p:nvSpPr>
+          <p:cNvPr id="30" name="Rectangle 29"/>
+          <p:cNvSpPr/>
+          <p:nvPr/>
+        </p:nvSpPr>
+        <p:spPr>
+          <a:xfrm>
+            <a:off x="603504" y="5321808"/>
+            <a:ext cx="11039551" cy="685800"/>
+          </a:xfrm>
+          <a:prstGeom prst="rect">
+            <a:avLst/>
+          </a:prstGeom>
+          <a:solidFill>
+            <a:srgbClr val="F0F2F5"/>
+          </a:solidFill>
+          <a:ln>
+            <a:noFill/>
+          </a:ln>
+        </p:spPr>
+        <p:style>
+          <a:lnRef idx="1">
+            <a:schemeClr val="accent1"/>
+          </a:lnRef>
+          <a:fillRef idx="3">
+            <a:schemeClr val="accent1"/>
+          </a:fillRef>
+          <a:effectRef idx="2">
+            <a:schemeClr val="accent1"/>
+          </a:effectRef>
+          <a:fontRef idx="minor">
+            <a:schemeClr val="lt1"/>
+          </a:fontRef>
+        </p:style>
+        <p:txBody>
+          <a:bodyPr rtlCol="0" anchor="ctr"/>
+          <a:lstStyle/>
+          <a:p>
+            <a:pPr algn="ctr"/>
+          </a:p>
+        </p:txBody>
+      </p:sp>
+      <p:sp>
+        <p:nvSpPr>
+          <p:cNvPr id="31" name="TextBox 30"/>
+          <p:cNvSpPr txBox="1"/>
+          <p:nvPr/>
+        </p:nvSpPr>
+        <p:spPr>
+          <a:xfrm>
+            <a:off x="731520" y="5413248"/>
+            <a:ext cx="10774375" cy="502920"/>
+          </a:xfrm>
+          <a:prstGeom prst="rect">
+            <a:avLst/>
+          </a:prstGeom>
+          <a:noFill/>
+        </p:spPr>
+        <p:txBody>
+          <a:bodyPr wrap="square">
+            <a:spAutoFit/>
+          </a:bodyPr>
+          <a:lstStyle/>
+          <a:p>
+            <a:pPr algn="l"/>
+            <a:r>
+              <a:rPr sz="1000" b="1">
+                <a:solidFill>
+                  <a:srgbClr val="0F1923"/>
+                </a:solidFill>
+                <a:latin typeface="Noto Sans KR"/>
+              </a:rPr>
+              <a:t>"단언컨대, 병원 마케팅의 정답은 [브랜드 블로그]와 [플레이스]의 시너지에 있습니다. 확장은 그 이후입니다."</a:t>
+            </a:r>
+          </a:p>
+        </p:txBody>
+      </p:sp>
+    </p:spTree>
+  </p:cSld>
+  <p:clrMapOvr>
+    <a:masterClrMapping/>
+  </p:clrMapOvr>
+</p:sld>
+</file>
+
+<file path=ppt/slides/slide13.xml><?xml version="1.0" encoding="utf-8"?>
+<p:sld xmlns:a="http://schemas.openxmlformats.org/drawingml/2006/main" xmlns:p="http://schemas.openxmlformats.org/presentationml/2006/main" xmlns:r="http://schemas.openxmlformats.org/officeDocument/2006/relationships">
+  <p:cSld>
+    <p:spTree>
+      <p:nvGrpSpPr>
+        <p:cNvPr id="1" name=""/>
+        <p:cNvGrpSpPr/>
+        <p:nvPr/>
+      </p:nvGrpSpPr>
+      <p:grpSpPr/>
+      <p:sp>
+        <p:nvSpPr>
+          <p:cNvPr id="2" name="Rectangle 1"/>
+          <p:cNvSpPr/>
+          <p:nvPr/>
+        </p:nvSpPr>
+        <p:spPr>
+          <a:xfrm>
+            <a:off x="0" y="0"/>
+            <a:ext cx="6096304" cy="6858000"/>
+          </a:xfrm>
+          <a:prstGeom prst="rect">
+            <a:avLst/>
+          </a:prstGeom>
+          <a:solidFill>
+            <a:srgbClr val="1A6FD8"/>
+          </a:solidFill>
+          <a:ln>
+            <a:noFill/>
+          </a:ln>
+        </p:spPr>
+        <p:style>
+          <a:lnRef idx="1">
+            <a:schemeClr val="accent1"/>
+          </a:lnRef>
+          <a:fillRef idx="3">
+            <a:schemeClr val="accent1"/>
+          </a:fillRef>
+          <a:effectRef idx="2">
+            <a:schemeClr val="accent1"/>
+          </a:effectRef>
+          <a:fontRef idx="minor">
+            <a:schemeClr val="lt1"/>
+          </a:fontRef>
+        </p:style>
+        <p:txBody>
+          <a:bodyPr rtlCol="0" anchor="ctr"/>
+          <a:lstStyle/>
+          <a:p>
+            <a:pPr algn="ctr"/>
+          </a:p>
+        </p:txBody>
+      </p:sp>
+      <p:sp>
+        <p:nvSpPr>
+          <p:cNvPr id="3" name="Rectangle 2"/>
+          <p:cNvSpPr/>
+          <p:nvPr/>
+        </p:nvSpPr>
+        <p:spPr>
+          <a:xfrm>
+            <a:off x="6096304" y="0"/>
+            <a:ext cx="6096304" cy="6858000"/>
+          </a:xfrm>
+          <a:prstGeom prst="rect">
+            <a:avLst/>
+          </a:prstGeom>
+          <a:solidFill>
+            <a:srgbClr val="F4F7FA"/>
+          </a:solidFill>
+          <a:ln>
+            <a:noFill/>
+          </a:ln>
+        </p:spPr>
+        <p:style>
+          <a:lnRef idx="1">
+            <a:schemeClr val="accent1"/>
+          </a:lnRef>
+          <a:fillRef idx="3">
+            <a:schemeClr val="accent1"/>
+          </a:fillRef>
+          <a:effectRef idx="2">
+            <a:schemeClr val="accent1"/>
+          </a:effectRef>
+          <a:fontRef idx="minor">
+            <a:schemeClr val="lt1"/>
+          </a:fontRef>
+        </p:style>
+        <p:txBody>
+          <a:bodyPr rtlCol="0" anchor="ctr"/>
+          <a:lstStyle/>
+          <a:p>
+            <a:pPr algn="ctr"/>
+          </a:p>
+        </p:txBody>
+      </p:sp>
+      <p:sp>
+        <p:nvSpPr>
+          <p:cNvPr id="4" name="TextBox 3"/>
+          <p:cNvSpPr txBox="1"/>
+          <p:nvPr/>
+        </p:nvSpPr>
+        <p:spPr>
+          <a:xfrm>
+            <a:off x="640080" y="1005840"/>
+            <a:ext cx="5090464" cy="320040"/>
+          </a:xfrm>
+          <a:prstGeom prst="rect">
+            <a:avLst/>
+          </a:prstGeom>
+          <a:noFill/>
+        </p:spPr>
+        <p:txBody>
+          <a:bodyPr wrap="square">
+            <a:spAutoFit/>
+          </a:bodyPr>
+          <a:lstStyle/>
+          <a:p>
+            <a:pPr algn="l"/>
+            <a:r>
+              <a:rPr sz="900" b="1">
+                <a:solidFill>
+                  <a:srgbClr val="CCDDFF"/>
+                </a:solidFill>
+                <a:latin typeface="Noto Sans KR"/>
+              </a:rPr>
+              <a:t>마케팅 투자 대비 수익률</a:t>
+            </a:r>
+          </a:p>
+        </p:txBody>
+      </p:sp>
+      <p:sp>
+        <p:nvSpPr>
+          <p:cNvPr id="5" name="TextBox 4"/>
+          <p:cNvSpPr txBox="1"/>
+          <p:nvPr/>
+        </p:nvSpPr>
+        <p:spPr>
+          <a:xfrm>
+            <a:off x="640080" y="1371600"/>
+            <a:ext cx="5090464" cy="1188720"/>
+          </a:xfrm>
+          <a:prstGeom prst="rect">
+            <a:avLst/>
+          </a:prstGeom>
+          <a:noFill/>
+        </p:spPr>
+        <p:txBody>
+          <a:bodyPr wrap="square">
+            <a:spAutoFit/>
+          </a:bodyPr>
+          <a:lstStyle/>
+          <a:p>
+            <a:pPr algn="l"/>
+            <a:r>
+              <a:rPr sz="6400" b="1">
+                <a:solidFill>
                   <a:srgbClr val="FFFFFF"/>
                 </a:solidFill>
-                <a:latin typeface="Noto Sans KR"/>
-              </a:rPr>
-              <a:t>브랜드 블로그 × 플레이스 시너지</a:t>
-            </a:r>
-          </a:p>
-        </p:txBody>
-      </p:sp>
-      <p:sp>
-        <p:nvSpPr>
-          <p:cNvPr id="9" name="Rectangle 8"/>
+                <a:latin typeface="Noto Serif KR"/>
+              </a:rPr>
+              <a:t>1,000%</a:t>
+            </a:r>
+          </a:p>
+        </p:txBody>
+      </p:sp>
+      <p:sp>
+        <p:nvSpPr>
+          <p:cNvPr id="6" name="TextBox 5"/>
+          <p:cNvSpPr txBox="1"/>
+          <p:nvPr/>
+        </p:nvSpPr>
+        <p:spPr>
+          <a:xfrm>
+            <a:off x="640080" y="2606040"/>
+            <a:ext cx="5090464" cy="658368"/>
+          </a:xfrm>
+          <a:prstGeom prst="rect">
+            <a:avLst/>
+          </a:prstGeom>
+          <a:noFill/>
+        </p:spPr>
+        <p:txBody>
+          <a:bodyPr wrap="square">
+            <a:spAutoFit/>
+          </a:bodyPr>
+          <a:lstStyle/>
+          <a:p>
+            <a:pPr algn="l"/>
+            <a:r>
+              <a:rPr sz="1000" b="0">
+                <a:solidFill>
+                  <a:srgbClr val="CCDDFF"/>
+                </a:solidFill>
+                <a:latin typeface="Noto Sans KR"/>
+              </a:rPr>
+              <a:t>마케팅천재와 함께하는 원장님들이
+실제로 경험하고 있는 평균 ROAS입니다.</a:t>
+            </a:r>
+          </a:p>
+        </p:txBody>
+      </p:sp>
+      <p:sp>
+        <p:nvSpPr>
+          <p:cNvPr id="7" name="Rectangle 6"/>
           <p:cNvSpPr/>
           <p:nvPr/>
         </p:nvSpPr>
         <p:spPr>
           <a:xfrm>
-            <a:off x="640080" y="4114800"/>
+            <a:off x="640080" y="3429000"/>
             <a:ext cx="73152" cy="73152"/>
           </a:xfrm>
           <a:prstGeom prst="rect">
@@ -4214,13 +8165,13 @@
       </p:sp>
       <p:sp>
         <p:nvSpPr>
-          <p:cNvPr id="10" name="TextBox 9"/>
-          <p:cNvSpPr txBox="1"/>
-          <p:nvPr/>
-        </p:nvSpPr>
-        <p:spPr>
-          <a:xfrm>
-            <a:off x="804672" y="4023360"/>
+          <p:cNvPr id="8" name="TextBox 7"/>
+          <p:cNvSpPr txBox="1"/>
+          <p:nvPr/>
+        </p:nvSpPr>
+        <p:spPr>
+          <a:xfrm>
+            <a:off x="804672" y="3337560"/>
             <a:ext cx="4907584" cy="347472"/>
           </a:xfrm>
           <a:prstGeom prst="rect">
@@ -4242,20 +8193,20 @@
                 </a:solidFill>
                 <a:latin typeface="Noto Sans KR"/>
               </a:rPr>
-              <a:t>6개월 J커브 성장 타임라인</a:t>
-            </a:r>
-          </a:p>
-        </p:txBody>
-      </p:sp>
-      <p:sp>
-        <p:nvSpPr>
-          <p:cNvPr id="11" name="Rectangle 10"/>
+              <a:t>브랜드 블로그 × 플레이스 시너지</a:t>
+            </a:r>
+          </a:p>
+        </p:txBody>
+      </p:sp>
+      <p:sp>
+        <p:nvSpPr>
+          <p:cNvPr id="9" name="Rectangle 8"/>
           <p:cNvSpPr/>
           <p:nvPr/>
         </p:nvSpPr>
         <p:spPr>
           <a:xfrm>
-            <a:off x="640080" y="4526280"/>
+            <a:off x="640080" y="3840480"/>
             <a:ext cx="73152" cy="73152"/>
           </a:xfrm>
           <a:prstGeom prst="rect">
@@ -4292,13 +8243,91 @@
       </p:sp>
       <p:sp>
         <p:nvSpPr>
+          <p:cNvPr id="10" name="TextBox 9"/>
+          <p:cNvSpPr txBox="1"/>
+          <p:nvPr/>
+        </p:nvSpPr>
+        <p:spPr>
+          <a:xfrm>
+            <a:off x="804672" y="3749040"/>
+            <a:ext cx="4907584" cy="347472"/>
+          </a:xfrm>
+          <a:prstGeom prst="rect">
+            <a:avLst/>
+          </a:prstGeom>
+          <a:noFill/>
+        </p:spPr>
+        <p:txBody>
+          <a:bodyPr wrap="square">
+            <a:spAutoFit/>
+          </a:bodyPr>
+          <a:lstStyle/>
+          <a:p>
+            <a:pPr algn="l"/>
+            <a:r>
+              <a:rPr sz="1000" b="0">
+                <a:solidFill>
+                  <a:srgbClr val="FFFFFF"/>
+                </a:solidFill>
+                <a:latin typeface="Noto Sans KR"/>
+              </a:rPr>
+              <a:t>6개월 J커브 성장 타임라인</a:t>
+            </a:r>
+          </a:p>
+        </p:txBody>
+      </p:sp>
+      <p:sp>
+        <p:nvSpPr>
+          <p:cNvPr id="11" name="Rectangle 10"/>
+          <p:cNvSpPr/>
+          <p:nvPr/>
+        </p:nvSpPr>
+        <p:spPr>
+          <a:xfrm>
+            <a:off x="640080" y="4251960"/>
+            <a:ext cx="73152" cy="73152"/>
+          </a:xfrm>
+          <a:prstGeom prst="rect">
+            <a:avLst/>
+          </a:prstGeom>
+          <a:solidFill>
+            <a:srgbClr val="F0C040"/>
+          </a:solidFill>
+          <a:ln>
+            <a:noFill/>
+          </a:ln>
+        </p:spPr>
+        <p:style>
+          <a:lnRef idx="1">
+            <a:schemeClr val="accent1"/>
+          </a:lnRef>
+          <a:fillRef idx="3">
+            <a:schemeClr val="accent1"/>
+          </a:fillRef>
+          <a:effectRef idx="2">
+            <a:schemeClr val="accent1"/>
+          </a:effectRef>
+          <a:fontRef idx="minor">
+            <a:schemeClr val="lt1"/>
+          </a:fontRef>
+        </p:style>
+        <p:txBody>
+          <a:bodyPr rtlCol="0" anchor="ctr"/>
+          <a:lstStyle/>
+          <a:p>
+            <a:pPr algn="ctr"/>
+          </a:p>
+        </p:txBody>
+      </p:sp>
+      <p:sp>
+        <p:nvSpPr>
           <p:cNvPr id="12" name="TextBox 11"/>
           <p:cNvSpPr txBox="1"/>
           <p:nvPr/>
         </p:nvSpPr>
         <p:spPr>
           <a:xfrm>
-            <a:off x="804672" y="4434840"/>
+            <a:off x="804672" y="4160520"/>
             <a:ext cx="4907584" cy="347472"/>
           </a:xfrm>
           <a:prstGeom prst="rect">
@@ -4333,102 +8362,351 @@
         </p:nvSpPr>
         <p:spPr>
           <a:xfrm>
-            <a:off x="6736384" y="1280160"/>
-            <a:ext cx="5090464" cy="347472"/>
-          </a:xfrm>
-          <a:prstGeom prst="rect">
-            <a:avLst/>
-          </a:prstGeom>
-          <a:noFill/>
-        </p:spPr>
-        <p:txBody>
-          <a:bodyPr wrap="square">
-            <a:spAutoFit/>
-          </a:bodyPr>
-          <a:lstStyle/>
-          <a:p>
-            <a:pPr algn="l"/>
-            <a:r>
-              <a:rPr sz="900" b="1">
+            <a:off x="640080" y="4617720"/>
+            <a:ext cx="5090464" cy="658368"/>
+          </a:xfrm>
+          <a:prstGeom prst="rect">
+            <a:avLst/>
+          </a:prstGeom>
+          <a:noFill/>
+        </p:spPr>
+        <p:txBody>
+          <a:bodyPr wrap="square">
+            <a:spAutoFit/>
+          </a:bodyPr>
+          <a:lstStyle/>
+          <a:p>
+            <a:pPr algn="l"/>
+            <a:r>
+              <a:rPr sz="900" b="0">
+                <a:solidFill>
+                  <a:srgbClr val="AACCF0"/>
+                </a:solidFill>
+                <a:latin typeface="Noto Sans KR"/>
+              </a:rPr>
+              <a:t>'마케팅천재' 문의의 70% 이상은 원장님께서 직접 주십니다.
+이미 검증된 곳에 의구심을 갖는 것은 성장을 늦출 뿐입니다.</a:t>
+            </a:r>
+          </a:p>
+        </p:txBody>
+      </p:sp>
+      <p:sp>
+        <p:nvSpPr>
+          <p:cNvPr id="14" name="Rectangle 13"/>
+          <p:cNvSpPr/>
+          <p:nvPr/>
+        </p:nvSpPr>
+        <p:spPr>
+          <a:xfrm>
+            <a:off x="6644944" y="640080"/>
+            <a:ext cx="1097280" cy="292608"/>
+          </a:xfrm>
+          <a:prstGeom prst="rect">
+            <a:avLst/>
+          </a:prstGeom>
+          <a:solidFill>
+            <a:srgbClr val="E8F0FB"/>
+          </a:solidFill>
+          <a:ln w="12700">
+            <a:solidFill>
+              <a:srgbClr val="1A6FD8"/>
+            </a:solidFill>
+          </a:ln>
+        </p:spPr>
+        <p:style>
+          <a:lnRef idx="1">
+            <a:schemeClr val="accent1"/>
+          </a:lnRef>
+          <a:fillRef idx="3">
+            <a:schemeClr val="accent1"/>
+          </a:fillRef>
+          <a:effectRef idx="2">
+            <a:schemeClr val="accent1"/>
+          </a:effectRef>
+          <a:fontRef idx="minor">
+            <a:schemeClr val="lt1"/>
+          </a:fontRef>
+        </p:style>
+        <p:txBody>
+          <a:bodyPr rtlCol="0" anchor="ctr"/>
+          <a:lstStyle/>
+          <a:p>
+            <a:pPr algn="ctr"/>
+          </a:p>
+        </p:txBody>
+      </p:sp>
+      <p:sp>
+        <p:nvSpPr>
+          <p:cNvPr id="15" name="TextBox 14"/>
+          <p:cNvSpPr txBox="1"/>
+          <p:nvPr/>
+        </p:nvSpPr>
+        <p:spPr>
+          <a:xfrm>
+            <a:off x="6718096" y="640080"/>
+            <a:ext cx="1005840" cy="292608"/>
+          </a:xfrm>
+          <a:prstGeom prst="rect">
+            <a:avLst/>
+          </a:prstGeom>
+          <a:noFill/>
+        </p:spPr>
+        <p:txBody>
+          <a:bodyPr wrap="square">
+            <a:spAutoFit/>
+          </a:bodyPr>
+          <a:lstStyle/>
+          <a:p>
+            <a:pPr algn="l"/>
+            <a:r>
+              <a:rPr sz="800" b="1">
                 <a:solidFill>
                   <a:srgbClr val="1A6FD8"/>
                 </a:solidFill>
                 <a:latin typeface="Noto Sans KR"/>
               </a:rPr>
-              <a:t>지금 바로 시작하세요</a:t>
-            </a:r>
-          </a:p>
-        </p:txBody>
-      </p:sp>
-      <p:sp>
-        <p:nvSpPr>
-          <p:cNvPr id="14" name="TextBox 13"/>
-          <p:cNvSpPr txBox="1"/>
-          <p:nvPr/>
-        </p:nvSpPr>
-        <p:spPr>
-          <a:xfrm>
-            <a:off x="6736384" y="1691640"/>
-            <a:ext cx="5090464" cy="1645920"/>
-          </a:xfrm>
-          <a:prstGeom prst="rect">
-            <a:avLst/>
-          </a:prstGeom>
-          <a:noFill/>
-        </p:spPr>
-        <p:txBody>
-          <a:bodyPr wrap="square">
-            <a:spAutoFit/>
-          </a:bodyPr>
-          <a:lstStyle/>
-          <a:p>
-            <a:pPr algn="l"/>
-            <a:r>
-              <a:rPr sz="2200" b="1">
+              <a:t>FAQ 09</a:t>
+            </a:r>
+          </a:p>
+        </p:txBody>
+      </p:sp>
+      <p:sp>
+        <p:nvSpPr>
+          <p:cNvPr id="16" name="TextBox 15"/>
+          <p:cNvSpPr txBox="1"/>
+          <p:nvPr/>
+        </p:nvSpPr>
+        <p:spPr>
+          <a:xfrm>
+            <a:off x="6644944" y="1005840"/>
+            <a:ext cx="5181904" cy="384048"/>
+          </a:xfrm>
+          <a:prstGeom prst="rect">
+            <a:avLst/>
+          </a:prstGeom>
+          <a:noFill/>
+        </p:spPr>
+        <p:txBody>
+          <a:bodyPr wrap="square">
+            <a:spAutoFit/>
+          </a:bodyPr>
+          <a:lstStyle/>
+          <a:p>
+            <a:pPr algn="l"/>
+            <a:r>
+              <a:rPr sz="1600" b="1">
                 <a:solidFill>
                   <a:srgbClr val="0F1923"/>
                 </a:solidFill>
                 <a:latin typeface="Noto Serif KR"/>
               </a:rPr>
-              <a:t>잘 나가는 원장님들이</a:t>
-            </a:r>
-          </a:p>
-          <a:p>
-            <a:pPr algn="l"/>
-            <a:r>
-              <a:rPr sz="2200" b="1">
+              <a:t>최소 계약기간이 있나요?</a:t>
+            </a:r>
+          </a:p>
+        </p:txBody>
+      </p:sp>
+      <p:sp>
+        <p:nvSpPr>
+          <p:cNvPr id="17" name="Rectangle 16"/>
+          <p:cNvSpPr/>
+          <p:nvPr/>
+        </p:nvSpPr>
+        <p:spPr>
+          <a:xfrm>
+            <a:off x="6644944" y="1463040"/>
+            <a:ext cx="45720" cy="1143000"/>
+          </a:xfrm>
+          <a:prstGeom prst="rect">
+            <a:avLst/>
+          </a:prstGeom>
+          <a:solidFill>
+            <a:srgbClr val="1A6FD8"/>
+          </a:solidFill>
+          <a:ln>
+            <a:noFill/>
+          </a:ln>
+        </p:spPr>
+        <p:style>
+          <a:lnRef idx="1">
+            <a:schemeClr val="accent1"/>
+          </a:lnRef>
+          <a:fillRef idx="3">
+            <a:schemeClr val="accent1"/>
+          </a:fillRef>
+          <a:effectRef idx="2">
+            <a:schemeClr val="accent1"/>
+          </a:effectRef>
+          <a:fontRef idx="minor">
+            <a:schemeClr val="lt1"/>
+          </a:fontRef>
+        </p:style>
+        <p:txBody>
+          <a:bodyPr rtlCol="0" anchor="ctr"/>
+          <a:lstStyle/>
+          <a:p>
+            <a:pPr algn="ctr"/>
+          </a:p>
+        </p:txBody>
+      </p:sp>
+      <p:sp>
+        <p:nvSpPr>
+          <p:cNvPr id="18" name="Rectangle 17"/>
+          <p:cNvSpPr/>
+          <p:nvPr/>
+        </p:nvSpPr>
+        <p:spPr>
+          <a:xfrm>
+            <a:off x="6690664" y="1463040"/>
+            <a:ext cx="5136184" cy="1143000"/>
+          </a:xfrm>
+          <a:prstGeom prst="rect">
+            <a:avLst/>
+          </a:prstGeom>
+          <a:solidFill>
+            <a:srgbClr val="EBF2FC"/>
+          </a:solidFill>
+          <a:ln>
+            <a:noFill/>
+          </a:ln>
+        </p:spPr>
+        <p:style>
+          <a:lnRef idx="1">
+            <a:schemeClr val="accent1"/>
+          </a:lnRef>
+          <a:fillRef idx="3">
+            <a:schemeClr val="accent1"/>
+          </a:fillRef>
+          <a:effectRef idx="2">
+            <a:schemeClr val="accent1"/>
+          </a:effectRef>
+          <a:fontRef idx="minor">
+            <a:schemeClr val="lt1"/>
+          </a:fontRef>
+        </p:style>
+        <p:txBody>
+          <a:bodyPr rtlCol="0" anchor="ctr"/>
+          <a:lstStyle/>
+          <a:p>
+            <a:pPr algn="ctr"/>
+          </a:p>
+        </p:txBody>
+      </p:sp>
+      <p:sp>
+        <p:nvSpPr>
+          <p:cNvPr id="19" name="TextBox 18"/>
+          <p:cNvSpPr txBox="1"/>
+          <p:nvPr/>
+        </p:nvSpPr>
+        <p:spPr>
+          <a:xfrm>
+            <a:off x="6809536" y="1517904"/>
+            <a:ext cx="4925872" cy="274320"/>
+          </a:xfrm>
+          <a:prstGeom prst="rect">
+            <a:avLst/>
+          </a:prstGeom>
+          <a:noFill/>
+        </p:spPr>
+        <p:txBody>
+          <a:bodyPr wrap="square">
+            <a:spAutoFit/>
+          </a:bodyPr>
+          <a:lstStyle/>
+          <a:p>
+            <a:pPr algn="l"/>
+            <a:r>
+              <a:rPr sz="1000" b="1">
                 <a:solidFill>
                   <a:srgbClr val="0F1923"/>
                 </a:solidFill>
+                <a:latin typeface="Noto Sans KR"/>
+              </a:rPr>
+              <a:t>✅  별도의 의무 계약 기간은 없습니다.</a:t>
+            </a:r>
+          </a:p>
+        </p:txBody>
+      </p:sp>
+      <p:sp>
+        <p:nvSpPr>
+          <p:cNvPr id="20" name="TextBox 19"/>
+          <p:cNvSpPr txBox="1"/>
+          <p:nvPr/>
+        </p:nvSpPr>
+        <p:spPr>
+          <a:xfrm>
+            <a:off x="6809536" y="1828800"/>
+            <a:ext cx="4925872" cy="713232"/>
+          </a:xfrm>
+          <a:prstGeom prst="rect">
+            <a:avLst/>
+          </a:prstGeom>
+          <a:noFill/>
+        </p:spPr>
+        <p:txBody>
+          <a:bodyPr wrap="square">
+            <a:spAutoFit/>
+          </a:bodyPr>
+          <a:lstStyle/>
+          <a:p>
+            <a:pPr algn="l"/>
+            <a:r>
+              <a:rPr sz="900" b="0">
+                <a:solidFill>
+                  <a:srgbClr val="4A5568"/>
+                </a:solidFill>
+                <a:latin typeface="Noto Sans KR"/>
+              </a:rPr>
+              <a:t>다만, 지역 키워드 점유는 평균 1개월 차부터 시작되며, 신규 환자 유입 체감은 2~3개월 차부터 본격화됩니다. 안정적인 성과 궤도를 위해 최소 3개월 운영을 권장드립니다.</a:t>
+            </a:r>
+          </a:p>
+        </p:txBody>
+      </p:sp>
+      <p:sp>
+        <p:nvSpPr>
+          <p:cNvPr id="21" name="TextBox 20"/>
+          <p:cNvSpPr txBox="1"/>
+          <p:nvPr/>
+        </p:nvSpPr>
+        <p:spPr>
+          <a:xfrm>
+            <a:off x="6644944" y="2743200"/>
+            <a:ext cx="5181904" cy="658368"/>
+          </a:xfrm>
+          <a:prstGeom prst="rect">
+            <a:avLst/>
+          </a:prstGeom>
+          <a:noFill/>
+        </p:spPr>
+        <p:txBody>
+          <a:bodyPr wrap="square">
+            <a:spAutoFit/>
+          </a:bodyPr>
+          <a:lstStyle/>
+          <a:p>
+            <a:pPr algn="l"/>
+            <a:r>
+              <a:rPr sz="1200" b="1">
+                <a:solidFill>
+                  <a:srgbClr val="0F1923"/>
+                </a:solidFill>
                 <a:latin typeface="Noto Serif KR"/>
               </a:rPr>
-              <a:t>선택한 이유,</a:t>
-            </a:r>
-          </a:p>
-          <a:p>
-            <a:pPr algn="l"/>
-            <a:r>
-              <a:rPr sz="2200" b="1">
-                <a:solidFill>
-                  <a:srgbClr val="1A6FD8"/>
-                </a:solidFill>
-                <a:latin typeface="Noto Serif KR"/>
-              </a:rPr>
-              <a:t>직접 경험해보세요.</a:t>
-            </a:r>
-          </a:p>
-        </p:txBody>
-      </p:sp>
-      <p:sp>
-        <p:nvSpPr>
-          <p:cNvPr id="15" name="Rectangle 14"/>
+              <a:t>고민은 확신으로 바꾸고,
+지금 바로 실행의 차이를 경험해 보세요.</a:t>
+            </a:r>
+          </a:p>
+        </p:txBody>
+      </p:sp>
+      <p:sp>
+        <p:nvSpPr>
+          <p:cNvPr id="22" name="Rectangle 21"/>
           <p:cNvSpPr/>
           <p:nvPr/>
         </p:nvSpPr>
         <p:spPr>
           <a:xfrm>
-            <a:off x="6736384" y="3429000"/>
-            <a:ext cx="5090464" cy="1371600"/>
+            <a:off x="6644944" y="3520440"/>
+            <a:ext cx="5181904" cy="1417320"/>
           </a:xfrm>
           <a:prstGeom prst="rect">
             <a:avLst/>
@@ -4464,14 +8742,14 @@
       </p:sp>
       <p:sp>
         <p:nvSpPr>
-          <p:cNvPr id="16" name="TextBox 15"/>
-          <p:cNvSpPr txBox="1"/>
-          <p:nvPr/>
-        </p:nvSpPr>
-        <p:spPr>
-          <a:xfrm>
-            <a:off x="6919264" y="3566160"/>
-            <a:ext cx="4816144" cy="438912"/>
+          <p:cNvPr id="23" name="TextBox 22"/>
+          <p:cNvSpPr txBox="1"/>
+          <p:nvPr/>
+        </p:nvSpPr>
+        <p:spPr>
+          <a:xfrm>
+            <a:off x="6827824" y="3657600"/>
+            <a:ext cx="4907584" cy="438912"/>
           </a:xfrm>
           <a:prstGeom prst="rect">
             <a:avLst/>
@@ -4499,14 +8777,14 @@
       </p:sp>
       <p:sp>
         <p:nvSpPr>
-          <p:cNvPr id="17" name="TextBox 16"/>
-          <p:cNvSpPr txBox="1"/>
-          <p:nvPr/>
-        </p:nvSpPr>
-        <p:spPr>
-          <a:xfrm>
-            <a:off x="6919264" y="3977640"/>
-            <a:ext cx="4816144" cy="292608"/>
+          <p:cNvPr id="24" name="TextBox 23"/>
+          <p:cNvSpPr txBox="1"/>
+          <p:nvPr/>
+        </p:nvSpPr>
+        <p:spPr>
+          <a:xfrm>
+            <a:off x="6827824" y="4087368"/>
+            <a:ext cx="4907584" cy="274320"/>
           </a:xfrm>
           <a:prstGeom prst="rect">
             <a:avLst/>
@@ -4534,64 +8812,64 @@
       </p:sp>
       <p:sp>
         <p:nvSpPr>
-          <p:cNvPr id="18" name="TextBox 17"/>
-          <p:cNvSpPr txBox="1"/>
-          <p:nvPr/>
-        </p:nvSpPr>
-        <p:spPr>
-          <a:xfrm>
-            <a:off x="6919264" y="4297680"/>
-            <a:ext cx="4816144" cy="365760"/>
-          </a:xfrm>
-          <a:prstGeom prst="rect">
-            <a:avLst/>
-          </a:prstGeom>
-          <a:noFill/>
-        </p:spPr>
-        <p:txBody>
-          <a:bodyPr wrap="square">
-            <a:spAutoFit/>
-          </a:bodyPr>
-          <a:lstStyle/>
-          <a:p>
-            <a:pPr algn="l"/>
-            <a:r>
-              <a:rPr sz="1600" b="1">
+          <p:cNvPr id="25" name="TextBox 24"/>
+          <p:cNvSpPr txBox="1"/>
+          <p:nvPr/>
+        </p:nvSpPr>
+        <p:spPr>
+          <a:xfrm>
+            <a:off x="6827824" y="4416552"/>
+            <a:ext cx="4907584" cy="384048"/>
+          </a:xfrm>
+          <a:prstGeom prst="rect">
+            <a:avLst/>
+          </a:prstGeom>
+          <a:noFill/>
+        </p:spPr>
+        <p:txBody>
+          <a:bodyPr wrap="square">
+            <a:spAutoFit/>
+          </a:bodyPr>
+          <a:lstStyle/>
+          <a:p>
+            <a:pPr algn="l"/>
+            <a:r>
+              <a:rPr sz="1400" b="1">
                 <a:solidFill>
                   <a:srgbClr val="F0C040"/>
                 </a:solidFill>
                 <a:latin typeface="Noto Sans KR"/>
               </a:rPr>
-              <a:t>010-5848-9572</a:t>
-            </a:r>
-          </a:p>
-        </p:txBody>
-      </p:sp>
-      <p:sp>
-        <p:nvSpPr>
-          <p:cNvPr id="19" name="TextBox 18"/>
-          <p:cNvSpPr txBox="1"/>
-          <p:nvPr/>
-        </p:nvSpPr>
-        <p:spPr>
-          <a:xfrm>
-            <a:off x="6736384" y="4910328"/>
-            <a:ext cx="5090464" cy="658368"/>
-          </a:xfrm>
-          <a:prstGeom prst="rect">
-            <a:avLst/>
-          </a:prstGeom>
-          <a:noFill/>
-        </p:spPr>
-        <p:txBody>
-          <a:bodyPr wrap="square">
-            <a:spAutoFit/>
-          </a:bodyPr>
-          <a:lstStyle/>
-          <a:p>
-            <a:pPr algn="l"/>
-            <a:r>
-              <a:rPr sz="1000" b="0">
+              <a:t>010-5848-9572 (카톡/전화)</a:t>
+            </a:r>
+          </a:p>
+        </p:txBody>
+      </p:sp>
+      <p:sp>
+        <p:nvSpPr>
+          <p:cNvPr id="26" name="TextBox 25"/>
+          <p:cNvSpPr txBox="1"/>
+          <p:nvPr/>
+        </p:nvSpPr>
+        <p:spPr>
+          <a:xfrm>
+            <a:off x="6644944" y="5029200"/>
+            <a:ext cx="5181904" cy="594360"/>
+          </a:xfrm>
+          <a:prstGeom prst="rect">
+            <a:avLst/>
+          </a:prstGeom>
+          <a:noFill/>
+        </p:spPr>
+        <p:txBody>
+          <a:bodyPr wrap="square">
+            <a:spAutoFit/>
+          </a:bodyPr>
+          <a:lstStyle/>
+          <a:p>
+            <a:pPr algn="l"/>
+            <a:r>
+              <a:rPr sz="900" b="0">
                 <a:solidFill>
                   <a:srgbClr val="4A5568"/>
                 </a:solidFill>
@@ -4928,7 +9206,7 @@
                 </a:solidFill>
                 <a:latin typeface="Noto Sans KR"/>
               </a:rPr>
-              <a:t>02 / 10</a:t>
+              <a:t>02 / 13</a:t>
             </a:r>
           </a:p>
         </p:txBody>
@@ -5597,7 +9875,7 @@
                 </a:solidFill>
                 <a:latin typeface="Noto Sans KR"/>
               </a:rPr>
-              <a:t>03 / 10</a:t>
+              <a:t>03 / 13</a:t>
             </a:r>
           </a:p>
         </p:txBody>
@@ -5737,8 +10015,8 @@
         </p:nvSpPr>
         <p:spPr>
           <a:xfrm>
-            <a:off x="548640" y="2286000"/>
-            <a:ext cx="54864" cy="658368"/>
+            <a:off x="548640" y="2304288"/>
+            <a:ext cx="54864" cy="594360"/>
           </a:xfrm>
           <a:prstGeom prst="rect">
             <a:avLst/>
@@ -5780,8 +10058,8 @@
         </p:nvSpPr>
         <p:spPr>
           <a:xfrm>
-            <a:off x="603504" y="2286000"/>
-            <a:ext cx="11039551" cy="658368"/>
+            <a:off x="603504" y="2304288"/>
+            <a:ext cx="11039551" cy="594360"/>
           </a:xfrm>
           <a:prstGeom prst="rect">
             <a:avLst/>
@@ -5823,7 +10101,7 @@
         </p:nvSpPr>
         <p:spPr>
           <a:xfrm>
-            <a:off x="685800" y="2322576"/>
+            <a:off x="685800" y="2340864"/>
             <a:ext cx="548640" cy="256032"/>
           </a:xfrm>
           <a:prstGeom prst="rect">
@@ -5858,8 +10136,8 @@
         </p:nvSpPr>
         <p:spPr>
           <a:xfrm>
-            <a:off x="685800" y="2542032"/>
-            <a:ext cx="10820095" cy="402336"/>
+            <a:off x="685800" y="2560320"/>
+            <a:ext cx="10820095" cy="338328"/>
           </a:xfrm>
           <a:prstGeom prst="rect">
             <a:avLst/>
@@ -5893,7 +10171,7 @@
         </p:nvSpPr>
         <p:spPr>
           <a:xfrm>
-            <a:off x="548640" y="3063240"/>
+            <a:off x="548640" y="3017520"/>
             <a:ext cx="11094415" cy="365760"/>
           </a:xfrm>
           <a:prstGeom prst="rect">
@@ -5929,7 +10207,7 @@
         <p:spPr>
           <a:xfrm>
             <a:off x="548640" y="3520440"/>
-            <a:ext cx="3606698" cy="1280160"/>
+            <a:ext cx="3606698" cy="1417320"/>
           </a:xfrm>
           <a:prstGeom prst="rect">
             <a:avLst/>
@@ -6085,7 +10363,7 @@
         <p:spPr>
           <a:xfrm>
             <a:off x="685800" y="4242816"/>
-            <a:ext cx="3332378" cy="557784"/>
+            <a:ext cx="3332378" cy="694944"/>
           </a:xfrm>
           <a:prstGeom prst="rect">
             <a:avLst/>
@@ -6106,7 +10384,7 @@
                 </a:solidFill>
                 <a:latin typeface="Noto Sans KR"/>
               </a:rPr>
-              <a:t>의료인 명의의 브랜드 블로그는 원장님의 진심과 전문성을 전달할 수 있는 유일한 공식 채널</a:t>
+              <a:t>의료인 명의의 브랜드 블로그는 원장님의 진심과 전문성을 가장 논리적이고 깊이 있게 전달할 수 있는 유일한 공식 채널입니다.</a:t>
             </a:r>
           </a:p>
         </p:txBody>
@@ -6120,7 +10398,7 @@
         <p:spPr>
           <a:xfrm>
             <a:off x="4292498" y="3520440"/>
-            <a:ext cx="3606698" cy="1280160"/>
+            <a:ext cx="3606698" cy="1417320"/>
           </a:xfrm>
           <a:prstGeom prst="rect">
             <a:avLst/>
@@ -6276,7 +10554,7 @@
         <p:spPr>
           <a:xfrm>
             <a:off x="4429658" y="4242816"/>
-            <a:ext cx="3332378" cy="557784"/>
+            <a:ext cx="3332378" cy="694944"/>
           </a:xfrm>
           <a:prstGeom prst="rect">
             <a:avLst/>
@@ -6297,7 +10575,7 @@
                 </a:solidFill>
                 <a:latin typeface="Noto Sans KR"/>
               </a:rPr>
-              <a:t>매달 20~30개씩 포스팅이 누적되어 검색 상단을 장악하는 '디지털 부동산'이 됩니다</a:t>
+              <a:t>[브랜드 블로그]는 매달 20~30개씩 양질의 포스팅이 누적되어 검색 상단 키워드를 장악하는 '디지털 부동산'이 됩니다.</a:t>
             </a:r>
           </a:p>
         </p:txBody>
@@ -6311,7 +10589,7 @@
         <p:spPr>
           <a:xfrm>
             <a:off x="8036356" y="3520440"/>
-            <a:ext cx="3606698" cy="1280160"/>
+            <a:ext cx="3606698" cy="1417320"/>
           </a:xfrm>
           <a:prstGeom prst="rect">
             <a:avLst/>
@@ -6467,7 +10745,7 @@
         <p:spPr>
           <a:xfrm>
             <a:off x="8173516" y="4242816"/>
-            <a:ext cx="3332378" cy="557784"/>
+            <a:ext cx="3332378" cy="694944"/>
           </a:xfrm>
           <a:prstGeom prst="rect">
             <a:avLst/>
@@ -6488,7 +10766,7 @@
                 </a:solidFill>
                 <a:latin typeface="Noto Sans KR"/>
               </a:rPr>
-              <a:t>2026년 네이버 AI 답변 시스템은 '출처가 명확하고 깊이 있는 정보'를 우선순위로 선택</a:t>
+              <a:t>2026년 네이버 AI 답변 시스템은 '출처가 명확하고 깊이 있는 정보'를 우선순위로 선택합니다.</a:t>
             </a:r>
           </a:p>
         </p:txBody>
@@ -6818,7 +11096,7 @@
                 </a:solidFill>
                 <a:latin typeface="Noto Sans KR"/>
               </a:rPr>
-              <a:t>04 / 10</a:t>
+              <a:t>04 / 13</a:t>
             </a:r>
           </a:p>
         </p:txBody>
@@ -6958,7 +11236,7 @@
         </p:nvSpPr>
         <p:spPr>
           <a:xfrm>
-            <a:off x="548640" y="2286000"/>
+            <a:off x="548640" y="2304288"/>
             <a:ext cx="54864" cy="594360"/>
           </a:xfrm>
           <a:prstGeom prst="rect">
@@ -7001,7 +11279,7 @@
         </p:nvSpPr>
         <p:spPr>
           <a:xfrm>
-            <a:off x="603504" y="2286000"/>
+            <a:off x="603504" y="2304288"/>
             <a:ext cx="11039551" cy="594360"/>
           </a:xfrm>
           <a:prstGeom prst="rect">
@@ -7044,7 +11322,7 @@
         </p:nvSpPr>
         <p:spPr>
           <a:xfrm>
-            <a:off x="685800" y="2322576"/>
+            <a:off x="685800" y="2340864"/>
             <a:ext cx="548640" cy="256032"/>
           </a:xfrm>
           <a:prstGeom prst="rect">
@@ -7079,7 +11357,7 @@
         </p:nvSpPr>
         <p:spPr>
           <a:xfrm>
-            <a:off x="685800" y="2542032"/>
+            <a:off x="685800" y="2560320"/>
             <a:ext cx="10820095" cy="338328"/>
           </a:xfrm>
           <a:prstGeom prst="rect">
@@ -7114,8 +11392,8 @@
         </p:nvSpPr>
         <p:spPr>
           <a:xfrm>
-            <a:off x="548640" y="3017520"/>
-            <a:ext cx="1828800" cy="1097280"/>
+            <a:off x="548640" y="3063240"/>
+            <a:ext cx="1920240" cy="1143000"/>
           </a:xfrm>
           <a:prstGeom prst="rect">
             <a:avLst/>
@@ -7157,8 +11435,8 @@
         </p:nvSpPr>
         <p:spPr>
           <a:xfrm>
-            <a:off x="685800" y="3063240"/>
-            <a:ext cx="1554480" cy="640080"/>
+            <a:off x="685800" y="3108960"/>
+            <a:ext cx="1645920" cy="685800"/>
           </a:xfrm>
           <a:prstGeom prst="rect">
             <a:avLst/>
@@ -7192,8 +11470,8 @@
         </p:nvSpPr>
         <p:spPr>
           <a:xfrm>
-            <a:off x="685800" y="3566160"/>
-            <a:ext cx="1554480" cy="320040"/>
+            <a:off x="685800" y="3657600"/>
+            <a:ext cx="1645920" cy="320040"/>
           </a:xfrm>
           <a:prstGeom prst="rect">
             <a:avLst/>
@@ -7227,8 +11505,8 @@
         </p:nvSpPr>
         <p:spPr>
           <a:xfrm>
-            <a:off x="2560320" y="3017520"/>
-            <a:ext cx="9082735" cy="457200"/>
+            <a:off x="2651760" y="3063240"/>
+            <a:ext cx="8991295" cy="457200"/>
           </a:xfrm>
           <a:prstGeom prst="rect">
             <a:avLst/>
@@ -7262,8 +11540,8 @@
         </p:nvSpPr>
         <p:spPr>
           <a:xfrm>
-            <a:off x="2560320" y="3520440"/>
-            <a:ext cx="9082735" cy="457200"/>
+            <a:off x="2651760" y="3566160"/>
+            <a:ext cx="8991295" cy="457200"/>
           </a:xfrm>
           <a:prstGeom prst="rect">
             <a:avLst/>
@@ -7284,20 +11562,55 @@
                 </a:solidFill>
                 <a:latin typeface="Noto Sans KR"/>
               </a:rPr>
-              <a:t>파워링크로 환산하면 동일량의 방문자를 만드는 데 하루 600만~900만원이 소요됩니다.</a:t>
-            </a:r>
-          </a:p>
-        </p:txBody>
-      </p:sp>
-      <p:sp>
-        <p:nvSpPr>
-          <p:cNvPr id="22" name="Rectangle 21"/>
+              <a:t>파워링크 환산 시 동일량의 방문자를 만드는 데 하루 600만~900만원이 소요됩니다.</a:t>
+            </a:r>
+          </a:p>
+        </p:txBody>
+      </p:sp>
+      <p:sp>
+        <p:nvSpPr>
+          <p:cNvPr id="22" name="TextBox 21"/>
+          <p:cNvSpPr txBox="1"/>
+          <p:nvPr/>
+        </p:nvSpPr>
+        <p:spPr>
+          <a:xfrm>
+            <a:off x="2651760" y="4069080"/>
+            <a:ext cx="8991295" cy="347472"/>
+          </a:xfrm>
+          <a:prstGeom prst="rect">
+            <a:avLst/>
+          </a:prstGeom>
+          <a:noFill/>
+        </p:spPr>
+        <p:txBody>
+          <a:bodyPr wrap="square">
+            <a:spAutoFit/>
+          </a:bodyPr>
+          <a:lstStyle/>
+          <a:p>
+            <a:pPr algn="l"/>
+            <a:r>
+              <a:rPr sz="1100" b="1">
+                <a:solidFill>
+                  <a:srgbClr val="0F1923"/>
+                </a:solidFill>
+                <a:latin typeface="Noto Sans KR"/>
+              </a:rPr>
+              <a:t>무려 50배 이상의 효율입니다.</a:t>
+            </a:r>
+          </a:p>
+        </p:txBody>
+      </p:sp>
+      <p:sp>
+        <p:nvSpPr>
+          <p:cNvPr id="23" name="Rectangle 22"/>
           <p:cNvSpPr/>
           <p:nvPr/>
         </p:nvSpPr>
         <p:spPr>
           <a:xfrm>
-            <a:off x="548640" y="4160520"/>
+            <a:off x="548640" y="4498848"/>
             <a:ext cx="54864" cy="658368"/>
           </a:xfrm>
           <a:prstGeom prst="rect">
@@ -7334,13 +11647,13 @@
       </p:sp>
       <p:sp>
         <p:nvSpPr>
-          <p:cNvPr id="23" name="Rectangle 22"/>
+          <p:cNvPr id="24" name="Rectangle 23"/>
           <p:cNvSpPr/>
           <p:nvPr/>
         </p:nvSpPr>
         <p:spPr>
           <a:xfrm>
-            <a:off x="603504" y="4160520"/>
+            <a:off x="603504" y="4498848"/>
             <a:ext cx="11039551" cy="658368"/>
           </a:xfrm>
           <a:prstGeom prst="rect">
@@ -7377,13 +11690,13 @@
       </p:sp>
       <p:sp>
         <p:nvSpPr>
-          <p:cNvPr id="24" name="TextBox 23"/>
-          <p:cNvSpPr txBox="1"/>
-          <p:nvPr/>
-        </p:nvSpPr>
-        <p:spPr>
-          <a:xfrm>
-            <a:off x="731520" y="4270248"/>
+          <p:cNvPr id="25" name="TextBox 24"/>
+          <p:cNvSpPr txBox="1"/>
+          <p:nvPr/>
+        </p:nvSpPr>
+        <p:spPr>
+          <a:xfrm>
+            <a:off x="731520" y="4590288"/>
             <a:ext cx="10774375" cy="502920"/>
           </a:xfrm>
           <a:prstGeom prst="rect">
@@ -7735,7 +12048,7 @@
                 </a:solidFill>
                 <a:latin typeface="Noto Sans KR"/>
               </a:rPr>
-              <a:t>05 / 10</a:t>
+              <a:t>05 / 13</a:t>
             </a:r>
           </a:p>
         </p:txBody>
@@ -7882,7 +12195,7 @@
         <p:spPr>
           <a:xfrm>
             <a:off x="731520" y="2011680"/>
-            <a:ext cx="548640" cy="914400"/>
+            <a:ext cx="548640" cy="1005840"/>
           </a:xfrm>
           <a:prstGeom prst="rect">
             <a:avLst/>
@@ -7916,7 +12229,7 @@
         </p:nvSpPr>
         <p:spPr>
           <a:xfrm>
-            <a:off x="1417320" y="2039112"/>
+            <a:off x="1417320" y="2057400"/>
             <a:ext cx="10088575" cy="320040"/>
           </a:xfrm>
           <a:prstGeom prst="rect">
@@ -7951,8 +12264,8 @@
         </p:nvSpPr>
         <p:spPr>
           <a:xfrm>
-            <a:off x="1417320" y="2350008"/>
-            <a:ext cx="10088575" cy="475488"/>
+            <a:off x="1417320" y="2368296"/>
+            <a:ext cx="10088575" cy="502920"/>
           </a:xfrm>
           <a:prstGeom prst="rect">
             <a:avLst/>
@@ -8073,7 +12386,7 @@
         <p:spPr>
           <a:xfrm>
             <a:off x="731520" y="3127248"/>
-            <a:ext cx="548640" cy="914400"/>
+            <a:ext cx="548640" cy="1005840"/>
           </a:xfrm>
           <a:prstGeom prst="rect">
             <a:avLst/>
@@ -8107,7 +12420,7 @@
         </p:nvSpPr>
         <p:spPr>
           <a:xfrm>
-            <a:off x="1417320" y="3154680"/>
+            <a:off x="1417320" y="3172968"/>
             <a:ext cx="10088575" cy="320040"/>
           </a:xfrm>
           <a:prstGeom prst="rect">
@@ -8142,8 +12455,8 @@
         </p:nvSpPr>
         <p:spPr>
           <a:xfrm>
-            <a:off x="1417320" y="3465576"/>
-            <a:ext cx="10088575" cy="475488"/>
+            <a:off x="1417320" y="3483864"/>
+            <a:ext cx="10088575" cy="502920"/>
           </a:xfrm>
           <a:prstGeom prst="rect">
             <a:avLst/>
@@ -8264,7 +12577,7 @@
         <p:spPr>
           <a:xfrm>
             <a:off x="731520" y="4242816"/>
-            <a:ext cx="548640" cy="914400"/>
+            <a:ext cx="548640" cy="1005840"/>
           </a:xfrm>
           <a:prstGeom prst="rect">
             <a:avLst/>
@@ -8298,7 +12611,7 @@
         </p:nvSpPr>
         <p:spPr>
           <a:xfrm>
-            <a:off x="1417320" y="4270248"/>
+            <a:off x="1417320" y="4288536"/>
             <a:ext cx="10088575" cy="320040"/>
           </a:xfrm>
           <a:prstGeom prst="rect">
@@ -8333,8 +12646,8 @@
         </p:nvSpPr>
         <p:spPr>
           <a:xfrm>
-            <a:off x="1417320" y="4581144"/>
-            <a:ext cx="10088575" cy="475488"/>
+            <a:off x="1417320" y="4599432"/>
+            <a:ext cx="10088575" cy="502920"/>
           </a:xfrm>
           <a:prstGeom prst="rect">
             <a:avLst/>
@@ -8368,7 +12681,7 @@
         </p:nvSpPr>
         <p:spPr>
           <a:xfrm>
-            <a:off x="548640" y="5074920"/>
+            <a:off x="548640" y="5120640"/>
             <a:ext cx="11094415" cy="384048"/>
           </a:xfrm>
           <a:prstGeom prst="rect">
@@ -8720,7 +13033,7 @@
                 </a:solidFill>
                 <a:latin typeface="Noto Sans KR"/>
               </a:rPr>
-              <a:t>06 / 10</a:t>
+              <a:t>06 / 13</a:t>
             </a:r>
           </a:p>
         </p:txBody>
@@ -8860,8 +13173,8 @@
         </p:nvSpPr>
         <p:spPr>
           <a:xfrm>
-            <a:off x="548640" y="2286000"/>
-            <a:ext cx="54864" cy="594360"/>
+            <a:off x="548640" y="2304288"/>
+            <a:ext cx="54864" cy="658368"/>
           </a:xfrm>
           <a:prstGeom prst="rect">
             <a:avLst/>
@@ -8903,8 +13216,8 @@
         </p:nvSpPr>
         <p:spPr>
           <a:xfrm>
-            <a:off x="603504" y="2286000"/>
-            <a:ext cx="11039551" cy="594360"/>
+            <a:off x="603504" y="2304288"/>
+            <a:ext cx="11039551" cy="658368"/>
           </a:xfrm>
           <a:prstGeom prst="rect">
             <a:avLst/>
@@ -8946,7 +13259,7 @@
         </p:nvSpPr>
         <p:spPr>
           <a:xfrm>
-            <a:off x="685800" y="2322576"/>
+            <a:off x="685800" y="2340864"/>
             <a:ext cx="548640" cy="256032"/>
           </a:xfrm>
           <a:prstGeom prst="rect">
@@ -8981,8 +13294,8 @@
         </p:nvSpPr>
         <p:spPr>
           <a:xfrm>
-            <a:off x="685800" y="2542032"/>
-            <a:ext cx="10820095" cy="338328"/>
+            <a:off x="685800" y="2560320"/>
+            <a:ext cx="10820095" cy="402336"/>
           </a:xfrm>
           <a:prstGeom prst="rect">
             <a:avLst/>
@@ -9003,7 +13316,8 @@
                 </a:solidFill>
                 <a:latin typeface="Noto Sans KR"/>
               </a:rPr>
-              <a:t>첫 달부터 환자가 줄 서는 기적은 없습니다. '임계점'을 넘는 순간 반드시 폭발합니다.</a:t>
+              <a:t>첫 달부터 환자가 줄 서는 기적은 없습니다.
+'임계점'을 넘는 순간 반드시 폭발합니다.</a:t>
             </a:r>
           </a:p>
         </p:txBody>
@@ -9016,7 +13330,7 @@
         </p:nvSpPr>
         <p:spPr>
           <a:xfrm>
-            <a:off x="548640" y="3017520"/>
+            <a:off x="548640" y="3090672"/>
             <a:ext cx="11094415" cy="411480"/>
           </a:xfrm>
           <a:prstGeom prst="rect">
@@ -9051,7 +13365,7 @@
         </p:nvSpPr>
         <p:spPr>
           <a:xfrm>
-            <a:off x="548640" y="3566160"/>
+            <a:off x="548640" y="3657600"/>
             <a:ext cx="3200400" cy="777240"/>
           </a:xfrm>
           <a:prstGeom prst="rect">
@@ -9121,7 +13435,7 @@
         </p:nvSpPr>
         <p:spPr>
           <a:xfrm>
-            <a:off x="4023360" y="3566160"/>
+            <a:off x="4023360" y="3657600"/>
             <a:ext cx="3200400" cy="777240"/>
           </a:xfrm>
           <a:prstGeom prst="rect">
@@ -9191,7 +13505,7 @@
         </p:nvSpPr>
         <p:spPr>
           <a:xfrm>
-            <a:off x="7498080" y="3566160"/>
+            <a:off x="7498080" y="3657600"/>
             <a:ext cx="3200400" cy="777240"/>
           </a:xfrm>
           <a:prstGeom prst="rect">
@@ -9578,7 +13892,7 @@
                 </a:solidFill>
                 <a:latin typeface="Noto Sans KR"/>
               </a:rPr>
-              <a:t>07 / 10</a:t>
+              <a:t>07 / 13</a:t>
             </a:r>
           </a:p>
         </p:txBody>
@@ -9816,7 +14130,7 @@
                 </a:solidFill>
                 <a:latin typeface="Noto Sans KR"/>
               </a:rPr>
-              <a:t>· 병원 정체성 확립, 네이버 AI 신뢰 데이터 축적</a:t>
+              <a:t>· 병원의 정체성을 확립하고 네이버 AI가 신뢰할 만한 고퀄리티 데이터를 쌓는 시기</a:t>
             </a:r>
           </a:p>
         </p:txBody>
@@ -9851,7 +14165,7 @@
                 </a:solidFill>
                 <a:latin typeface="Noto Sans KR"/>
               </a:rPr>
-              <a:t>· 플레이스 상위노출 최적화 동시 진행</a:t>
+              <a:t>· 플레이스 상위노출 최적화를 동시에 진행하며 유입의 물꼬를 트는 단계</a:t>
             </a:r>
           </a:p>
         </p:txBody>
@@ -10077,7 +14391,7 @@
                 </a:solidFill>
                 <a:latin typeface="Noto Sans KR"/>
               </a:rPr>
-              <a:t>· "블로그 보고 왔어요", "플레이스 보고 전화드렸어요"</a:t>
+              <a:t>· "블로그 보고 왔어요", "플레이스 보고 전화드렸어요"가 들리기 시작</a:t>
             </a:r>
           </a:p>
         </p:txBody>
@@ -10303,7 +14617,7 @@
                 </a:solidFill>
                 <a:latin typeface="Noto Sans KR"/>
               </a:rPr>
-              <a:t>· '디지털 부동산' 복리 효과 폭발</a:t>
+              <a:t>· '디지털 부동산' 복리 효과가 터지고, 주요 황금 키워드를 점유</a:t>
             </a:r>
           </a:p>
         </p:txBody>
@@ -10338,7 +14652,7 @@
                 </a:solidFill>
                 <a:latin typeface="Noto Sans KR"/>
               </a:rPr>
-              <a:t>· 주요 황금 키워드 점유, 경쟁 병원과 격차 확대</a:t>
+              <a:t>· 경쟁 병원과 격차가 빠르게 확대</a:t>
             </a:r>
           </a:p>
         </p:txBody>
@@ -10668,7 +14982,7 @@
                 </a:solidFill>
                 <a:latin typeface="Noto Sans KR"/>
               </a:rPr>
-              <a:t>08 / 10</a:t>
+              <a:t>08 / 13</a:t>
             </a:r>
           </a:p>
         </p:txBody>
@@ -10808,7 +15122,7 @@
         </p:nvSpPr>
         <p:spPr>
           <a:xfrm>
-            <a:off x="548640" y="2286000"/>
+            <a:off x="548640" y="2304288"/>
             <a:ext cx="54864" cy="594360"/>
           </a:xfrm>
           <a:prstGeom prst="rect">
@@ -10851,7 +15165,7 @@
         </p:nvSpPr>
         <p:spPr>
           <a:xfrm>
-            <a:off x="603504" y="2286000"/>
+            <a:off x="603504" y="2304288"/>
             <a:ext cx="11039551" cy="594360"/>
           </a:xfrm>
           <a:prstGeom prst="rect">
@@ -10894,7 +15208,7 @@
         </p:nvSpPr>
         <p:spPr>
           <a:xfrm>
-            <a:off x="685800" y="2322576"/>
+            <a:off x="685800" y="2340864"/>
             <a:ext cx="548640" cy="256032"/>
           </a:xfrm>
           <a:prstGeom prst="rect">
@@ -10929,7 +15243,7 @@
         </p:nvSpPr>
         <p:spPr>
           <a:xfrm>
-            <a:off x="685800" y="2542032"/>
+            <a:off x="685800" y="2560320"/>
             <a:ext cx="10820095" cy="338328"/>
           </a:xfrm>
           <a:prstGeom prst="rect">
@@ -10958,14 +15272,49 @@
       </p:sp>
       <p:sp>
         <p:nvSpPr>
-          <p:cNvPr id="17" name="Rectangle 16"/>
+          <p:cNvPr id="17" name="TextBox 16"/>
+          <p:cNvSpPr txBox="1"/>
+          <p:nvPr/>
+        </p:nvSpPr>
+        <p:spPr>
+          <a:xfrm>
+            <a:off x="548640" y="3035808"/>
+            <a:ext cx="11094415" cy="347472"/>
+          </a:xfrm>
+          <a:prstGeom prst="rect">
+            <a:avLst/>
+          </a:prstGeom>
+          <a:noFill/>
+        </p:spPr>
+        <p:txBody>
+          <a:bodyPr wrap="square">
+            <a:spAutoFit/>
+          </a:bodyPr>
+          <a:lstStyle/>
+          <a:p>
+            <a:pPr algn="l"/>
+            <a:r>
+              <a:rPr sz="1200" b="1">
+                <a:solidFill>
+                  <a:srgbClr val="0F1923"/>
+                </a:solidFill>
+                <a:latin typeface="Noto Sans KR"/>
+              </a:rPr>
+              <a:t>마케팅천재의 '전문성 복제' 시스템</a:t>
+            </a:r>
+          </a:p>
+        </p:txBody>
+      </p:sp>
+      <p:sp>
+        <p:nvSpPr>
+          <p:cNvPr id="18" name="Rectangle 17"/>
           <p:cNvSpPr/>
           <p:nvPr/>
         </p:nvSpPr>
         <p:spPr>
           <a:xfrm>
-            <a:off x="548640" y="3063240"/>
-            <a:ext cx="3606698" cy="1234440"/>
+            <a:off x="548640" y="3474720"/>
+            <a:ext cx="3606698" cy="1188720"/>
           </a:xfrm>
           <a:prstGeom prst="rect">
             <a:avLst/>
@@ -11001,13 +15350,13 @@
       </p:sp>
       <p:sp>
         <p:nvSpPr>
-          <p:cNvPr id="18" name="Rectangle 17"/>
+          <p:cNvPr id="19" name="Rectangle 18"/>
           <p:cNvSpPr/>
           <p:nvPr/>
         </p:nvSpPr>
         <p:spPr>
           <a:xfrm>
-            <a:off x="548640" y="3063240"/>
+            <a:off x="548640" y="3474720"/>
             <a:ext cx="3606698" cy="54864"/>
           </a:xfrm>
           <a:prstGeom prst="rect">
@@ -11044,13 +15393,13 @@
       </p:sp>
       <p:sp>
         <p:nvSpPr>
-          <p:cNvPr id="19" name="TextBox 18"/>
-          <p:cNvSpPr txBox="1"/>
-          <p:nvPr/>
-        </p:nvSpPr>
-        <p:spPr>
-          <a:xfrm>
-            <a:off x="685800" y="3172968"/>
+          <p:cNvPr id="20" name="TextBox 19"/>
+          <p:cNvSpPr txBox="1"/>
+          <p:nvPr/>
+        </p:nvSpPr>
+        <p:spPr>
+          <a:xfrm>
+            <a:off x="685800" y="3584448"/>
             <a:ext cx="3332378" cy="292608"/>
           </a:xfrm>
           <a:prstGeom prst="rect">
@@ -11079,14 +15428,14 @@
       </p:sp>
       <p:sp>
         <p:nvSpPr>
-          <p:cNvPr id="20" name="TextBox 19"/>
-          <p:cNvSpPr txBox="1"/>
-          <p:nvPr/>
-        </p:nvSpPr>
-        <p:spPr>
-          <a:xfrm>
-            <a:off x="685800" y="3465576"/>
-            <a:ext cx="3332378" cy="832104"/>
+          <p:cNvPr id="21" name="TextBox 20"/>
+          <p:cNvSpPr txBox="1"/>
+          <p:nvPr/>
+        </p:nvSpPr>
+        <p:spPr>
+          <a:xfrm>
+            <a:off x="685800" y="3877056"/>
+            <a:ext cx="3332378" cy="786384"/>
           </a:xfrm>
           <a:prstGeom prst="rect">
             <a:avLst/>
@@ -11114,14 +15463,14 @@
       </p:sp>
       <p:sp>
         <p:nvSpPr>
-          <p:cNvPr id="21" name="Rectangle 20"/>
+          <p:cNvPr id="22" name="Rectangle 21"/>
           <p:cNvSpPr/>
           <p:nvPr/>
         </p:nvSpPr>
         <p:spPr>
           <a:xfrm>
-            <a:off x="4292498" y="3063240"/>
-            <a:ext cx="3606698" cy="1234440"/>
+            <a:off x="4292498" y="3474720"/>
+            <a:ext cx="3606698" cy="1188720"/>
           </a:xfrm>
           <a:prstGeom prst="rect">
             <a:avLst/>
@@ -11157,13 +15506,13 @@
       </p:sp>
       <p:sp>
         <p:nvSpPr>
-          <p:cNvPr id="22" name="Rectangle 21"/>
+          <p:cNvPr id="23" name="Rectangle 22"/>
           <p:cNvSpPr/>
           <p:nvPr/>
         </p:nvSpPr>
         <p:spPr>
           <a:xfrm>
-            <a:off x="4292498" y="3063240"/>
+            <a:off x="4292498" y="3474720"/>
             <a:ext cx="3606698" cy="54864"/>
           </a:xfrm>
           <a:prstGeom prst="rect">
@@ -11200,13 +15549,13 @@
       </p:sp>
       <p:sp>
         <p:nvSpPr>
-          <p:cNvPr id="23" name="TextBox 22"/>
-          <p:cNvSpPr txBox="1"/>
-          <p:nvPr/>
-        </p:nvSpPr>
-        <p:spPr>
-          <a:xfrm>
-            <a:off x="4429658" y="3172968"/>
+          <p:cNvPr id="24" name="TextBox 23"/>
+          <p:cNvSpPr txBox="1"/>
+          <p:nvPr/>
+        </p:nvSpPr>
+        <p:spPr>
+          <a:xfrm>
+            <a:off x="4429658" y="3584448"/>
             <a:ext cx="3332378" cy="292608"/>
           </a:xfrm>
           <a:prstGeom prst="rect">
@@ -11235,14 +15584,14 @@
       </p:sp>
       <p:sp>
         <p:nvSpPr>
-          <p:cNvPr id="24" name="TextBox 23"/>
-          <p:cNvSpPr txBox="1"/>
-          <p:nvPr/>
-        </p:nvSpPr>
-        <p:spPr>
-          <a:xfrm>
-            <a:off x="4429658" y="3465576"/>
-            <a:ext cx="3332378" cy="832104"/>
+          <p:cNvPr id="25" name="TextBox 24"/>
+          <p:cNvSpPr txBox="1"/>
+          <p:nvPr/>
+        </p:nvSpPr>
+        <p:spPr>
+          <a:xfrm>
+            <a:off x="4429658" y="3877056"/>
+            <a:ext cx="3332378" cy="786384"/>
           </a:xfrm>
           <a:prstGeom prst="rect">
             <a:avLst/>
@@ -11270,14 +15619,14 @@
       </p:sp>
       <p:sp>
         <p:nvSpPr>
-          <p:cNvPr id="25" name="Rectangle 24"/>
+          <p:cNvPr id="26" name="Rectangle 25"/>
           <p:cNvSpPr/>
           <p:nvPr/>
         </p:nvSpPr>
         <p:spPr>
           <a:xfrm>
-            <a:off x="8036356" y="3063240"/>
-            <a:ext cx="3606698" cy="1234440"/>
+            <a:off x="8036356" y="3474720"/>
+            <a:ext cx="3606698" cy="1188720"/>
           </a:xfrm>
           <a:prstGeom prst="rect">
             <a:avLst/>
@@ -11313,13 +15662,13 @@
       </p:sp>
       <p:sp>
         <p:nvSpPr>
-          <p:cNvPr id="26" name="Rectangle 25"/>
+          <p:cNvPr id="27" name="Rectangle 26"/>
           <p:cNvSpPr/>
           <p:nvPr/>
         </p:nvSpPr>
         <p:spPr>
           <a:xfrm>
-            <a:off x="8036356" y="3063240"/>
+            <a:off x="8036356" y="3474720"/>
             <a:ext cx="3606698" cy="54864"/>
           </a:xfrm>
           <a:prstGeom prst="rect">
@@ -11356,13 +15705,13 @@
       </p:sp>
       <p:sp>
         <p:nvSpPr>
-          <p:cNvPr id="27" name="TextBox 26"/>
-          <p:cNvSpPr txBox="1"/>
-          <p:nvPr/>
-        </p:nvSpPr>
-        <p:spPr>
-          <a:xfrm>
-            <a:off x="8173516" y="3172968"/>
+          <p:cNvPr id="28" name="TextBox 27"/>
+          <p:cNvSpPr txBox="1"/>
+          <p:nvPr/>
+        </p:nvSpPr>
+        <p:spPr>
+          <a:xfrm>
+            <a:off x="8173516" y="3584448"/>
             <a:ext cx="3332378" cy="292608"/>
           </a:xfrm>
           <a:prstGeom prst="rect">
@@ -11391,14 +15740,14 @@
       </p:sp>
       <p:sp>
         <p:nvSpPr>
-          <p:cNvPr id="28" name="TextBox 27"/>
-          <p:cNvSpPr txBox="1"/>
-          <p:nvPr/>
-        </p:nvSpPr>
-        <p:spPr>
-          <a:xfrm>
-            <a:off x="8173516" y="3465576"/>
-            <a:ext cx="3332378" cy="832104"/>
+          <p:cNvPr id="29" name="TextBox 28"/>
+          <p:cNvSpPr txBox="1"/>
+          <p:nvPr/>
+        </p:nvSpPr>
+        <p:spPr>
+          <a:xfrm>
+            <a:off x="8173516" y="3877056"/>
+            <a:ext cx="3332378" cy="786384"/>
           </a:xfrm>
           <a:prstGeom prst="rect">
             <a:avLst/>
@@ -11426,13 +15775,13 @@
       </p:sp>
       <p:sp>
         <p:nvSpPr>
-          <p:cNvPr id="29" name="TextBox 28"/>
-          <p:cNvSpPr txBox="1"/>
-          <p:nvPr/>
-        </p:nvSpPr>
-        <p:spPr>
-          <a:xfrm>
-            <a:off x="548640" y="4480559"/>
+          <p:cNvPr id="30" name="TextBox 29"/>
+          <p:cNvSpPr txBox="1"/>
+          <p:nvPr/>
+        </p:nvSpPr>
+        <p:spPr>
+          <a:xfrm>
+            <a:off x="548640" y="4800600"/>
             <a:ext cx="11094415" cy="384048"/>
           </a:xfrm>
           <a:prstGeom prst="rect">
@@ -11784,7 +16133,7 @@
                 </a:solidFill>
                 <a:latin typeface="Noto Sans KR"/>
               </a:rPr>
-              <a:t>09 / 10</a:t>
+              <a:t>09 / 13</a:t>
             </a:r>
           </a:p>
         </p:txBody>
@@ -11797,7 +16146,7 @@
         </p:nvSpPr>
         <p:spPr>
           <a:xfrm>
-            <a:off x="548640" y="731520"/>
+            <a:off x="548640" y="685800"/>
             <a:ext cx="1097280" cy="292608"/>
           </a:xfrm>
           <a:prstGeom prst="rect">
@@ -11842,7 +16191,7 @@
         </p:nvSpPr>
         <p:spPr>
           <a:xfrm>
-            <a:off x="621792" y="731520"/>
+            <a:off x="621792" y="685800"/>
             <a:ext cx="1005840" cy="292608"/>
           </a:xfrm>
           <a:prstGeom prst="rect">
@@ -11877,23 +16226,23 @@
         </p:nvSpPr>
         <p:spPr>
           <a:xfrm>
-            <a:off x="548640" y="1097280"/>
-            <a:ext cx="11094415" cy="1097280"/>
-          </a:xfrm>
-          <a:prstGeom prst="rect">
-            <a:avLst/>
-          </a:prstGeom>
-          <a:noFill/>
-        </p:spPr>
-        <p:txBody>
-          <a:bodyPr wrap="square">
-            <a:spAutoFit/>
-          </a:bodyPr>
-          <a:lstStyle/>
-          <a:p>
-            <a:pPr algn="l"/>
-            <a:r>
-              <a:rPr sz="2200" b="1">
+            <a:off x="548640" y="1033272"/>
+            <a:ext cx="11094415" cy="1005840"/>
+          </a:xfrm>
+          <a:prstGeom prst="rect">
+            <a:avLst/>
+          </a:prstGeom>
+          <a:noFill/>
+        </p:spPr>
+        <p:txBody>
+          <a:bodyPr wrap="square">
+            <a:spAutoFit/>
+          </a:bodyPr>
+          <a:lstStyle/>
+          <a:p>
+            <a:pPr algn="l"/>
+            <a:r>
+              <a:rPr sz="2100" b="1">
                 <a:solidFill>
                   <a:srgbClr val="0F1923"/>
                 </a:solidFill>
@@ -11905,7 +16254,7 @@
           <a:p>
             <a:pPr algn="l"/>
             <a:r>
-              <a:rPr sz="2200" b="1">
+              <a:rPr sz="2100" b="1">
                 <a:solidFill>
                   <a:srgbClr val="0F1923"/>
                 </a:solidFill>
@@ -11924,8 +16273,8 @@
         </p:nvSpPr>
         <p:spPr>
           <a:xfrm>
-            <a:off x="548640" y="2286000"/>
-            <a:ext cx="54864" cy="594360"/>
+            <a:off x="548640" y="2148840"/>
+            <a:ext cx="54864" cy="530352"/>
           </a:xfrm>
           <a:prstGeom prst="rect">
             <a:avLst/>
@@ -11967,8 +16316,8 @@
         </p:nvSpPr>
         <p:spPr>
           <a:xfrm>
-            <a:off x="603504" y="2286000"/>
-            <a:ext cx="11039551" cy="594360"/>
+            <a:off x="603504" y="2148840"/>
+            <a:ext cx="11039551" cy="530352"/>
           </a:xfrm>
           <a:prstGeom prst="rect">
             <a:avLst/>
@@ -12010,7 +16359,7 @@
         </p:nvSpPr>
         <p:spPr>
           <a:xfrm>
-            <a:off x="685800" y="2322576"/>
+            <a:off x="685800" y="2185416"/>
             <a:ext cx="548640" cy="256032"/>
           </a:xfrm>
           <a:prstGeom prst="rect">
@@ -12045,8 +16394,8 @@
         </p:nvSpPr>
         <p:spPr>
           <a:xfrm>
-            <a:off x="685800" y="2542032"/>
-            <a:ext cx="10820095" cy="338328"/>
+            <a:off x="685800" y="2404872"/>
+            <a:ext cx="10820095" cy="274320"/>
           </a:xfrm>
           <a:prstGeom prst="rect">
             <a:avLst/>
@@ -12080,8 +16429,8 @@
         </p:nvSpPr>
         <p:spPr>
           <a:xfrm>
-            <a:off x="548640" y="3063240"/>
-            <a:ext cx="54864" cy="1828800"/>
+            <a:off x="548640" y="2788920"/>
+            <a:ext cx="54864" cy="1417320"/>
           </a:xfrm>
           <a:prstGeom prst="rect">
             <a:avLst/>
@@ -12123,8 +16472,8 @@
         </p:nvSpPr>
         <p:spPr>
           <a:xfrm>
-            <a:off x="603504" y="3063240"/>
-            <a:ext cx="11039551" cy="1828800"/>
+            <a:off x="603504" y="2788920"/>
+            <a:ext cx="11039551" cy="1417320"/>
           </a:xfrm>
           <a:prstGeom prst="rect">
             <a:avLst/>
@@ -12166,8 +16515,8 @@
         </p:nvSpPr>
         <p:spPr>
           <a:xfrm>
-            <a:off x="731520" y="3172968"/>
-            <a:ext cx="10774375" cy="347472"/>
+            <a:off x="731520" y="2880360"/>
+            <a:ext cx="10774375" cy="320040"/>
           </a:xfrm>
           <a:prstGeom prst="rect">
             <a:avLst/>
@@ -12201,78 +16550,235 @@
         </p:nvSpPr>
         <p:spPr>
           <a:xfrm>
-            <a:off x="731520" y="3593592"/>
-            <a:ext cx="10774375" cy="347472"/>
-          </a:xfrm>
-          <a:prstGeom prst="rect">
-            <a:avLst/>
-          </a:prstGeom>
-          <a:noFill/>
-        </p:spPr>
-        <p:txBody>
-          <a:bodyPr wrap="square">
-            <a:spAutoFit/>
-          </a:bodyPr>
-          <a:lstStyle/>
-          <a:p>
-            <a:pPr algn="l"/>
-            <a:r>
-              <a:rPr sz="1000" b="0">
+            <a:off x="731520" y="3246120"/>
+            <a:ext cx="10774375" cy="502920"/>
+          </a:xfrm>
+          <a:prstGeom prst="rect">
+            <a:avLst/>
+          </a:prstGeom>
+          <a:noFill/>
+        </p:spPr>
+        <p:txBody>
+          <a:bodyPr wrap="square">
+            <a:spAutoFit/>
+          </a:bodyPr>
+          <a:lstStyle/>
+          <a:p>
+            <a:pPr algn="l"/>
+            <a:r>
+              <a:rPr sz="900" b="0">
+                <a:solidFill>
+                  <a:srgbClr val="4A5568"/>
+                </a:solidFill>
+                <a:latin typeface="Noto Sans KR"/>
+              </a:rPr>
+              <a:t>네이버 허용 계정 '3개'를 300% 활용: 원장님 명의로 성격이 다른 3개 채널을 동시 가동
+(공식/철학형 · 정보/키워드형 · 스토리형)</a:t>
+            </a:r>
+          </a:p>
+        </p:txBody>
+      </p:sp>
+      <p:sp>
+        <p:nvSpPr>
+          <p:cNvPr id="21" name="TextBox 20"/>
+          <p:cNvSpPr txBox="1"/>
+          <p:nvPr/>
+        </p:nvSpPr>
+        <p:spPr>
+          <a:xfrm>
+            <a:off x="731520" y="3794760"/>
+            <a:ext cx="10774375" cy="320040"/>
+          </a:xfrm>
+          <a:prstGeom prst="rect">
+            <a:avLst/>
+          </a:prstGeom>
+          <a:noFill/>
+        </p:spPr>
+        <p:txBody>
+          <a:bodyPr wrap="square">
+            <a:spAutoFit/>
+          </a:bodyPr>
+          <a:lstStyle/>
+          <a:p>
+            <a:pPr algn="l"/>
+            <a:r>
+              <a:rPr sz="1000" b="1">
+                <a:solidFill>
+                  <a:srgbClr val="1A6FD8"/>
+                </a:solidFill>
+                <a:latin typeface="Noto Sans KR"/>
+              </a:rPr>
+              <a:t>→ 경쟁 병원이 1개 채널로 싸울 때, 우리는 3개 채널로 검색 결과를 장악합니다.</a:t>
+            </a:r>
+          </a:p>
+        </p:txBody>
+      </p:sp>
+      <p:sp>
+        <p:nvSpPr>
+          <p:cNvPr id="22" name="Rectangle 21"/>
+          <p:cNvSpPr/>
+          <p:nvPr/>
+        </p:nvSpPr>
+        <p:spPr>
+          <a:xfrm>
+            <a:off x="548640" y="4343400"/>
+            <a:ext cx="54864" cy="822960"/>
+          </a:xfrm>
+          <a:prstGeom prst="rect">
+            <a:avLst/>
+          </a:prstGeom>
+          <a:solidFill>
+            <a:srgbClr val="558AD6"/>
+          </a:solidFill>
+          <a:ln>
+            <a:noFill/>
+          </a:ln>
+        </p:spPr>
+        <p:style>
+          <a:lnRef idx="1">
+            <a:schemeClr val="accent1"/>
+          </a:lnRef>
+          <a:fillRef idx="3">
+            <a:schemeClr val="accent1"/>
+          </a:fillRef>
+          <a:effectRef idx="2">
+            <a:schemeClr val="accent1"/>
+          </a:effectRef>
+          <a:fontRef idx="minor">
+            <a:schemeClr val="lt1"/>
+          </a:fontRef>
+        </p:style>
+        <p:txBody>
+          <a:bodyPr rtlCol="0" anchor="ctr"/>
+          <a:lstStyle/>
+          <a:p>
+            <a:pPr algn="ctr"/>
+          </a:p>
+        </p:txBody>
+      </p:sp>
+      <p:sp>
+        <p:nvSpPr>
+          <p:cNvPr id="23" name="Rectangle 22"/>
+          <p:cNvSpPr/>
+          <p:nvPr/>
+        </p:nvSpPr>
+        <p:spPr>
+          <a:xfrm>
+            <a:off x="603504" y="4343400"/>
+            <a:ext cx="11039551" cy="822960"/>
+          </a:xfrm>
+          <a:prstGeom prst="rect">
+            <a:avLst/>
+          </a:prstGeom>
+          <a:solidFill>
+            <a:srgbClr val="F0F5FF"/>
+          </a:solidFill>
+          <a:ln>
+            <a:noFill/>
+          </a:ln>
+        </p:spPr>
+        <p:style>
+          <a:lnRef idx="1">
+            <a:schemeClr val="accent1"/>
+          </a:lnRef>
+          <a:fillRef idx="3">
+            <a:schemeClr val="accent1"/>
+          </a:fillRef>
+          <a:effectRef idx="2">
+            <a:schemeClr val="accent1"/>
+          </a:effectRef>
+          <a:fontRef idx="minor">
+            <a:schemeClr val="lt1"/>
+          </a:fontRef>
+        </p:style>
+        <p:txBody>
+          <a:bodyPr rtlCol="0" anchor="ctr"/>
+          <a:lstStyle/>
+          <a:p>
+            <a:pPr algn="ctr"/>
+          </a:p>
+        </p:txBody>
+      </p:sp>
+      <p:sp>
+        <p:nvSpPr>
+          <p:cNvPr id="24" name="TextBox 23"/>
+          <p:cNvSpPr txBox="1"/>
+          <p:nvPr/>
+        </p:nvSpPr>
+        <p:spPr>
+          <a:xfrm>
+            <a:off x="731520" y="4389120"/>
+            <a:ext cx="10774375" cy="274320"/>
+          </a:xfrm>
+          <a:prstGeom prst="rect">
+            <a:avLst/>
+          </a:prstGeom>
+          <a:noFill/>
+        </p:spPr>
+        <p:txBody>
+          <a:bodyPr wrap="square">
+            <a:spAutoFit/>
+          </a:bodyPr>
+          <a:lstStyle/>
+          <a:p>
+            <a:pPr algn="l"/>
+            <a:r>
+              <a:rPr sz="1000" b="1">
                 <a:solidFill>
                   <a:srgbClr val="0F1923"/>
                 </a:solidFill>
                 <a:latin typeface="Noto Sans KR"/>
               </a:rPr>
-              <a:t>네이버 허용 계정 '3개'를 300% 활용: 원장님 명의로 성격이 다른 3개 채널을 동시 가동</a:t>
-            </a:r>
-          </a:p>
-        </p:txBody>
-      </p:sp>
-      <p:sp>
-        <p:nvSpPr>
-          <p:cNvPr id="21" name="TextBox 20"/>
-          <p:cNvSpPr txBox="1"/>
-          <p:nvPr/>
-        </p:nvSpPr>
-        <p:spPr>
-          <a:xfrm>
-            <a:off x="731520" y="3959352"/>
-            <a:ext cx="10774375" cy="292608"/>
-          </a:xfrm>
-          <a:prstGeom prst="rect">
-            <a:avLst/>
-          </a:prstGeom>
-          <a:noFill/>
-        </p:spPr>
-        <p:txBody>
-          <a:bodyPr wrap="square">
-            <a:spAutoFit/>
-          </a:bodyPr>
-          <a:lstStyle/>
-          <a:p>
-            <a:pPr algn="l"/>
-            <a:r>
-              <a:rPr sz="1000" b="0">
+              <a:t>3배 빠른 데이터 축적</a:t>
+            </a:r>
+          </a:p>
+        </p:txBody>
+      </p:sp>
+      <p:sp>
+        <p:nvSpPr>
+          <p:cNvPr id="25" name="TextBox 24"/>
+          <p:cNvSpPr txBox="1"/>
+          <p:nvPr/>
+        </p:nvSpPr>
+        <p:spPr>
+          <a:xfrm>
+            <a:off x="731520" y="4636008"/>
+            <a:ext cx="5364327" cy="274320"/>
+          </a:xfrm>
+          <a:prstGeom prst="rect">
+            <a:avLst/>
+          </a:prstGeom>
+          <a:noFill/>
+        </p:spPr>
+        <p:txBody>
+          <a:bodyPr wrap="square">
+            <a:spAutoFit/>
+          </a:bodyPr>
+          <a:lstStyle/>
+          <a:p>
+            <a:pPr algn="l"/>
+            <a:r>
+              <a:rPr sz="900" b="0">
                 <a:solidFill>
                   <a:srgbClr val="4A5568"/>
                 </a:solidFill>
                 <a:latin typeface="Noto Sans KR"/>
               </a:rPr>
-              <a:t>(공식/철학형 · 정보/키워드형 · 스토리형)</a:t>
-            </a:r>
-          </a:p>
-        </p:txBody>
-      </p:sp>
-      <p:sp>
-        <p:nvSpPr>
-          <p:cNvPr id="22" name="TextBox 21"/>
-          <p:cNvSpPr txBox="1"/>
-          <p:nvPr/>
-        </p:nvSpPr>
-        <p:spPr>
-          <a:xfrm>
-            <a:off x="731520" y="4297680"/>
-            <a:ext cx="10774375" cy="384048"/>
+              <a:t>단일 블로그 대비 양질의 콘텐츠가 더 빠르게 누적됩니다.</a:t>
+            </a:r>
+          </a:p>
+        </p:txBody>
+      </p:sp>
+      <p:sp>
+        <p:nvSpPr>
+          <p:cNvPr id="26" name="TextBox 25"/>
+          <p:cNvSpPr txBox="1"/>
+          <p:nvPr/>
+        </p:nvSpPr>
+        <p:spPr>
+          <a:xfrm>
+            <a:off x="6095847" y="4389120"/>
+            <a:ext cx="5455767" cy="274320"/>
           </a:xfrm>
           <a:prstGeom prst="rect">
             <a:avLst/>
@@ -12289,24 +16795,59 @@
             <a:r>
               <a:rPr sz="1000" b="1">
                 <a:solidFill>
-                  <a:srgbClr val="1A6FD8"/>
-                </a:solidFill>
-                <a:latin typeface="Noto Sans KR"/>
-              </a:rPr>
-              <a:t>→ 경쟁 병원이 1개 채널로 싸울 때, 우리는 3개 채널로 검색 결과를 장악합니다.</a:t>
-            </a:r>
-          </a:p>
-        </p:txBody>
-      </p:sp>
-      <p:sp>
-        <p:nvSpPr>
-          <p:cNvPr id="23" name="TextBox 22"/>
-          <p:cNvSpPr txBox="1"/>
-          <p:nvPr/>
-        </p:nvSpPr>
-        <p:spPr>
-          <a:xfrm>
-            <a:off x="548640" y="5029200"/>
+                  <a:srgbClr val="0F1923"/>
+                </a:solidFill>
+                <a:latin typeface="Noto Sans KR"/>
+              </a:rPr>
+              <a:t>지역 대세감 형성</a:t>
+            </a:r>
+          </a:p>
+        </p:txBody>
+      </p:sp>
+      <p:sp>
+        <p:nvSpPr>
+          <p:cNvPr id="27" name="TextBox 26"/>
+          <p:cNvSpPr txBox="1"/>
+          <p:nvPr/>
+        </p:nvSpPr>
+        <p:spPr>
+          <a:xfrm>
+            <a:off x="6095847" y="4636008"/>
+            <a:ext cx="5455767" cy="320040"/>
+          </a:xfrm>
+          <a:prstGeom prst="rect">
+            <a:avLst/>
+          </a:prstGeom>
+          <a:noFill/>
+        </p:spPr>
+        <p:txBody>
+          <a:bodyPr wrap="square">
+            <a:spAutoFit/>
+          </a:bodyPr>
+          <a:lstStyle/>
+          <a:p>
+            <a:pPr algn="l"/>
+            <a:r>
+              <a:rPr sz="900" b="0">
+                <a:solidFill>
+                  <a:srgbClr val="4A5568"/>
+                </a:solidFill>
+                <a:latin typeface="Noto Sans KR"/>
+              </a:rPr>
+              <a:t>다양한 키워드 반복 노출 → '지역에서 핫한 병원' 인식이 빠르게 형성</a:t>
+            </a:r>
+          </a:p>
+        </p:txBody>
+      </p:sp>
+      <p:sp>
+        <p:nvSpPr>
+          <p:cNvPr id="28" name="TextBox 27"/>
+          <p:cNvSpPr txBox="1"/>
+          <p:nvPr/>
+        </p:nvSpPr>
+        <p:spPr>
+          <a:xfrm>
+            <a:off x="548640" y="5349240"/>
             <a:ext cx="11094415" cy="347472"/>
           </a:xfrm>
           <a:prstGeom prst="rect">
